--- a/presentation/KaryaSetu_Technical_Presentation.pptx
+++ b/presentation/KaryaSetu_Technical_Presentation.pptx
@@ -3094,102 +3094,23 @@
       <p:grpSpPr/>
       <p:sp>
         <p:nvSpPr>
-          <p:cNvPr id="2" name="TextBox 1"/>
-          <p:cNvSpPr txBox="1"/>
-          <p:nvPr/>
-        </p:nvSpPr>
-        <p:spPr>
-          <a:xfrm>
-            <a:off x="731520" y="731520"/>
-            <a:ext cx="10728655" cy="1645920"/>
+          <p:cNvPr id="2" name="Rectangle 1"/>
+          <p:cNvSpPr/>
+          <p:nvPr/>
+        </p:nvSpPr>
+        <p:spPr>
+          <a:xfrm>
+            <a:off x="0" y="0"/>
+            <a:ext cx="12191695" cy="6858000"/>
           </a:xfrm>
           <a:prstGeom prst="rect">
-            <a:avLst/>
-          </a:prstGeom>
-          <a:noFill/>
-        </p:spPr>
-        <p:txBody>
-          <a:bodyPr wrap="square">
-            <a:spAutoFit/>
-          </a:bodyPr>
-          <a:lstStyle/>
-          <a:p>
-            <a:pPr>
-              <a:spcAft>
-                <a:spcPts val="400"/>
-              </a:spcAft>
-              <a:defRPr sz="1100" b="1">
-                <a:solidFill>
-                  <a:srgbClr val="0284C7"/>
-                </a:solidFill>
-              </a:defRPr>
-            </a:pPr>
-            <a:r>
-              <a:t>SMART INDIA HACKATHON 2026 • THEME: BLOCKCHAIN &amp; CYBERSECURITY (PS ID: SIH 26154)</a:t>
-            </a:r>
-          </a:p>
-          <a:p>
-            <a:pPr>
-              <a:defRPr sz="3600" b="1">
-                <a:solidFill>
-                  <a:srgbClr val="0F172A"/>
-                </a:solidFill>
-              </a:defRPr>
-            </a:pPr>
-            <a:r>
-              <a:t>KARYASETU AI</a:t>
-            </a:r>
-          </a:p>
-          <a:p>
-            <a:pPr>
-              <a:spcAft>
-                <a:spcPts val="400"/>
-              </a:spcAft>
-              <a:defRPr sz="1600" b="1">
-                <a:solidFill>
-                  <a:srgbClr val="0D9488"/>
-                </a:solidFill>
-              </a:defRPr>
-            </a:pPr>
-            <a:r>
-              <a:t>Gen AI Platform for Automated Content Transformation</a:t>
-            </a:r>
-          </a:p>
-          <a:p>
-            <a:pPr>
-              <a:defRPr sz="1300" i="1">
-                <a:solidFill>
-                  <a:srgbClr val="475569"/>
-                </a:solidFill>
-              </a:defRPr>
-            </a:pPr>
-            <a:r>
-              <a:t>One Trusted Source → Seven Governed, Audience-Ready Deliverables</a:t>
-            </a:r>
-          </a:p>
-        </p:txBody>
-      </p:sp>
-      <p:sp>
-        <p:nvSpPr>
-          <p:cNvPr id="3" name="Rounded Rectangle 2"/>
-          <p:cNvSpPr/>
-          <p:nvPr/>
-        </p:nvSpPr>
-        <p:spPr>
-          <a:xfrm>
-            <a:off x="731520" y="2651760"/>
-            <a:ext cx="5120640" cy="3657600"/>
-          </a:xfrm>
-          <a:prstGeom prst="roundRect">
             <a:avLst/>
           </a:prstGeom>
           <a:solidFill>
             <a:srgbClr val="F8FAFC"/>
           </a:solidFill>
-          <a:ln w="19050">
-            <a:solidFill>
-              <a:srgbClr val="CBD5E1"/>
-            </a:solidFill>
+          <a:ln>
+            <a:noFill/>
           </a:ln>
         </p:spPr>
         <p:style>
@@ -3216,178 +3137,23 @@
       </p:sp>
       <p:sp>
         <p:nvSpPr>
-          <p:cNvPr id="4" name="TextBox 3"/>
-          <p:cNvSpPr txBox="1"/>
-          <p:nvPr/>
-        </p:nvSpPr>
-        <p:spPr>
-          <a:xfrm>
-            <a:off x="914400" y="2834640"/>
-            <a:ext cx="4754880" cy="3291840"/>
-          </a:xfrm>
-          <a:prstGeom prst="rect">
-            <a:avLst/>
-          </a:prstGeom>
-          <a:noFill/>
-        </p:spPr>
-        <p:txBody>
-          <a:bodyPr wrap="square">
-            <a:spAutoFit/>
-          </a:bodyPr>
-          <a:lstStyle/>
-          <a:p>
-            <a:pPr>
-              <a:spcAft>
-                <a:spcPts val="800"/>
-              </a:spcAft>
-              <a:defRPr sz="1600" b="1">
-                <a:solidFill>
-                  <a:srgbClr val="EA580C"/>
-                </a:solidFill>
-              </a:defRPr>
-            </a:pPr>
-            <a:r>
-              <a:t>THE PROBLEM</a:t>
-            </a:r>
-          </a:p>
-          <a:p>
-            <a:pPr>
-              <a:spcAft>
-                <a:spcPts val="600"/>
-              </a:spcAft>
-            </a:pPr>
-            <a:r>
-              <a:rPr b="1" sz="1100">
-                <a:solidFill>
-                  <a:srgbClr val="0F172A"/>
-                </a:solidFill>
-              </a:rPr>
-              <a:t>• Sensitive Data Exposure: </a:t>
-            </a:r>
-            <a:r>
-              <a:rPr sz="1050">
-                <a:solidFill>
-                  <a:srgbClr val="475569"/>
-                </a:solidFill>
-              </a:rPr>
-              <a:t>Confidential institutional records sent indiscriminately to external cloud LLMs violate data sovereignty regulations.</a:t>
-            </a:r>
-          </a:p>
-          <a:p>
-            <a:pPr>
-              <a:spcAft>
-                <a:spcPts val="600"/>
-              </a:spcAft>
-            </a:pPr>
-            <a:r>
-              <a:rPr b="1" sz="1100">
-                <a:solidFill>
-                  <a:srgbClr val="0F172A"/>
-                </a:solidFill>
-              </a:rPr>
-              <a:t>• Prompt Injection &amp; Manipulation: </a:t>
-            </a:r>
-            <a:r>
-              <a:rPr sz="1050">
-                <a:solidFill>
-                  <a:srgbClr val="475569"/>
-                </a:solidFill>
-              </a:rPr>
-              <a:t>Untrusted text and malicious instructions can hijack transformation workflows and leak secrets.</a:t>
-            </a:r>
-          </a:p>
-          <a:p>
-            <a:pPr>
-              <a:spcAft>
-                <a:spcPts val="600"/>
-              </a:spcAft>
-            </a:pPr>
-            <a:r>
-              <a:rPr b="1" sz="1100">
-                <a:solidFill>
-                  <a:srgbClr val="0F172A"/>
-                </a:solidFill>
-              </a:rPr>
-              <a:t>• Untrusted &amp; Floating Evidence: </a:t>
-            </a:r>
-            <a:r>
-              <a:rPr sz="1050">
-                <a:solidFill>
-                  <a:srgbClr val="475569"/>
-                </a:solidFill>
-              </a:rPr>
-              <a:t>Standard RAG models retrieve unverified context, hallucinate citations, and lack factual grounding.</a:t>
-            </a:r>
-          </a:p>
-          <a:p>
-            <a:pPr>
-              <a:spcAft>
-                <a:spcPts val="600"/>
-              </a:spcAft>
-            </a:pPr>
-            <a:r>
-              <a:rPr b="1" sz="1100">
-                <a:solidFill>
-                  <a:srgbClr val="0F172A"/>
-                </a:solidFill>
-              </a:rPr>
-              <a:t>• Cross-Output Fact Drift: </a:t>
-            </a:r>
-            <a:r>
-              <a:rPr sz="1050">
-                <a:solidFill>
-                  <a:srgbClr val="475569"/>
-                </a:solidFill>
-              </a:rPr>
-              <a:t>Multi-audience collateral (press releases, decks, briefs) diverges in numeric metrics and key findings.</a:t>
-            </a:r>
-          </a:p>
-          <a:p>
-            <a:pPr>
-              <a:spcAft>
-                <a:spcPts val="600"/>
-              </a:spcAft>
-            </a:pPr>
-            <a:r>
-              <a:rPr b="1" sz="1100">
-                <a:solidFill>
-                  <a:srgbClr val="0F172A"/>
-                </a:solidFill>
-              </a:rPr>
-              <a:t>• Manual Transformation Friction: </a:t>
-            </a:r>
-            <a:r>
-              <a:rPr sz="1050">
-                <a:solidFill>
-                  <a:srgbClr val="475569"/>
-                </a:solidFill>
-              </a:rPr>
-              <a:t>Converting complex source documents into audience-ready outputs requires days of error-prone human rework.</a:t>
-            </a:r>
-          </a:p>
-        </p:txBody>
-      </p:sp>
-      <p:sp>
-        <p:nvSpPr>
-          <p:cNvPr id="5" name="Rounded Rectangle 4"/>
+          <p:cNvPr id="3" name="Rounded Rectangle 2"/>
           <p:cNvSpPr/>
           <p:nvPr/>
         </p:nvSpPr>
         <p:spPr>
           <a:xfrm>
-            <a:off x="6309360" y="2651760"/>
-            <a:ext cx="5120640" cy="3657600"/>
+            <a:off x="731520" y="365760"/>
+            <a:ext cx="4206240" cy="292608"/>
           </a:xfrm>
           <a:prstGeom prst="roundRect">
             <a:avLst/>
           </a:prstGeom>
           <a:solidFill>
-            <a:srgbClr val="F0F9FF"/>
+            <a:srgbClr val="0284C7"/>
           </a:solidFill>
-          <a:ln w="19050">
-            <a:solidFill>
-              <a:srgbClr val="0284C7"/>
-            </a:solidFill>
+          <a:ln>
+            <a:noFill/>
           </a:ln>
         </p:spPr>
         <p:style>
@@ -3405,10 +3171,123 @@
           </a:fontRef>
         </p:style>
         <p:txBody>
-          <a:bodyPr rtlCol="0" anchor="ctr"/>
-          <a:lstStyle/>
-          <a:p>
-            <a:pPr algn="ctr"/>
+          <a:bodyPr rtlCol="0" anchor="ctr" wrap="none" lIns="0" tIns="0" rIns="0" bIns="0"/>
+          <a:lstStyle/>
+          <a:p>
+            <a:pPr algn="ctr">
+              <a:defRPr sz="900" b="1">
+                <a:solidFill>
+                  <a:srgbClr val="FFFFFF"/>
+                </a:solidFill>
+              </a:defRPr>
+            </a:pPr>
+            <a:r>
+              <a:t>SMART INDIA HACKATHON 2026  •  PS ID: SIH 26154</a:t>
+            </a:r>
+          </a:p>
+        </p:txBody>
+      </p:sp>
+      <p:sp>
+        <p:nvSpPr>
+          <p:cNvPr id="4" name="Rounded Rectangle 3"/>
+          <p:cNvSpPr/>
+          <p:nvPr/>
+        </p:nvSpPr>
+        <p:spPr>
+          <a:xfrm>
+            <a:off x="5029200" y="365760"/>
+            <a:ext cx="3108960" cy="292608"/>
+          </a:xfrm>
+          <a:prstGeom prst="roundRect">
+            <a:avLst/>
+          </a:prstGeom>
+          <a:solidFill>
+            <a:srgbClr val="10B981"/>
+          </a:solidFill>
+          <a:ln>
+            <a:noFill/>
+          </a:ln>
+        </p:spPr>
+        <p:style>
+          <a:lnRef idx="1">
+            <a:schemeClr val="accent1"/>
+          </a:lnRef>
+          <a:fillRef idx="3">
+            <a:schemeClr val="accent1"/>
+          </a:fillRef>
+          <a:effectRef idx="2">
+            <a:schemeClr val="accent1"/>
+          </a:effectRef>
+          <a:fontRef idx="minor">
+            <a:schemeClr val="lt1"/>
+          </a:fontRef>
+        </p:style>
+        <p:txBody>
+          <a:bodyPr rtlCol="0" anchor="ctr" wrap="none" lIns="0" tIns="0" rIns="0" bIns="0"/>
+          <a:lstStyle/>
+          <a:p>
+            <a:pPr algn="ctr">
+              <a:defRPr sz="900" b="1">
+                <a:solidFill>
+                  <a:srgbClr val="FFFFFF"/>
+                </a:solidFill>
+              </a:defRPr>
+            </a:pPr>
+            <a:r>
+              <a:t>THEME: BLOCKCHAIN &amp; CYBERSECURITY</a:t>
+            </a:r>
+          </a:p>
+        </p:txBody>
+      </p:sp>
+      <p:sp>
+        <p:nvSpPr>
+          <p:cNvPr id="5" name="Rounded Rectangle 4"/>
+          <p:cNvSpPr/>
+          <p:nvPr/>
+        </p:nvSpPr>
+        <p:spPr>
+          <a:xfrm>
+            <a:off x="8229600" y="365760"/>
+            <a:ext cx="3230575" cy="292608"/>
+          </a:xfrm>
+          <a:prstGeom prst="roundRect">
+            <a:avLst/>
+          </a:prstGeom>
+          <a:solidFill>
+            <a:srgbClr val="0B1220"/>
+          </a:solidFill>
+          <a:ln>
+            <a:noFill/>
+          </a:ln>
+        </p:spPr>
+        <p:style>
+          <a:lnRef idx="1">
+            <a:schemeClr val="accent1"/>
+          </a:lnRef>
+          <a:fillRef idx="3">
+            <a:schemeClr val="accent1"/>
+          </a:fillRef>
+          <a:effectRef idx="2">
+            <a:schemeClr val="accent1"/>
+          </a:effectRef>
+          <a:fontRef idx="minor">
+            <a:schemeClr val="lt1"/>
+          </a:fontRef>
+        </p:style>
+        <p:txBody>
+          <a:bodyPr rtlCol="0" anchor="ctr" wrap="none" lIns="0" tIns="0" rIns="0" bIns="0"/>
+          <a:lstStyle/>
+          <a:p>
+            <a:pPr algn="ctr">
+              <a:defRPr sz="900" b="1">
+                <a:solidFill>
+                  <a:srgbClr val="FFFFFF"/>
+                </a:solidFill>
+              </a:defRPr>
+            </a:pPr>
+            <a:r>
+              <a:t>TEAM ID: 135343  •  TEAM: KARYASETU</a:t>
+            </a:r>
           </a:p>
         </p:txBody>
       </p:sp>
@@ -3420,8 +3299,800 @@
         </p:nvSpPr>
         <p:spPr>
           <a:xfrm>
-            <a:off x="6492240" y="2834640"/>
-            <a:ext cx="4754880" cy="3291840"/>
+            <a:off x="731520" y="777240"/>
+            <a:ext cx="10728655" cy="1188720"/>
+          </a:xfrm>
+          <a:prstGeom prst="rect">
+            <a:avLst/>
+          </a:prstGeom>
+          <a:noFill/>
+        </p:spPr>
+        <p:txBody>
+          <a:bodyPr wrap="square" lIns="0" tIns="0" rIns="0" bIns="0">
+            <a:spAutoFit/>
+          </a:bodyPr>
+          <a:lstStyle/>
+          <a:p>
+            <a:pPr>
+              <a:defRPr sz="3000" b="1">
+                <a:solidFill>
+                  <a:srgbClr val="0B1220"/>
+                </a:solidFill>
+              </a:defRPr>
+            </a:pPr>
+            <a:r>
+              <a:t>KARYASETU AI (कार्यसेतु)</a:t>
+            </a:r>
+          </a:p>
+          <a:p>
+            <a:pPr>
+              <a:spcAft>
+                <a:spcPts val="200"/>
+              </a:spcAft>
+              <a:defRPr sz="1350" b="1">
+                <a:solidFill>
+                  <a:srgbClr val="0891B2"/>
+                </a:solidFill>
+              </a:defRPr>
+            </a:pPr>
+            <a:r>
+              <a:t>Zero-Trust Gen AI Platform for Governed Content Transformation, Dual-Route Orchestration &amp; Decentralized Provenance</a:t>
+            </a:r>
+          </a:p>
+          <a:p>
+            <a:pPr>
+              <a:defRPr sz="1100" b="0">
+                <a:solidFill>
+                  <a:srgbClr val="475569"/>
+                </a:solidFill>
+              </a:defRPr>
+            </a:pPr>
+            <a:r>
+              <a:t>One Trusted Source Document  ➔  Seven Governed, Audience-Tailored, Cryptographically Signed Deliverables in &lt;25 Seconds</a:t>
+            </a:r>
+          </a:p>
+        </p:txBody>
+      </p:sp>
+      <p:sp>
+        <p:nvSpPr>
+          <p:cNvPr id="7" name="Rounded Rectangle 6"/>
+          <p:cNvSpPr/>
+          <p:nvPr/>
+        </p:nvSpPr>
+        <p:spPr>
+          <a:xfrm>
+            <a:off x="731520" y="2057400"/>
+            <a:ext cx="2057400" cy="292608"/>
+          </a:xfrm>
+          <a:prstGeom prst="roundRect">
+            <a:avLst/>
+          </a:prstGeom>
+          <a:solidFill>
+            <a:srgbClr val="0891B2"/>
+          </a:solidFill>
+          <a:ln>
+            <a:noFill/>
+          </a:ln>
+        </p:spPr>
+        <p:style>
+          <a:lnRef idx="1">
+            <a:schemeClr val="accent1"/>
+          </a:lnRef>
+          <a:fillRef idx="3">
+            <a:schemeClr val="accent1"/>
+          </a:fillRef>
+          <a:effectRef idx="2">
+            <a:schemeClr val="accent1"/>
+          </a:effectRef>
+          <a:fontRef idx="minor">
+            <a:schemeClr val="lt1"/>
+          </a:fontRef>
+        </p:style>
+        <p:txBody>
+          <a:bodyPr rtlCol="0" anchor="ctr" wrap="none" lIns="0" tIns="0" rIns="0" bIns="0"/>
+          <a:lstStyle/>
+          <a:p>
+            <a:pPr algn="ctr">
+              <a:defRPr sz="900" b="1">
+                <a:solidFill>
+                  <a:srgbClr val="FFFFFF"/>
+                </a:solidFill>
+              </a:defRPr>
+            </a:pPr>
+            <a:r>
+              <a:t>⚡ &lt;25s Synthesis</a:t>
+            </a:r>
+          </a:p>
+        </p:txBody>
+      </p:sp>
+      <p:sp>
+        <p:nvSpPr>
+          <p:cNvPr id="8" name="Rounded Rectangle 7"/>
+          <p:cNvSpPr/>
+          <p:nvPr/>
+        </p:nvSpPr>
+        <p:spPr>
+          <a:xfrm>
+            <a:off x="2898648" y="2057400"/>
+            <a:ext cx="2057400" cy="292608"/>
+          </a:xfrm>
+          <a:prstGeom prst="roundRect">
+            <a:avLst/>
+          </a:prstGeom>
+          <a:solidFill>
+            <a:srgbClr val="7C3AED"/>
+          </a:solidFill>
+          <a:ln>
+            <a:noFill/>
+          </a:ln>
+        </p:spPr>
+        <p:style>
+          <a:lnRef idx="1">
+            <a:schemeClr val="accent1"/>
+          </a:lnRef>
+          <a:fillRef idx="3">
+            <a:schemeClr val="accent1"/>
+          </a:fillRef>
+          <a:effectRef idx="2">
+            <a:schemeClr val="accent1"/>
+          </a:effectRef>
+          <a:fontRef idx="minor">
+            <a:schemeClr val="lt1"/>
+          </a:fontRef>
+        </p:style>
+        <p:txBody>
+          <a:bodyPr rtlCol="0" anchor="ctr" wrap="none" lIns="0" tIns="0" rIns="0" bIns="0"/>
+          <a:lstStyle/>
+          <a:p>
+            <a:pPr algn="ctr">
+              <a:defRPr sz="900" b="1">
+                <a:solidFill>
+                  <a:srgbClr val="FFFFFF"/>
+                </a:solidFill>
+              </a:defRPr>
+            </a:pPr>
+            <a:r>
+              <a:t>🛡️ 0% Cloud Leakage</a:t>
+            </a:r>
+          </a:p>
+        </p:txBody>
+      </p:sp>
+      <p:sp>
+        <p:nvSpPr>
+          <p:cNvPr id="9" name="Rounded Rectangle 8"/>
+          <p:cNvSpPr/>
+          <p:nvPr/>
+        </p:nvSpPr>
+        <p:spPr>
+          <a:xfrm>
+            <a:off x="5065776" y="2057400"/>
+            <a:ext cx="2057400" cy="292608"/>
+          </a:xfrm>
+          <a:prstGeom prst="roundRect">
+            <a:avLst/>
+          </a:prstGeom>
+          <a:solidFill>
+            <a:srgbClr val="0284C7"/>
+          </a:solidFill>
+          <a:ln>
+            <a:noFill/>
+          </a:ln>
+        </p:spPr>
+        <p:style>
+          <a:lnRef idx="1">
+            <a:schemeClr val="accent1"/>
+          </a:lnRef>
+          <a:fillRef idx="3">
+            <a:schemeClr val="accent1"/>
+          </a:fillRef>
+          <a:effectRef idx="2">
+            <a:schemeClr val="accent1"/>
+          </a:effectRef>
+          <a:fontRef idx="minor">
+            <a:schemeClr val="lt1"/>
+          </a:fontRef>
+        </p:style>
+        <p:txBody>
+          <a:bodyPr rtlCol="0" anchor="ctr" wrap="none" lIns="0" tIns="0" rIns="0" bIns="0"/>
+          <a:lstStyle/>
+          <a:p>
+            <a:pPr algn="ctr">
+              <a:defRPr sz="900" b="1">
+                <a:solidFill>
+                  <a:srgbClr val="FFFFFF"/>
+                </a:solidFill>
+              </a:defRPr>
+            </a:pPr>
+            <a:r>
+              <a:t>⛓️ Ethereum Sepolia On-Chain</a:t>
+            </a:r>
+          </a:p>
+        </p:txBody>
+      </p:sp>
+      <p:sp>
+        <p:nvSpPr>
+          <p:cNvPr id="10" name="Rounded Rectangle 9"/>
+          <p:cNvSpPr/>
+          <p:nvPr/>
+        </p:nvSpPr>
+        <p:spPr>
+          <a:xfrm>
+            <a:off x="7232904" y="2057400"/>
+            <a:ext cx="2057400" cy="292608"/>
+          </a:xfrm>
+          <a:prstGeom prst="roundRect">
+            <a:avLst/>
+          </a:prstGeom>
+          <a:solidFill>
+            <a:srgbClr val="10B981"/>
+          </a:solidFill>
+          <a:ln>
+            <a:noFill/>
+          </a:ln>
+        </p:spPr>
+        <p:style>
+          <a:lnRef idx="1">
+            <a:schemeClr val="accent1"/>
+          </a:lnRef>
+          <a:fillRef idx="3">
+            <a:schemeClr val="accent1"/>
+          </a:fillRef>
+          <a:effectRef idx="2">
+            <a:schemeClr val="accent1"/>
+          </a:effectRef>
+          <a:fontRef idx="minor">
+            <a:schemeClr val="lt1"/>
+          </a:fontRef>
+        </p:style>
+        <p:txBody>
+          <a:bodyPr rtlCol="0" anchor="ctr" wrap="none" lIns="0" tIns="0" rIns="0" bIns="0"/>
+          <a:lstStyle/>
+          <a:p>
+            <a:pPr algn="ctr">
+              <a:defRPr sz="900" b="1">
+                <a:solidFill>
+                  <a:srgbClr val="FFFFFF"/>
+                </a:solidFill>
+              </a:defRPr>
+            </a:pPr>
+            <a:r>
+              <a:t>🔏 Ed25519 Sealed</a:t>
+            </a:r>
+          </a:p>
+        </p:txBody>
+      </p:sp>
+      <p:sp>
+        <p:nvSpPr>
+          <p:cNvPr id="11" name="Rounded Rectangle 10"/>
+          <p:cNvSpPr/>
+          <p:nvPr/>
+        </p:nvSpPr>
+        <p:spPr>
+          <a:xfrm>
+            <a:off x="9400032" y="2057400"/>
+            <a:ext cx="2057400" cy="292608"/>
+          </a:xfrm>
+          <a:prstGeom prst="roundRect">
+            <a:avLst/>
+          </a:prstGeom>
+          <a:solidFill>
+            <a:srgbClr val="D97706"/>
+          </a:solidFill>
+          <a:ln>
+            <a:noFill/>
+          </a:ln>
+        </p:spPr>
+        <p:style>
+          <a:lnRef idx="1">
+            <a:schemeClr val="accent1"/>
+          </a:lnRef>
+          <a:fillRef idx="3">
+            <a:schemeClr val="accent1"/>
+          </a:fillRef>
+          <a:effectRef idx="2">
+            <a:schemeClr val="accent1"/>
+          </a:effectRef>
+          <a:fontRef idx="minor">
+            <a:schemeClr val="lt1"/>
+          </a:fontRef>
+        </p:style>
+        <p:txBody>
+          <a:bodyPr rtlCol="0" anchor="ctr" wrap="none" lIns="0" tIns="0" rIns="0" bIns="0"/>
+          <a:lstStyle/>
+          <a:p>
+            <a:pPr algn="ctr">
+              <a:defRPr sz="900" b="1">
+                <a:solidFill>
+                  <a:srgbClr val="FFFFFF"/>
+                </a:solidFill>
+              </a:defRPr>
+            </a:pPr>
+            <a:r>
+              <a:t>💰 &lt; ₹0.25 / Run</a:t>
+            </a:r>
+          </a:p>
+        </p:txBody>
+      </p:sp>
+      <p:sp>
+        <p:nvSpPr>
+          <p:cNvPr id="12" name="Rounded Rectangle 11"/>
+          <p:cNvSpPr/>
+          <p:nvPr/>
+        </p:nvSpPr>
+        <p:spPr>
+          <a:xfrm>
+            <a:off x="731520" y="2514600"/>
+            <a:ext cx="5257800" cy="3931920"/>
+          </a:xfrm>
+          <a:prstGeom prst="roundRect">
+            <a:avLst/>
+          </a:prstGeom>
+          <a:solidFill>
+            <a:srgbClr val="FFFFFF"/>
+          </a:solidFill>
+          <a:ln w="15240">
+            <a:solidFill>
+              <a:srgbClr val="E2E8F0"/>
+            </a:solidFill>
+          </a:ln>
+        </p:spPr>
+        <p:style>
+          <a:lnRef idx="1">
+            <a:schemeClr val="accent1"/>
+          </a:lnRef>
+          <a:fillRef idx="3">
+            <a:schemeClr val="accent1"/>
+          </a:fillRef>
+          <a:effectRef idx="2">
+            <a:schemeClr val="accent1"/>
+          </a:effectRef>
+          <a:fontRef idx="minor">
+            <a:schemeClr val="lt1"/>
+          </a:fontRef>
+        </p:style>
+        <p:txBody>
+          <a:bodyPr rtlCol="0" anchor="ctr"/>
+          <a:lstStyle/>
+          <a:p>
+            <a:pPr algn="ctr"/>
+          </a:p>
+        </p:txBody>
+      </p:sp>
+      <p:sp>
+        <p:nvSpPr>
+          <p:cNvPr id="13" name="Rounded Rectangle 12"/>
+          <p:cNvSpPr/>
+          <p:nvPr/>
+        </p:nvSpPr>
+        <p:spPr>
+          <a:xfrm>
+            <a:off x="868680" y="2651760"/>
+            <a:ext cx="2377440" cy="256032"/>
+          </a:xfrm>
+          <a:prstGeom prst="roundRect">
+            <a:avLst/>
+          </a:prstGeom>
+          <a:solidFill>
+            <a:srgbClr val="E11D48"/>
+          </a:solidFill>
+          <a:ln>
+            <a:noFill/>
+          </a:ln>
+        </p:spPr>
+        <p:style>
+          <a:lnRef idx="1">
+            <a:schemeClr val="accent1"/>
+          </a:lnRef>
+          <a:fillRef idx="3">
+            <a:schemeClr val="accent1"/>
+          </a:fillRef>
+          <a:effectRef idx="2">
+            <a:schemeClr val="accent1"/>
+          </a:effectRef>
+          <a:fontRef idx="minor">
+            <a:schemeClr val="lt1"/>
+          </a:fontRef>
+        </p:style>
+        <p:txBody>
+          <a:bodyPr rtlCol="0" anchor="ctr" wrap="none" lIns="0" tIns="0" rIns="0" bIns="0"/>
+          <a:lstStyle/>
+          <a:p>
+            <a:pPr algn="ctr">
+              <a:defRPr sz="850" b="1">
+                <a:solidFill>
+                  <a:srgbClr val="FFFFFF"/>
+                </a:solidFill>
+              </a:defRPr>
+            </a:pPr>
+            <a:r>
+              <a:t>CRITICAL INDUSTRY CHALLENGES</a:t>
+            </a:r>
+          </a:p>
+        </p:txBody>
+      </p:sp>
+      <p:sp>
+        <p:nvSpPr>
+          <p:cNvPr id="14" name="TextBox 13"/>
+          <p:cNvSpPr txBox="1"/>
+          <p:nvPr/>
+        </p:nvSpPr>
+        <p:spPr>
+          <a:xfrm>
+            <a:off x="868680" y="2999232"/>
+            <a:ext cx="4983480" cy="3291840"/>
+          </a:xfrm>
+          <a:prstGeom prst="rect">
+            <a:avLst/>
+          </a:prstGeom>
+          <a:noFill/>
+        </p:spPr>
+        <p:txBody>
+          <a:bodyPr wrap="square" lIns="0" tIns="0" rIns="0" bIns="0">
+            <a:spAutoFit/>
+          </a:bodyPr>
+          <a:lstStyle/>
+          <a:p>
+            <a:pPr>
+              <a:spcAft>
+                <a:spcPts val="700"/>
+              </a:spcAft>
+            </a:pPr>
+            <a:r>
+              <a:rPr b="1" sz="950">
+                <a:solidFill>
+                  <a:srgbClr val="E11D48"/>
+                </a:solidFill>
+              </a:rPr>
+              <a:t>✖ Sensitive Data Exposure: </a:t>
+            </a:r>
+            <a:r>
+              <a:rPr sz="880">
+                <a:solidFill>
+                  <a:srgbClr val="475569"/>
+                </a:solidFill>
+              </a:rPr>
+              <a:t>Confidential enterprise &amp; defense memos cannot be sent to public cloud LLMs (OpenAI/Claude) without violating data sovereignty and compliance laws.</a:t>
+            </a:r>
+          </a:p>
+          <a:p>
+            <a:pPr>
+              <a:spcAft>
+                <a:spcPts val="700"/>
+              </a:spcAft>
+            </a:pPr>
+            <a:r>
+              <a:rPr b="1" sz="950">
+                <a:solidFill>
+                  <a:srgbClr val="E11D48"/>
+                </a:solidFill>
+              </a:rPr>
+              <a:t>✖ Adversarial Prompt Injections: </a:t>
+            </a:r>
+            <a:r>
+              <a:rPr sz="880">
+                <a:solidFill>
+                  <a:srgbClr val="475569"/>
+                </a:solidFill>
+              </a:rPr>
+              <a:t>Untrusted user documents and embedded indirect prompt instructions hijack downstream transformation pipelines and leak secrets.</a:t>
+            </a:r>
+          </a:p>
+          <a:p>
+            <a:pPr>
+              <a:spcAft>
+                <a:spcPts val="700"/>
+              </a:spcAft>
+            </a:pPr>
+            <a:r>
+              <a:rPr b="1" sz="950">
+                <a:solidFill>
+                  <a:srgbClr val="E11D48"/>
+                </a:solidFill>
+              </a:rPr>
+              <a:t>✖ Ungrounded Hallucinations: </a:t>
+            </a:r>
+            <a:r>
+              <a:rPr sz="880">
+                <a:solidFill>
+                  <a:srgbClr val="475569"/>
+                </a:solidFill>
+              </a:rPr>
+              <a:t>Generative AI invents fictitious metrics and unverified claims when unanchored to exact source citation offsets.</a:t>
+            </a:r>
+          </a:p>
+          <a:p>
+            <a:pPr>
+              <a:spcAft>
+                <a:spcPts val="700"/>
+              </a:spcAft>
+            </a:pPr>
+            <a:r>
+              <a:rPr b="1" sz="950">
+                <a:solidFill>
+                  <a:srgbClr val="E11D48"/>
+                </a:solidFill>
+              </a:rPr>
+              <a:t>✖ Inter-Format Cross-Output Drift: </a:t>
+            </a:r>
+            <a:r>
+              <a:rPr sz="880">
+                <a:solidFill>
+                  <a:srgbClr val="475569"/>
+                </a:solidFill>
+              </a:rPr>
+              <a:t>Manual rewriting into summaries, slides, and advisories leads to severe factual contradictions and metric discrepancies across formats.</a:t>
+            </a:r>
+          </a:p>
+          <a:p>
+            <a:pPr>
+              <a:spcAft>
+                <a:spcPts val="700"/>
+              </a:spcAft>
+            </a:pPr>
+            <a:r>
+              <a:rPr b="1" sz="950">
+                <a:solidFill>
+                  <a:srgbClr val="E11D48"/>
+                </a:solidFill>
+              </a:rPr>
+              <a:t>✖ Severe Manual Labor Bottleneck: </a:t>
+            </a:r>
+            <a:r>
+              <a:rPr sz="880">
+                <a:solidFill>
+                  <a:srgbClr val="475569"/>
+                </a:solidFill>
+              </a:rPr>
+              <a:t>Teams spend 4–6+ hours per report manually synthesizing, formatting, and vetting collateral for distinct audiences.</a:t>
+            </a:r>
+          </a:p>
+        </p:txBody>
+      </p:sp>
+      <p:sp>
+        <p:nvSpPr>
+          <p:cNvPr id="15" name="Rounded Rectangle 14"/>
+          <p:cNvSpPr/>
+          <p:nvPr/>
+        </p:nvSpPr>
+        <p:spPr>
+          <a:xfrm>
+            <a:off x="6199632" y="2514600"/>
+            <a:ext cx="5257800" cy="3931920"/>
+          </a:xfrm>
+          <a:prstGeom prst="roundRect">
+            <a:avLst/>
+          </a:prstGeom>
+          <a:solidFill>
+            <a:srgbClr val="FFFFFF"/>
+          </a:solidFill>
+          <a:ln w="15240">
+            <a:solidFill>
+              <a:srgbClr val="E2E8F0"/>
+            </a:solidFill>
+          </a:ln>
+        </p:spPr>
+        <p:style>
+          <a:lnRef idx="1">
+            <a:schemeClr val="accent1"/>
+          </a:lnRef>
+          <a:fillRef idx="3">
+            <a:schemeClr val="accent1"/>
+          </a:fillRef>
+          <a:effectRef idx="2">
+            <a:schemeClr val="accent1"/>
+          </a:effectRef>
+          <a:fontRef idx="minor">
+            <a:schemeClr val="lt1"/>
+          </a:fontRef>
+        </p:style>
+        <p:txBody>
+          <a:bodyPr rtlCol="0" anchor="ctr"/>
+          <a:lstStyle/>
+          <a:p>
+            <a:pPr algn="ctr"/>
+          </a:p>
+        </p:txBody>
+      </p:sp>
+      <p:sp>
+        <p:nvSpPr>
+          <p:cNvPr id="16" name="Rounded Rectangle 15"/>
+          <p:cNvSpPr/>
+          <p:nvPr/>
+        </p:nvSpPr>
+        <p:spPr>
+          <a:xfrm>
+            <a:off x="6336792" y="2651760"/>
+            <a:ext cx="2926080" cy="256032"/>
+          </a:xfrm>
+          <a:prstGeom prst="roundRect">
+            <a:avLst/>
+          </a:prstGeom>
+          <a:solidFill>
+            <a:srgbClr val="10B981"/>
+          </a:solidFill>
+          <a:ln>
+            <a:noFill/>
+          </a:ln>
+        </p:spPr>
+        <p:style>
+          <a:lnRef idx="1">
+            <a:schemeClr val="accent1"/>
+          </a:lnRef>
+          <a:fillRef idx="3">
+            <a:schemeClr val="accent1"/>
+          </a:fillRef>
+          <a:effectRef idx="2">
+            <a:schemeClr val="accent1"/>
+          </a:effectRef>
+          <a:fontRef idx="minor">
+            <a:schemeClr val="lt1"/>
+          </a:fontRef>
+        </p:style>
+        <p:txBody>
+          <a:bodyPr rtlCol="0" anchor="ctr" wrap="none" lIns="0" tIns="0" rIns="0" bIns="0"/>
+          <a:lstStyle/>
+          <a:p>
+            <a:pPr algn="ctr">
+              <a:defRPr sz="850" b="1">
+                <a:solidFill>
+                  <a:srgbClr val="FFFFFF"/>
+                </a:solidFill>
+              </a:defRPr>
+            </a:pPr>
+            <a:r>
+              <a:t>KARYASETU ZERO-TRUST INNOVATION</a:t>
+            </a:r>
+          </a:p>
+        </p:txBody>
+      </p:sp>
+      <p:sp>
+        <p:nvSpPr>
+          <p:cNvPr id="17" name="TextBox 16"/>
+          <p:cNvSpPr txBox="1"/>
+          <p:nvPr/>
+        </p:nvSpPr>
+        <p:spPr>
+          <a:xfrm>
+            <a:off x="6336792" y="2999232"/>
+            <a:ext cx="4983480" cy="3291840"/>
+          </a:xfrm>
+          <a:prstGeom prst="rect">
+            <a:avLst/>
+          </a:prstGeom>
+          <a:noFill/>
+        </p:spPr>
+        <p:txBody>
+          <a:bodyPr wrap="square" lIns="0" tIns="0" rIns="0" bIns="0">
+            <a:spAutoFit/>
+          </a:bodyPr>
+          <a:lstStyle/>
+          <a:p>
+            <a:pPr>
+              <a:spcAft>
+                <a:spcPts val="700"/>
+              </a:spcAft>
+            </a:pPr>
+            <a:r>
+              <a:rPr b="1" sz="950">
+                <a:solidFill>
+                  <a:srgbClr val="10B981"/>
+                </a:solidFill>
+              </a:rPr>
+              <a:t>✔ Dual-Route Air-Gapped AI: </a:t>
+            </a:r>
+            <a:r>
+              <a:rPr sz="880">
+                <a:solidFill>
+                  <a:srgbClr val="475569"/>
+                </a:solidFill>
+              </a:rPr>
+              <a:t>Deterministic policy gateway enforces 100% offline local LLM execution (Gemma 3 12B) for Restricted/Confidential data; Groq/Gemini for Public.</a:t>
+            </a:r>
+          </a:p>
+          <a:p>
+            <a:pPr>
+              <a:spcAft>
+                <a:spcPts val="700"/>
+              </a:spcAft>
+            </a:pPr>
+            <a:r>
+              <a:rPr b="1" sz="950">
+                <a:solidFill>
+                  <a:srgbClr val="10B981"/>
+                </a:solidFill>
+              </a:rPr>
+              <a:t>✔ Zero-Trust Ingress &amp; DLP Defense: </a:t>
+            </a:r>
+            <a:r>
+              <a:rPr sz="880">
+                <a:solidFill>
+                  <a:srgbClr val="475569"/>
+                </a:solidFill>
+              </a:rPr>
+              <a:t>Magic-byte verification, local ClamAV anti-malware scan, and deterministic regex PII redaction mask sensitive entities before AI tokenization.</a:t>
+            </a:r>
+          </a:p>
+          <a:p>
+            <a:pPr>
+              <a:spcAft>
+                <a:spcPts val="700"/>
+              </a:spcAft>
+            </a:pPr>
+            <a:r>
+              <a:rPr b="1" sz="950">
+                <a:solidFill>
+                  <a:srgbClr val="10B981"/>
+                </a:solidFill>
+              </a:rPr>
+              <a:t>✔ Evidence-Grounded Vector RAG: </a:t>
+            </a:r>
+            <a:r>
+              <a:rPr sz="880">
+                <a:solidFill>
+                  <a:srgbClr val="475569"/>
+                </a:solidFill>
+              </a:rPr>
+              <a:t>Dense semantic retrieval in pgvector binds every generated output claim to exact source chunk IDs with SHA-256 digests.</a:t>
+            </a:r>
+          </a:p>
+          <a:p>
+            <a:pPr>
+              <a:spcAft>
+                <a:spcPts val="700"/>
+              </a:spcAft>
+            </a:pPr>
+            <a:r>
+              <a:rPr b="1" sz="950">
+                <a:solidFill>
+                  <a:srgbClr val="10B981"/>
+                </a:solidFill>
+              </a:rPr>
+              <a:t>✔ Single Canonical Fact Brief: </a:t>
+            </a:r>
+            <a:r>
+              <a:rPr sz="880">
+                <a:solidFill>
+                  <a:srgbClr val="475569"/>
+                </a:solidFill>
+              </a:rPr>
+              <a:t>All 7 deliverables ground to one unified facts model, cross-verified by automated NLI entailment consistency checks to guarantee zero drift.</a:t>
+            </a:r>
+          </a:p>
+          <a:p>
+            <a:pPr>
+              <a:spcAft>
+                <a:spcPts val="700"/>
+              </a:spcAft>
+            </a:pPr>
+            <a:r>
+              <a:rPr b="1" sz="950">
+                <a:solidFill>
+                  <a:srgbClr val="10B981"/>
+                </a:solidFill>
+              </a:rPr>
+              <a:t>✔ Decentralized Blockchain Provenance: </a:t>
+            </a:r>
+            <a:r>
+              <a:rPr sz="880">
+                <a:solidFill>
+                  <a:srgbClr val="475569"/>
+                </a:solidFill>
+              </a:rPr>
+              <a:t>Every artifact is sealed with SHA-256 digests anchored directly to an Ethereum Sepolia smart contract and signed with Ed25519 keys.</a:t>
+            </a:r>
+          </a:p>
+        </p:txBody>
+      </p:sp>
+      <p:sp>
+        <p:nvSpPr>
+          <p:cNvPr id="18" name="TextBox 17"/>
+          <p:cNvSpPr txBox="1"/>
+          <p:nvPr/>
+        </p:nvSpPr>
+        <p:spPr>
+          <a:xfrm>
+            <a:off x="731520" y="6510528"/>
+            <a:ext cx="10728655" cy="274320"/>
           </a:xfrm>
           <a:prstGeom prst="rect">
             <a:avLst/>
@@ -3434,133 +4105,15 @@
           </a:bodyPr>
           <a:lstStyle/>
           <a:p>
-            <a:pPr>
-              <a:spcAft>
-                <a:spcPts val="800"/>
-              </a:spcAft>
-              <a:defRPr sz="1600" b="1">
+            <a:pPr algn="ctr">
+              <a:defRPr sz="850" b="1">
                 <a:solidFill>
                   <a:srgbClr val="0284C7"/>
                 </a:solidFill>
               </a:defRPr>
             </a:pPr>
             <a:r>
-              <a:t>THE KARYASETU SOLUTION</a:t>
-            </a:r>
-          </a:p>
-          <a:p>
-            <a:pPr>
-              <a:spcAft>
-                <a:spcPts val="600"/>
-              </a:spcAft>
-            </a:pPr>
-            <a:r>
-              <a:rPr b="1" sz="1100">
-                <a:solidFill>
-                  <a:srgbClr val="0F172A"/>
-                </a:solidFill>
-              </a:rPr>
-              <a:t>✓ Policy-Controlled Provider Routing: </a:t>
-            </a:r>
-            <a:r>
-              <a:rPr sz="1050">
-                <a:solidFill>
-                  <a:srgbClr val="475569"/>
-                </a:solidFill>
-              </a:rPr>
-              <a:t>Deterministic zero-LLM classification (PUBLIC, INTERNAL, CONFIDENTIAL, RESTRICTED). Air-gaps sensitive data.</a:t>
-            </a:r>
-          </a:p>
-          <a:p>
-            <a:pPr>
-              <a:spcAft>
-                <a:spcPts val="600"/>
-              </a:spcAft>
-            </a:pPr>
-            <a:r>
-              <a:rPr b="1" sz="1100">
-                <a:solidFill>
-                  <a:srgbClr val="0F172A"/>
-                </a:solidFill>
-              </a:rPr>
-              <a:t>✓ Evidence-Grounded RAG: </a:t>
-            </a:r>
-            <a:r>
-              <a:rPr sz="1050">
-                <a:solidFill>
-                  <a:srgbClr val="475569"/>
-                </a:solidFill>
-              </a:rPr>
-              <a:t>Source chunks anchored via vector embeddings. Synthesizes a unified canonical semantic brief once for all generators.</a:t>
-            </a:r>
-          </a:p>
-          <a:p>
-            <a:pPr>
-              <a:spcAft>
-                <a:spcPts val="600"/>
-              </a:spcAft>
-            </a:pPr>
-            <a:r>
-              <a:rPr b="1" sz="1100">
-                <a:solidFill>
-                  <a:srgbClr val="0F172A"/>
-                </a:solidFill>
-              </a:rPr>
-              <a:t>✓ 7 Audience-Specific Generators: </a:t>
-            </a:r>
-            <a:r>
-              <a:rPr sz="1050">
-                <a:solidFill>
-                  <a:srgbClr val="475569"/>
-                </a:solidFill>
-              </a:rPr>
-              <a:t>Produces Summary, LinkedIn, Advisory, PPTX deck, X thread, Infographic (PNG/PDF), and Video Package (PDF/SRT).</a:t>
-            </a:r>
-          </a:p>
-          <a:p>
-            <a:pPr>
-              <a:spcAft>
-                <a:spcPts val="600"/>
-              </a:spcAft>
-            </a:pPr>
-            <a:r>
-              <a:rPr b="1" sz="1100">
-                <a:solidFill>
-                  <a:srgbClr val="0F172A"/>
-                </a:solidFill>
-              </a:rPr>
-              <a:t>✓ Dual-Layer Fact Verification: </a:t>
-            </a:r>
-            <a:r>
-              <a:rPr sz="1050">
-                <a:solidFill>
-                  <a:srgbClr val="475569"/>
-                </a:solidFill>
-              </a:rPr>
-              <a:t>Deterministic numeric mismatch, date conflict, and lexical overlap auditing. Bounded schema regeneration on format errors.</a:t>
-            </a:r>
-          </a:p>
-          <a:p>
-            <a:pPr>
-              <a:spcAft>
-                <a:spcPts val="600"/>
-              </a:spcAft>
-            </a:pPr>
-            <a:r>
-              <a:rPr b="1" sz="1100">
-                <a:solidFill>
-                  <a:srgbClr val="0F172A"/>
-                </a:solidFill>
-              </a:rPr>
-              <a:t>✓ Human Approval &amp; Cryptographic Trust: </a:t>
-            </a:r>
-            <a:r>
-              <a:rPr sz="1050">
-                <a:solidFill>
-                  <a:srgbClr val="475569"/>
-                </a:solidFill>
-              </a:rPr>
-              <a:t>Human-in-the-loop sign-off before external release, sealed with SHA-256 digests and Ed25519 digital signatures.</a:t>
+              <a:t>Live Demo: youtu.be/Lhi1ssHBfUk • Contract: 0x8AEf680b6891E7e3cAdCBD4a499AbA1310F87c08 • GitHub: github.com/KetanGaikwadKRG/KaryaSetu</a:t>
             </a:r>
           </a:p>
         </p:txBody>
@@ -3585,75 +4138,23 @@
       <p:grpSpPr/>
       <p:sp>
         <p:nvSpPr>
-          <p:cNvPr id="2" name="TextBox 1"/>
-          <p:cNvSpPr txBox="1"/>
-          <p:nvPr/>
-        </p:nvSpPr>
-        <p:spPr>
-          <a:xfrm>
-            <a:off x="731520" y="365760"/>
-            <a:ext cx="10728655" cy="1005840"/>
+          <p:cNvPr id="2" name="Rectangle 1"/>
+          <p:cNvSpPr/>
+          <p:nvPr/>
+        </p:nvSpPr>
+        <p:spPr>
+          <a:xfrm>
+            <a:off x="0" y="0"/>
+            <a:ext cx="12191695" cy="6858000"/>
           </a:xfrm>
           <a:prstGeom prst="rect">
-            <a:avLst/>
-          </a:prstGeom>
-          <a:noFill/>
-        </p:spPr>
-        <p:txBody>
-          <a:bodyPr wrap="square" lIns="0" tIns="0" rIns="0" bIns="0">
-            <a:spAutoFit/>
-          </a:bodyPr>
-          <a:lstStyle/>
-          <a:p>
-            <a:pPr>
-              <a:spcAft>
-                <a:spcPts val="200"/>
-              </a:spcAft>
-              <a:defRPr sz="1000" b="1">
-                <a:solidFill>
-                  <a:srgbClr val="0284C7"/>
-                </a:solidFill>
-              </a:defRPr>
-            </a:pPr>
-            <a:r>
-              <a:t>SIH 26154 • BLOCKCHAIN &amp; CYBERSECURITY</a:t>
-            </a:r>
-          </a:p>
-          <a:p>
-            <a:pPr>
-              <a:defRPr sz="2600" b="1">
-                <a:solidFill>
-                  <a:srgbClr val="0F172A"/>
-                </a:solidFill>
-              </a:defRPr>
-            </a:pPr>
-            <a:r>
-              <a:t>TECHNICAL ARCHITECTURE: 5-TIER MODULAR PLATFORM</a:t>
-            </a:r>
-          </a:p>
-        </p:txBody>
-      </p:sp>
-      <p:sp>
-        <p:nvSpPr>
-          <p:cNvPr id="3" name="Rounded Rectangle 2"/>
-          <p:cNvSpPr/>
-          <p:nvPr/>
-        </p:nvSpPr>
-        <p:spPr>
-          <a:xfrm>
-            <a:off x="731520" y="1463040"/>
-            <a:ext cx="7498079" cy="777240"/>
-          </a:xfrm>
-          <a:prstGeom prst="roundRect">
             <a:avLst/>
           </a:prstGeom>
           <a:solidFill>
             <a:srgbClr val="F8FAFC"/>
           </a:solidFill>
-          <a:ln w="19050">
-            <a:solidFill>
-              <a:srgbClr val="CBD5E1"/>
-            </a:solidFill>
+          <a:ln>
+            <a:noFill/>
           </a:ln>
         </p:spPr>
         <p:style>
@@ -3680,14 +4181,14 @@
       </p:sp>
       <p:sp>
         <p:nvSpPr>
-          <p:cNvPr id="4" name="TextBox 3"/>
+          <p:cNvPr id="3" name="TextBox 2"/>
           <p:cNvSpPr txBox="1"/>
           <p:nvPr/>
         </p:nvSpPr>
         <p:spPr>
           <a:xfrm>
-            <a:off x="868680" y="1517904"/>
-            <a:ext cx="7223760" cy="667512"/>
+            <a:off x="731520" y="320040"/>
+            <a:ext cx="10728655" cy="960120"/>
           </a:xfrm>
           <a:prstGeom prst="rect">
             <a:avLst/>
@@ -3695,62 +4196,59 @@
           <a:noFill/>
         </p:spPr>
         <p:txBody>
-          <a:bodyPr wrap="square">
+          <a:bodyPr wrap="square" lIns="0" tIns="0" rIns="0" bIns="0">
             <a:spAutoFit/>
           </a:bodyPr>
           <a:lstStyle/>
           <a:p>
-            <a:r>
-              <a:rPr b="1" sz="1100">
+            <a:pPr>
+              <a:spcAft>
+                <a:spcPts val="200"/>
+              </a:spcAft>
+              <a:defRPr sz="950" b="1">
                 <a:solidFill>
                   <a:srgbClr val="0284C7"/>
                 </a:solidFill>
-              </a:rPr>
-              <a:t>TIER 1: USER ENTRY &amp; DASHBOARD  </a:t>
-            </a:r>
-            <a:r>
-              <a:rPr sz="950" b="1">
-                <a:solidFill>
-                  <a:srgbClr val="7C3AED"/>
-                </a:solidFill>
-              </a:rPr>
-              <a:t>[Next.js 14 • React • TypeScript • Tailwind CSS]</a:t>
+              </a:defRPr>
+            </a:pPr>
+            <a:r>
+              <a:t>SMART INDIA HACKATHON 2026 • PS ID: SIH 26154 • THEME: BLOCKCHAIN &amp; CYBERSECURITY</a:t>
             </a:r>
           </a:p>
           <a:p>
             <a:pPr>
-              <a:defRPr sz="950">
-                <a:solidFill>
-                  <a:srgbClr val="475569"/>
-                </a:solidFill>
-              </a:defRPr>
-            </a:pPr>
-            <a:r>
-              <a:t>Stitch enterprise UI console with 4-stage creation workflow (Input Workspace → Configuration → Output Packages → Review &amp; Dispatch). Real-time progress tracking and artifact inspection.</a:t>
-            </a:r>
-          </a:p>
-        </p:txBody>
-      </p:sp>
-      <p:sp>
-        <p:nvSpPr>
-          <p:cNvPr id="5" name="Rounded Rectangle 4"/>
+              <a:defRPr sz="2200" b="1">
+                <a:solidFill>
+                  <a:srgbClr val="0B1220"/>
+                </a:solidFill>
+              </a:defRPr>
+            </a:pPr>
+            <a:r>
+              <a:t>PROPOSED SOLUTION: ZERO-TRUST PIPELINE &amp; 7 GOVERNED DELIVERABLES</a:t>
+            </a:r>
+          </a:p>
+        </p:txBody>
+      </p:sp>
+      <p:sp>
+        <p:nvSpPr>
+          <p:cNvPr id="4" name="Rounded Rectangle 3"/>
           <p:cNvSpPr/>
           <p:nvPr/>
         </p:nvSpPr>
         <p:spPr>
           <a:xfrm>
-            <a:off x="731520" y="2331720"/>
-            <a:ext cx="7498079" cy="777240"/>
+            <a:off x="731520" y="1325880"/>
+            <a:ext cx="10728655" cy="2514600"/>
           </a:xfrm>
           <a:prstGeom prst="roundRect">
             <a:avLst/>
           </a:prstGeom>
           <a:solidFill>
-            <a:srgbClr val="F8FAFC"/>
+            <a:srgbClr val="FFFFFF"/>
           </a:solidFill>
-          <a:ln w="19050">
+          <a:ln w="15240">
             <a:solidFill>
-              <a:srgbClr val="CBD5E1"/>
+              <a:srgbClr val="E2E8F0"/>
             </a:solidFill>
           </a:ln>
         </p:spPr>
@@ -3778,78 +4276,23 @@
       </p:sp>
       <p:sp>
         <p:nvSpPr>
-          <p:cNvPr id="6" name="TextBox 5"/>
-          <p:cNvSpPr txBox="1"/>
-          <p:nvPr/>
-        </p:nvSpPr>
-        <p:spPr>
-          <a:xfrm>
-            <a:off x="868680" y="2386584"/>
-            <a:ext cx="7223760" cy="667512"/>
-          </a:xfrm>
-          <a:prstGeom prst="rect">
-            <a:avLst/>
-          </a:prstGeom>
-          <a:noFill/>
-        </p:spPr>
-        <p:txBody>
-          <a:bodyPr wrap="square">
-            <a:spAutoFit/>
-          </a:bodyPr>
-          <a:lstStyle/>
-          <a:p>
-            <a:r>
-              <a:rPr b="1" sz="1100">
-                <a:solidFill>
-                  <a:srgbClr val="0284C7"/>
-                </a:solidFill>
-              </a:rPr>
-              <a:t>TIER 2: SECURE INGESTION GATE  </a:t>
-            </a:r>
-            <a:r>
-              <a:rPr sz="950" b="1">
-                <a:solidFill>
-                  <a:srgbClr val="7C3AED"/>
-                </a:solidFill>
-              </a:rPr>
-              <a:t>[Magic Bytes • ClamAV Scanner • PII Detector]</a:t>
-            </a:r>
-          </a:p>
-          <a:p>
-            <a:pPr>
-              <a:defRPr sz="950">
-                <a:solidFill>
-                  <a:srgbClr val="475569"/>
-                </a:solidFill>
-              </a:defRPr>
-            </a:pPr>
-            <a:r>
-              <a:t>Validates MIME signatures (%PDF-, PK\x03\x04) to prevent type-confusion attacks. Local ClamAV anti-malware scan fails closed. Regex PII scanning redacts sensitive personal identifiers.</a:t>
-            </a:r>
-          </a:p>
-        </p:txBody>
-      </p:sp>
-      <p:sp>
-        <p:nvSpPr>
-          <p:cNvPr id="7" name="Rounded Rectangle 6"/>
+          <p:cNvPr id="5" name="Rounded Rectangle 4"/>
           <p:cNvSpPr/>
           <p:nvPr/>
         </p:nvSpPr>
         <p:spPr>
           <a:xfrm>
-            <a:off x="731520" y="3200400"/>
-            <a:ext cx="7498079" cy="777240"/>
+            <a:off x="868680" y="1417320"/>
+            <a:ext cx="3291840" cy="237744"/>
           </a:xfrm>
           <a:prstGeom prst="roundRect">
             <a:avLst/>
           </a:prstGeom>
           <a:solidFill>
-            <a:srgbClr val="F8FAFC"/>
+            <a:srgbClr val="0B1220"/>
           </a:solidFill>
-          <a:ln w="19050">
-            <a:solidFill>
-              <a:srgbClr val="CBD5E1"/>
-            </a:solidFill>
+          <a:ln>
+            <a:noFill/>
           </a:ln>
         </p:spPr>
         <p:style>
@@ -3867,86 +4310,42 @@
           </a:fontRef>
         </p:style>
         <p:txBody>
-          <a:bodyPr rtlCol="0" anchor="ctr"/>
-          <a:lstStyle/>
-          <a:p>
-            <a:pPr algn="ctr"/>
-          </a:p>
-        </p:txBody>
-      </p:sp>
-      <p:sp>
-        <p:nvSpPr>
-          <p:cNvPr id="8" name="TextBox 7"/>
-          <p:cNvSpPr txBox="1"/>
-          <p:nvPr/>
-        </p:nvSpPr>
-        <p:spPr>
-          <a:xfrm>
-            <a:off x="868680" y="3255264"/>
-            <a:ext cx="7223760" cy="667512"/>
-          </a:xfrm>
-          <a:prstGeom prst="rect">
-            <a:avLst/>
-          </a:prstGeom>
-          <a:noFill/>
-        </p:spPr>
-        <p:txBody>
-          <a:bodyPr wrap="square">
-            <a:spAutoFit/>
-          </a:bodyPr>
-          <a:lstStyle/>
-          <a:p>
-            <a:r>
-              <a:rPr b="1" sz="1100">
-                <a:solidFill>
-                  <a:srgbClr val="0284C7"/>
-                </a:solidFill>
-              </a:rPr>
-              <a:t>TIER 3: POLICY &amp; CLASSIFICATION ENGINE  </a:t>
-            </a:r>
-            <a:r>
-              <a:rPr sz="950" b="1">
-                <a:solidFill>
-                  <a:srgbClr val="7C3AED"/>
-                </a:solidFill>
-              </a:rPr>
-              <a:t>[Deterministic Zero-LLM Policy Engine &amp; Router]</a:t>
-            </a:r>
-          </a:p>
-          <a:p>
-            <a:pPr>
-              <a:defRPr sz="950">
-                <a:solidFill>
-                  <a:srgbClr val="475569"/>
-                </a:solidFill>
-              </a:defRPr>
-            </a:pPr>
-            <a:r>
-              <a:t>Strict governance: 'LLM May Recommend, Policy Engine Must Decide'. Automatically maps data classification (PUBLIC, INTERNAL, CONFIDENTIAL, RESTRICTED) to allowed model routes (Cloud vs Air-Gapped).</a:t>
-            </a:r>
-          </a:p>
-        </p:txBody>
-      </p:sp>
-      <p:sp>
-        <p:nvSpPr>
-          <p:cNvPr id="9" name="Rounded Rectangle 8"/>
+          <a:bodyPr rtlCol="0" anchor="ctr" wrap="none" lIns="0" tIns="0" rIns="0" bIns="0"/>
+          <a:lstStyle/>
+          <a:p>
+            <a:pPr algn="ctr">
+              <a:defRPr sz="850" b="1">
+                <a:solidFill>
+                  <a:srgbClr val="FFFFFF"/>
+                </a:solidFill>
+              </a:defRPr>
+            </a:pPr>
+            <a:r>
+              <a:t>7-STAGE SECURITY &amp; AI ORCHESTRATION PIPELINE</a:t>
+            </a:r>
+          </a:p>
+        </p:txBody>
+      </p:sp>
+      <p:sp>
+        <p:nvSpPr>
+          <p:cNvPr id="6" name="Rounded Rectangle 5"/>
           <p:cNvSpPr/>
           <p:nvPr/>
         </p:nvSpPr>
         <p:spPr>
           <a:xfrm>
-            <a:off x="731520" y="4069079"/>
-            <a:ext cx="7498079" cy="777240"/>
+            <a:off x="868680" y="1783080"/>
+            <a:ext cx="1389888" cy="1554480"/>
           </a:xfrm>
           <a:prstGeom prst="roundRect">
             <a:avLst/>
           </a:prstGeom>
           <a:solidFill>
-            <a:srgbClr val="F8FAFC"/>
+            <a:srgbClr val="FAFCFF"/>
           </a:solidFill>
-          <a:ln w="19050">
+          <a:ln w="15240">
             <a:solidFill>
-              <a:srgbClr val="CBD5E1"/>
+              <a:srgbClr val="0891B2"/>
             </a:solidFill>
           </a:ln>
         </p:spPr>
@@ -3974,78 +4373,23 @@
       </p:sp>
       <p:sp>
         <p:nvSpPr>
-          <p:cNvPr id="10" name="TextBox 9"/>
-          <p:cNvSpPr txBox="1"/>
-          <p:nvPr/>
-        </p:nvSpPr>
-        <p:spPr>
-          <a:xfrm>
-            <a:off x="868680" y="4123943"/>
-            <a:ext cx="7223760" cy="667512"/>
-          </a:xfrm>
-          <a:prstGeom prst="rect">
-            <a:avLst/>
-          </a:prstGeom>
-          <a:noFill/>
-        </p:spPr>
-        <p:txBody>
-          <a:bodyPr wrap="square">
-            <a:spAutoFit/>
-          </a:bodyPr>
-          <a:lstStyle/>
-          <a:p>
-            <a:r>
-              <a:rPr b="1" sz="1100">
-                <a:solidFill>
-                  <a:srgbClr val="0284C7"/>
-                </a:solidFill>
-              </a:rPr>
-              <a:t>TIER 4: AI TRANSFORMATION &amp; ORCHESTRATION  </a:t>
-            </a:r>
-            <a:r>
-              <a:rPr sz="950" b="1">
-                <a:solidFill>
-                  <a:srgbClr val="7C3AED"/>
-                </a:solidFill>
-              </a:rPr>
-              <a:t>[LangGraph Workflow • Multi-Provider Registry]</a:t>
-            </a:r>
-          </a:p>
-          <a:p>
-            <a:pPr>
-              <a:defRPr sz="950">
-                <a:solidFill>
-                  <a:srgbClr val="475569"/>
-                </a:solidFill>
-              </a:defRPr>
-            </a:pPr>
-            <a:r>
-              <a:t>StateGraph pipeline (load_input → load_canonical → retrieve → brief → plan → generate → validate → verify → finalize). Isolated per-output savepoints ensure partial success tolerance.</a:t>
-            </a:r>
-          </a:p>
-        </p:txBody>
-      </p:sp>
-      <p:sp>
-        <p:nvSpPr>
-          <p:cNvPr id="11" name="Rounded Rectangle 10"/>
+          <p:cNvPr id="7" name="Rounded Rectangle 6"/>
           <p:cNvSpPr/>
           <p:nvPr/>
         </p:nvSpPr>
         <p:spPr>
           <a:xfrm>
-            <a:off x="731520" y="4937760"/>
-            <a:ext cx="7498079" cy="777240"/>
+            <a:off x="868680" y="1783080"/>
+            <a:ext cx="1389888" cy="256032"/>
           </a:xfrm>
           <a:prstGeom prst="roundRect">
             <a:avLst/>
           </a:prstGeom>
           <a:solidFill>
-            <a:srgbClr val="F8FAFC"/>
+            <a:srgbClr val="0891B2"/>
           </a:solidFill>
-          <a:ln w="19050">
-            <a:solidFill>
-              <a:srgbClr val="CBD5E1"/>
-            </a:solidFill>
+          <a:ln>
+            <a:noFill/>
           </a:ln>
         </p:spPr>
         <p:style>
@@ -4063,23 +4407,32 @@
           </a:fontRef>
         </p:style>
         <p:txBody>
-          <a:bodyPr rtlCol="0" anchor="ctr"/>
-          <a:lstStyle/>
-          <a:p>
-            <a:pPr algn="ctr"/>
-          </a:p>
-        </p:txBody>
-      </p:sp>
-      <p:sp>
-        <p:nvSpPr>
-          <p:cNvPr id="12" name="TextBox 11"/>
+          <a:bodyPr rtlCol="0" anchor="ctr" wrap="none" lIns="0" tIns="0" rIns="0" bIns="0"/>
+          <a:lstStyle/>
+          <a:p>
+            <a:pPr algn="ctr">
+              <a:defRPr sz="800" b="1">
+                <a:solidFill>
+                  <a:srgbClr val="FFFFFF"/>
+                </a:solidFill>
+              </a:defRPr>
+            </a:pPr>
+            <a:r>
+              <a:t>1. SOURCE INGEST</a:t>
+            </a:r>
+          </a:p>
+        </p:txBody>
+      </p:sp>
+      <p:sp>
+        <p:nvSpPr>
+          <p:cNvPr id="8" name="TextBox 7"/>
           <p:cNvSpPr txBox="1"/>
           <p:nvPr/>
         </p:nvSpPr>
         <p:spPr>
           <a:xfrm>
-            <a:off x="868680" y="4992624"/>
-            <a:ext cx="7223760" cy="667512"/>
+            <a:off x="923544" y="2103120"/>
+            <a:ext cx="1280160" cy="1188720"/>
           </a:xfrm>
           <a:prstGeom prst="rect">
             <a:avLst/>
@@ -4087,62 +4440,87 @@
           <a:noFill/>
         </p:spPr>
         <p:txBody>
-          <a:bodyPr wrap="square">
+          <a:bodyPr wrap="square" lIns="0" rIns="0" tIns="0" bIns="0">
             <a:spAutoFit/>
           </a:bodyPr>
           <a:lstStyle/>
           <a:p>
-            <a:r>
-              <a:rPr b="1" sz="1100">
+            <a:pPr algn="ctr">
+              <a:defRPr sz="850">
+                <a:solidFill>
+                  <a:srgbClr val="0F172A"/>
+                </a:solidFill>
+              </a:defRPr>
+            </a:pPr>
+            <a:r>
+              <a:t>MIME Validation</a:t>
+            </a:r>
+            <a:br/>
+            <a:r>
+              <a:t>ClamAV Scan</a:t>
+            </a:r>
+            <a:br/>
+            <a:r>
+              <a:t>PDF/DOCX/TXT</a:t>
+            </a:r>
+          </a:p>
+        </p:txBody>
+      </p:sp>
+      <p:sp>
+        <p:nvSpPr>
+          <p:cNvPr id="9" name="TextBox 8"/>
+          <p:cNvSpPr txBox="1"/>
+          <p:nvPr/>
+        </p:nvSpPr>
+        <p:spPr>
+          <a:xfrm>
+            <a:off x="2258568" y="2377440"/>
+            <a:ext cx="128016" cy="274320"/>
+          </a:xfrm>
+          <a:prstGeom prst="rect">
+            <a:avLst/>
+          </a:prstGeom>
+          <a:noFill/>
+        </p:spPr>
+        <p:txBody>
+          <a:bodyPr wrap="none" lIns="0" rIns="0" tIns="0" bIns="0">
+            <a:spAutoFit/>
+          </a:bodyPr>
+          <a:lstStyle/>
+          <a:p>
+            <a:pPr algn="ctr">
+              <a:defRPr sz="1100" b="1">
                 <a:solidFill>
                   <a:srgbClr val="0284C7"/>
                 </a:solidFill>
-              </a:rPr>
-              <a:t>TIER 5: TRUST, GOVERNANCE &amp; PROVENANCE  </a:t>
-            </a:r>
-            <a:r>
-              <a:rPr sz="950" b="1">
-                <a:solidFill>
-                  <a:srgbClr val="7C3AED"/>
-                </a:solidFill>
-              </a:rPr>
-              <a:t>[Ed25519 Signatures • SHA-256 Digests • Ledger Boundary]</a:t>
-            </a:r>
-          </a:p>
-          <a:p>
-            <a:pPr>
-              <a:defRPr sz="950">
-                <a:solidFill>
-                  <a:srgbClr val="475569"/>
-                </a:solidFill>
-              </a:defRPr>
-            </a:pPr>
-            <a:r>
-              <a:t>Fact verification checks numeric and date consistency. Human approval gate controls dissemination. Cryptographic integrity envelope sealed with asymmetric Ed25519 signatures.</a:t>
-            </a:r>
-          </a:p>
-        </p:txBody>
-      </p:sp>
-      <p:sp>
-        <p:nvSpPr>
-          <p:cNvPr id="13" name="Rounded Rectangle 12"/>
+              </a:defRPr>
+            </a:pPr>
+            <a:r>
+              <a:t>➔</a:t>
+            </a:r>
+          </a:p>
+        </p:txBody>
+      </p:sp>
+      <p:sp>
+        <p:nvSpPr>
+          <p:cNvPr id="10" name="Rounded Rectangle 9"/>
           <p:cNvSpPr/>
           <p:nvPr/>
         </p:nvSpPr>
         <p:spPr>
           <a:xfrm>
-            <a:off x="8503920" y="1463040"/>
-            <a:ext cx="2926080" cy="4206240"/>
+            <a:off x="2386584" y="1783080"/>
+            <a:ext cx="1389888" cy="1554480"/>
           </a:xfrm>
           <a:prstGeom prst="roundRect">
             <a:avLst/>
           </a:prstGeom>
           <a:solidFill>
-            <a:srgbClr val="F1F5F9"/>
+            <a:srgbClr val="FAFCFF"/>
           </a:solidFill>
-          <a:ln w="19050">
+          <a:ln w="15240">
             <a:solidFill>
-              <a:srgbClr val="CBD5E1"/>
+              <a:srgbClr val="E11D48"/>
             </a:solidFill>
           </a:ln>
         </p:spPr>
@@ -4170,14 +4548,66 @@
       </p:sp>
       <p:sp>
         <p:nvSpPr>
-          <p:cNvPr id="14" name="TextBox 13"/>
+          <p:cNvPr id="11" name="Rounded Rectangle 10"/>
+          <p:cNvSpPr/>
+          <p:nvPr/>
+        </p:nvSpPr>
+        <p:spPr>
+          <a:xfrm>
+            <a:off x="2386584" y="1783080"/>
+            <a:ext cx="1389888" cy="256032"/>
+          </a:xfrm>
+          <a:prstGeom prst="roundRect">
+            <a:avLst/>
+          </a:prstGeom>
+          <a:solidFill>
+            <a:srgbClr val="E11D48"/>
+          </a:solidFill>
+          <a:ln>
+            <a:noFill/>
+          </a:ln>
+        </p:spPr>
+        <p:style>
+          <a:lnRef idx="1">
+            <a:schemeClr val="accent1"/>
+          </a:lnRef>
+          <a:fillRef idx="3">
+            <a:schemeClr val="accent1"/>
+          </a:fillRef>
+          <a:effectRef idx="2">
+            <a:schemeClr val="accent1"/>
+          </a:effectRef>
+          <a:fontRef idx="minor">
+            <a:schemeClr val="lt1"/>
+          </a:fontRef>
+        </p:style>
+        <p:txBody>
+          <a:bodyPr rtlCol="0" anchor="ctr" wrap="none" lIns="0" tIns="0" rIns="0" bIns="0"/>
+          <a:lstStyle/>
+          <a:p>
+            <a:pPr algn="ctr">
+              <a:defRPr sz="800" b="1">
+                <a:solidFill>
+                  <a:srgbClr val="FFFFFF"/>
+                </a:solidFill>
+              </a:defRPr>
+            </a:pPr>
+            <a:r>
+              <a:t>2. DLP &amp; DEFENSE</a:t>
+            </a:r>
+          </a:p>
+        </p:txBody>
+      </p:sp>
+      <p:sp>
+        <p:nvSpPr>
+          <p:cNvPr id="12" name="TextBox 11"/>
           <p:cNvSpPr txBox="1"/>
           <p:nvPr/>
         </p:nvSpPr>
         <p:spPr>
           <a:xfrm>
-            <a:off x="8641080" y="1600200"/>
-            <a:ext cx="2651760" cy="3931920"/>
+            <a:off x="2441448" y="2103120"/>
+            <a:ext cx="1280160" cy="1188720"/>
           </a:xfrm>
           <a:prstGeom prst="rect">
             <a:avLst/>
@@ -4185,115 +4615,2162 @@
           <a:noFill/>
         </p:spPr>
         <p:txBody>
-          <a:bodyPr wrap="square">
+          <a:bodyPr wrap="square" lIns="0" rIns="0" tIns="0" bIns="0">
             <a:spAutoFit/>
           </a:bodyPr>
           <a:lstStyle/>
           <a:p>
+            <a:pPr algn="ctr">
+              <a:defRPr sz="850">
+                <a:solidFill>
+                  <a:srgbClr val="0F172A"/>
+                </a:solidFill>
+              </a:defRPr>
+            </a:pPr>
+            <a:r>
+              <a:t>Deterministic PII</a:t>
+            </a:r>
+            <a:br/>
+            <a:r>
+              <a:t>Regex Masking</a:t>
+            </a:r>
+            <a:br/>
+            <a:r>
+              <a:t>Prompt Fencing</a:t>
+            </a:r>
+          </a:p>
+        </p:txBody>
+      </p:sp>
+      <p:sp>
+        <p:nvSpPr>
+          <p:cNvPr id="13" name="TextBox 12"/>
+          <p:cNvSpPr txBox="1"/>
+          <p:nvPr/>
+        </p:nvSpPr>
+        <p:spPr>
+          <a:xfrm>
+            <a:off x="3776472" y="2377440"/>
+            <a:ext cx="128016" cy="274320"/>
+          </a:xfrm>
+          <a:prstGeom prst="rect">
+            <a:avLst/>
+          </a:prstGeom>
+          <a:noFill/>
+        </p:spPr>
+        <p:txBody>
+          <a:bodyPr wrap="none" lIns="0" rIns="0" tIns="0" bIns="0">
+            <a:spAutoFit/>
+          </a:bodyPr>
+          <a:lstStyle/>
+          <a:p>
+            <a:pPr algn="ctr">
+              <a:defRPr sz="1100" b="1">
+                <a:solidFill>
+                  <a:srgbClr val="0284C7"/>
+                </a:solidFill>
+              </a:defRPr>
+            </a:pPr>
+            <a:r>
+              <a:t>➔</a:t>
+            </a:r>
+          </a:p>
+        </p:txBody>
+      </p:sp>
+      <p:sp>
+        <p:nvSpPr>
+          <p:cNvPr id="14" name="Rounded Rectangle 13"/>
+          <p:cNvSpPr/>
+          <p:nvPr/>
+        </p:nvSpPr>
+        <p:spPr>
+          <a:xfrm>
+            <a:off x="3904488" y="1783080"/>
+            <a:ext cx="1389888" cy="1554480"/>
+          </a:xfrm>
+          <a:prstGeom prst="roundRect">
+            <a:avLst/>
+          </a:prstGeom>
+          <a:solidFill>
+            <a:srgbClr val="FAFCFF"/>
+          </a:solidFill>
+          <a:ln w="15240">
+            <a:solidFill>
+              <a:srgbClr val="7C3AED"/>
+            </a:solidFill>
+          </a:ln>
+        </p:spPr>
+        <p:style>
+          <a:lnRef idx="1">
+            <a:schemeClr val="accent1"/>
+          </a:lnRef>
+          <a:fillRef idx="3">
+            <a:schemeClr val="accent1"/>
+          </a:fillRef>
+          <a:effectRef idx="2">
+            <a:schemeClr val="accent1"/>
+          </a:effectRef>
+          <a:fontRef idx="minor">
+            <a:schemeClr val="lt1"/>
+          </a:fontRef>
+        </p:style>
+        <p:txBody>
+          <a:bodyPr rtlCol="0" anchor="ctr"/>
+          <a:lstStyle/>
+          <a:p>
+            <a:pPr algn="ctr"/>
+          </a:p>
+        </p:txBody>
+      </p:sp>
+      <p:sp>
+        <p:nvSpPr>
+          <p:cNvPr id="15" name="Rounded Rectangle 14"/>
+          <p:cNvSpPr/>
+          <p:nvPr/>
+        </p:nvSpPr>
+        <p:spPr>
+          <a:xfrm>
+            <a:off x="3904488" y="1783080"/>
+            <a:ext cx="1389888" cy="256032"/>
+          </a:xfrm>
+          <a:prstGeom prst="roundRect">
+            <a:avLst/>
+          </a:prstGeom>
+          <a:solidFill>
+            <a:srgbClr val="7C3AED"/>
+          </a:solidFill>
+          <a:ln>
+            <a:noFill/>
+          </a:ln>
+        </p:spPr>
+        <p:style>
+          <a:lnRef idx="1">
+            <a:schemeClr val="accent1"/>
+          </a:lnRef>
+          <a:fillRef idx="3">
+            <a:schemeClr val="accent1"/>
+          </a:fillRef>
+          <a:effectRef idx="2">
+            <a:schemeClr val="accent1"/>
+          </a:effectRef>
+          <a:fontRef idx="minor">
+            <a:schemeClr val="lt1"/>
+          </a:fontRef>
+        </p:style>
+        <p:txBody>
+          <a:bodyPr rtlCol="0" anchor="ctr" wrap="none" lIns="0" tIns="0" rIns="0" bIns="0"/>
+          <a:lstStyle/>
+          <a:p>
+            <a:pPr algn="ctr">
+              <a:defRPr sz="800" b="1">
+                <a:solidFill>
+                  <a:srgbClr val="FFFFFF"/>
+                </a:solidFill>
+              </a:defRPr>
+            </a:pPr>
+            <a:r>
+              <a:t>3. POLICY GATE</a:t>
+            </a:r>
+          </a:p>
+        </p:txBody>
+      </p:sp>
+      <p:sp>
+        <p:nvSpPr>
+          <p:cNvPr id="16" name="TextBox 15"/>
+          <p:cNvSpPr txBox="1"/>
+          <p:nvPr/>
+        </p:nvSpPr>
+        <p:spPr>
+          <a:xfrm>
+            <a:off x="3959352" y="2103120"/>
+            <a:ext cx="1280160" cy="1188720"/>
+          </a:xfrm>
+          <a:prstGeom prst="rect">
+            <a:avLst/>
+          </a:prstGeom>
+          <a:noFill/>
+        </p:spPr>
+        <p:txBody>
+          <a:bodyPr wrap="square" lIns="0" rIns="0" tIns="0" bIns="0">
+            <a:spAutoFit/>
+          </a:bodyPr>
+          <a:lstStyle/>
+          <a:p>
+            <a:pPr algn="ctr">
+              <a:defRPr sz="850">
+                <a:solidFill>
+                  <a:srgbClr val="0F172A"/>
+                </a:solidFill>
+              </a:defRPr>
+            </a:pPr>
+            <a:r>
+              <a:t>4-Tier Matrix</a:t>
+            </a:r>
+            <a:br/>
+            <a:r>
+              <a:t>Zero-LLM Authority</a:t>
+            </a:r>
+            <a:br/>
+            <a:r>
+              <a:t>Fail-Closed 403</a:t>
+            </a:r>
+          </a:p>
+        </p:txBody>
+      </p:sp>
+      <p:sp>
+        <p:nvSpPr>
+          <p:cNvPr id="17" name="TextBox 16"/>
+          <p:cNvSpPr txBox="1"/>
+          <p:nvPr/>
+        </p:nvSpPr>
+        <p:spPr>
+          <a:xfrm>
+            <a:off x="5294376" y="2377440"/>
+            <a:ext cx="128016" cy="274320"/>
+          </a:xfrm>
+          <a:prstGeom prst="rect">
+            <a:avLst/>
+          </a:prstGeom>
+          <a:noFill/>
+        </p:spPr>
+        <p:txBody>
+          <a:bodyPr wrap="none" lIns="0" rIns="0" tIns="0" bIns="0">
+            <a:spAutoFit/>
+          </a:bodyPr>
+          <a:lstStyle/>
+          <a:p>
+            <a:pPr algn="ctr">
+              <a:defRPr sz="1100" b="1">
+                <a:solidFill>
+                  <a:srgbClr val="0284C7"/>
+                </a:solidFill>
+              </a:defRPr>
+            </a:pPr>
+            <a:r>
+              <a:t>➔</a:t>
+            </a:r>
+          </a:p>
+        </p:txBody>
+      </p:sp>
+      <p:sp>
+        <p:nvSpPr>
+          <p:cNvPr id="18" name="Rounded Rectangle 17"/>
+          <p:cNvSpPr/>
+          <p:nvPr/>
+        </p:nvSpPr>
+        <p:spPr>
+          <a:xfrm>
+            <a:off x="5422392" y="1783080"/>
+            <a:ext cx="1389888" cy="1554480"/>
+          </a:xfrm>
+          <a:prstGeom prst="roundRect">
+            <a:avLst/>
+          </a:prstGeom>
+          <a:solidFill>
+            <a:srgbClr val="FAFCFF"/>
+          </a:solidFill>
+          <a:ln w="15240">
+            <a:solidFill>
+              <a:srgbClr val="0284C7"/>
+            </a:solidFill>
+          </a:ln>
+        </p:spPr>
+        <p:style>
+          <a:lnRef idx="1">
+            <a:schemeClr val="accent1"/>
+          </a:lnRef>
+          <a:fillRef idx="3">
+            <a:schemeClr val="accent1"/>
+          </a:fillRef>
+          <a:effectRef idx="2">
+            <a:schemeClr val="accent1"/>
+          </a:effectRef>
+          <a:fontRef idx="minor">
+            <a:schemeClr val="lt1"/>
+          </a:fontRef>
+        </p:style>
+        <p:txBody>
+          <a:bodyPr rtlCol="0" anchor="ctr"/>
+          <a:lstStyle/>
+          <a:p>
+            <a:pPr algn="ctr"/>
+          </a:p>
+        </p:txBody>
+      </p:sp>
+      <p:sp>
+        <p:nvSpPr>
+          <p:cNvPr id="19" name="Rounded Rectangle 18"/>
+          <p:cNvSpPr/>
+          <p:nvPr/>
+        </p:nvSpPr>
+        <p:spPr>
+          <a:xfrm>
+            <a:off x="5422392" y="1783080"/>
+            <a:ext cx="1389888" cy="256032"/>
+          </a:xfrm>
+          <a:prstGeom prst="roundRect">
+            <a:avLst/>
+          </a:prstGeom>
+          <a:solidFill>
+            <a:srgbClr val="0284C7"/>
+          </a:solidFill>
+          <a:ln>
+            <a:noFill/>
+          </a:ln>
+        </p:spPr>
+        <p:style>
+          <a:lnRef idx="1">
+            <a:schemeClr val="accent1"/>
+          </a:lnRef>
+          <a:fillRef idx="3">
+            <a:schemeClr val="accent1"/>
+          </a:fillRef>
+          <a:effectRef idx="2">
+            <a:schemeClr val="accent1"/>
+          </a:effectRef>
+          <a:fontRef idx="minor">
+            <a:schemeClr val="lt1"/>
+          </a:fontRef>
+        </p:style>
+        <p:txBody>
+          <a:bodyPr rtlCol="0" anchor="ctr" wrap="none" lIns="0" tIns="0" rIns="0" bIns="0"/>
+          <a:lstStyle/>
+          <a:p>
+            <a:pPr algn="ctr">
+              <a:defRPr sz="800" b="1">
+                <a:solidFill>
+                  <a:srgbClr val="FFFFFF"/>
+                </a:solidFill>
+              </a:defRPr>
+            </a:pPr>
+            <a:r>
+              <a:t>4. DUAL-ROUTE AI</a:t>
+            </a:r>
+          </a:p>
+        </p:txBody>
+      </p:sp>
+      <p:sp>
+        <p:nvSpPr>
+          <p:cNvPr id="20" name="TextBox 19"/>
+          <p:cNvSpPr txBox="1"/>
+          <p:nvPr/>
+        </p:nvSpPr>
+        <p:spPr>
+          <a:xfrm>
+            <a:off x="5477256" y="2103120"/>
+            <a:ext cx="1280160" cy="1188720"/>
+          </a:xfrm>
+          <a:prstGeom prst="rect">
+            <a:avLst/>
+          </a:prstGeom>
+          <a:noFill/>
+        </p:spPr>
+        <p:txBody>
+          <a:bodyPr wrap="square" lIns="0" rIns="0" tIns="0" bIns="0">
+            <a:spAutoFit/>
+          </a:bodyPr>
+          <a:lstStyle/>
+          <a:p>
+            <a:pPr algn="ctr">
+              <a:defRPr sz="850">
+                <a:solidFill>
+                  <a:srgbClr val="0F172A"/>
+                </a:solidFill>
+              </a:defRPr>
+            </a:pPr>
+            <a:r>
+              <a:t>Cloud (Groq/Gemini)</a:t>
+            </a:r>
+            <a:br/>
+            <a:r>
+              <a:t>Air-Gap (Gemma 3)</a:t>
+            </a:r>
+            <a:br/>
+            <a:r>
+              <a:t>Local Inference</a:t>
+            </a:r>
+          </a:p>
+        </p:txBody>
+      </p:sp>
+      <p:sp>
+        <p:nvSpPr>
+          <p:cNvPr id="21" name="TextBox 20"/>
+          <p:cNvSpPr txBox="1"/>
+          <p:nvPr/>
+        </p:nvSpPr>
+        <p:spPr>
+          <a:xfrm>
+            <a:off x="6812280" y="2377440"/>
+            <a:ext cx="128016" cy="274320"/>
+          </a:xfrm>
+          <a:prstGeom prst="rect">
+            <a:avLst/>
+          </a:prstGeom>
+          <a:noFill/>
+        </p:spPr>
+        <p:txBody>
+          <a:bodyPr wrap="none" lIns="0" rIns="0" tIns="0" bIns="0">
+            <a:spAutoFit/>
+          </a:bodyPr>
+          <a:lstStyle/>
+          <a:p>
+            <a:pPr algn="ctr">
+              <a:defRPr sz="1100" b="1">
+                <a:solidFill>
+                  <a:srgbClr val="0284C7"/>
+                </a:solidFill>
+              </a:defRPr>
+            </a:pPr>
+            <a:r>
+              <a:t>➔</a:t>
+            </a:r>
+          </a:p>
+        </p:txBody>
+      </p:sp>
+      <p:sp>
+        <p:nvSpPr>
+          <p:cNvPr id="22" name="Rounded Rectangle 21"/>
+          <p:cNvSpPr/>
+          <p:nvPr/>
+        </p:nvSpPr>
+        <p:spPr>
+          <a:xfrm>
+            <a:off x="6940296" y="1783080"/>
+            <a:ext cx="1389888" cy="1554480"/>
+          </a:xfrm>
+          <a:prstGeom prst="roundRect">
+            <a:avLst/>
+          </a:prstGeom>
+          <a:solidFill>
+            <a:srgbClr val="FAFCFF"/>
+          </a:solidFill>
+          <a:ln w="15240">
+            <a:solidFill>
+              <a:srgbClr val="0891B2"/>
+            </a:solidFill>
+          </a:ln>
+        </p:spPr>
+        <p:style>
+          <a:lnRef idx="1">
+            <a:schemeClr val="accent1"/>
+          </a:lnRef>
+          <a:fillRef idx="3">
+            <a:schemeClr val="accent1"/>
+          </a:fillRef>
+          <a:effectRef idx="2">
+            <a:schemeClr val="accent1"/>
+          </a:effectRef>
+          <a:fontRef idx="minor">
+            <a:schemeClr val="lt1"/>
+          </a:fontRef>
+        </p:style>
+        <p:txBody>
+          <a:bodyPr rtlCol="0" anchor="ctr"/>
+          <a:lstStyle/>
+          <a:p>
+            <a:pPr algn="ctr"/>
+          </a:p>
+        </p:txBody>
+      </p:sp>
+      <p:sp>
+        <p:nvSpPr>
+          <p:cNvPr id="23" name="Rounded Rectangle 22"/>
+          <p:cNvSpPr/>
+          <p:nvPr/>
+        </p:nvSpPr>
+        <p:spPr>
+          <a:xfrm>
+            <a:off x="6940296" y="1783080"/>
+            <a:ext cx="1389888" cy="256032"/>
+          </a:xfrm>
+          <a:prstGeom prst="roundRect">
+            <a:avLst/>
+          </a:prstGeom>
+          <a:solidFill>
+            <a:srgbClr val="0891B2"/>
+          </a:solidFill>
+          <a:ln>
+            <a:noFill/>
+          </a:ln>
+        </p:spPr>
+        <p:style>
+          <a:lnRef idx="1">
+            <a:schemeClr val="accent1"/>
+          </a:lnRef>
+          <a:fillRef idx="3">
+            <a:schemeClr val="accent1"/>
+          </a:fillRef>
+          <a:effectRef idx="2">
+            <a:schemeClr val="accent1"/>
+          </a:effectRef>
+          <a:fontRef idx="minor">
+            <a:schemeClr val="lt1"/>
+          </a:fontRef>
+        </p:style>
+        <p:txBody>
+          <a:bodyPr rtlCol="0" anchor="ctr" wrap="none" lIns="0" tIns="0" rIns="0" bIns="0"/>
+          <a:lstStyle/>
+          <a:p>
+            <a:pPr algn="ctr">
+              <a:defRPr sz="800" b="1">
+                <a:solidFill>
+                  <a:srgbClr val="FFFFFF"/>
+                </a:solidFill>
+              </a:defRPr>
+            </a:pPr>
+            <a:r>
+              <a:t>5. RAG RETRIEVAL</a:t>
+            </a:r>
+          </a:p>
+        </p:txBody>
+      </p:sp>
+      <p:sp>
+        <p:nvSpPr>
+          <p:cNvPr id="24" name="TextBox 23"/>
+          <p:cNvSpPr txBox="1"/>
+          <p:nvPr/>
+        </p:nvSpPr>
+        <p:spPr>
+          <a:xfrm>
+            <a:off x="6995160" y="2103120"/>
+            <a:ext cx="1280160" cy="1188720"/>
+          </a:xfrm>
+          <a:prstGeom prst="rect">
+            <a:avLst/>
+          </a:prstGeom>
+          <a:noFill/>
+        </p:spPr>
+        <p:txBody>
+          <a:bodyPr wrap="square" lIns="0" rIns="0" tIns="0" bIns="0">
+            <a:spAutoFit/>
+          </a:bodyPr>
+          <a:lstStyle/>
+          <a:p>
+            <a:pPr algn="ctr">
+              <a:defRPr sz="850">
+                <a:solidFill>
+                  <a:srgbClr val="0F172A"/>
+                </a:solidFill>
+              </a:defRPr>
+            </a:pPr>
+            <a:r>
+              <a:t>pgvector HNSW</a:t>
+            </a:r>
+            <a:br/>
+            <a:r>
+              <a:t>Top-k Citation Offsets</a:t>
+            </a:r>
+            <a:br/>
+            <a:r>
+              <a:t>Canonical Brief</a:t>
+            </a:r>
+          </a:p>
+        </p:txBody>
+      </p:sp>
+      <p:sp>
+        <p:nvSpPr>
+          <p:cNvPr id="25" name="TextBox 24"/>
+          <p:cNvSpPr txBox="1"/>
+          <p:nvPr/>
+        </p:nvSpPr>
+        <p:spPr>
+          <a:xfrm>
+            <a:off x="8330184" y="2377440"/>
+            <a:ext cx="128016" cy="274320"/>
+          </a:xfrm>
+          <a:prstGeom prst="rect">
+            <a:avLst/>
+          </a:prstGeom>
+          <a:noFill/>
+        </p:spPr>
+        <p:txBody>
+          <a:bodyPr wrap="none" lIns="0" rIns="0" tIns="0" bIns="0">
+            <a:spAutoFit/>
+          </a:bodyPr>
+          <a:lstStyle/>
+          <a:p>
+            <a:pPr algn="ctr">
+              <a:defRPr sz="1100" b="1">
+                <a:solidFill>
+                  <a:srgbClr val="0284C7"/>
+                </a:solidFill>
+              </a:defRPr>
+            </a:pPr>
+            <a:r>
+              <a:t>➔</a:t>
+            </a:r>
+          </a:p>
+        </p:txBody>
+      </p:sp>
+      <p:sp>
+        <p:nvSpPr>
+          <p:cNvPr id="26" name="Rounded Rectangle 25"/>
+          <p:cNvSpPr/>
+          <p:nvPr/>
+        </p:nvSpPr>
+        <p:spPr>
+          <a:xfrm>
+            <a:off x="8458200" y="1783080"/>
+            <a:ext cx="1389888" cy="1554480"/>
+          </a:xfrm>
+          <a:prstGeom prst="roundRect">
+            <a:avLst/>
+          </a:prstGeom>
+          <a:solidFill>
+            <a:srgbClr val="FAFCFF"/>
+          </a:solidFill>
+          <a:ln w="15240">
+            <a:solidFill>
+              <a:srgbClr val="10B981"/>
+            </a:solidFill>
+          </a:ln>
+        </p:spPr>
+        <p:style>
+          <a:lnRef idx="1">
+            <a:schemeClr val="accent1"/>
+          </a:lnRef>
+          <a:fillRef idx="3">
+            <a:schemeClr val="accent1"/>
+          </a:fillRef>
+          <a:effectRef idx="2">
+            <a:schemeClr val="accent1"/>
+          </a:effectRef>
+          <a:fontRef idx="minor">
+            <a:schemeClr val="lt1"/>
+          </a:fontRef>
+        </p:style>
+        <p:txBody>
+          <a:bodyPr rtlCol="0" anchor="ctr"/>
+          <a:lstStyle/>
+          <a:p>
+            <a:pPr algn="ctr"/>
+          </a:p>
+        </p:txBody>
+      </p:sp>
+      <p:sp>
+        <p:nvSpPr>
+          <p:cNvPr id="27" name="Rounded Rectangle 26"/>
+          <p:cNvSpPr/>
+          <p:nvPr/>
+        </p:nvSpPr>
+        <p:spPr>
+          <a:xfrm>
+            <a:off x="8458200" y="1783080"/>
+            <a:ext cx="1389888" cy="256032"/>
+          </a:xfrm>
+          <a:prstGeom prst="roundRect">
+            <a:avLst/>
+          </a:prstGeom>
+          <a:solidFill>
+            <a:srgbClr val="10B981"/>
+          </a:solidFill>
+          <a:ln>
+            <a:noFill/>
+          </a:ln>
+        </p:spPr>
+        <p:style>
+          <a:lnRef idx="1">
+            <a:schemeClr val="accent1"/>
+          </a:lnRef>
+          <a:fillRef idx="3">
+            <a:schemeClr val="accent1"/>
+          </a:fillRef>
+          <a:effectRef idx="2">
+            <a:schemeClr val="accent1"/>
+          </a:effectRef>
+          <a:fontRef idx="minor">
+            <a:schemeClr val="lt1"/>
+          </a:fontRef>
+        </p:style>
+        <p:txBody>
+          <a:bodyPr rtlCol="0" anchor="ctr" wrap="none" lIns="0" tIns="0" rIns="0" bIns="0"/>
+          <a:lstStyle/>
+          <a:p>
+            <a:pPr algn="ctr">
+              <a:defRPr sz="800" b="1">
+                <a:solidFill>
+                  <a:srgbClr val="FFFFFF"/>
+                </a:solidFill>
+              </a:defRPr>
+            </a:pPr>
+            <a:r>
+              <a:t>6. NLI VERIFIER</a:t>
+            </a:r>
+          </a:p>
+        </p:txBody>
+      </p:sp>
+      <p:sp>
+        <p:nvSpPr>
+          <p:cNvPr id="28" name="TextBox 27"/>
+          <p:cNvSpPr txBox="1"/>
+          <p:nvPr/>
+        </p:nvSpPr>
+        <p:spPr>
+          <a:xfrm>
+            <a:off x="8513064" y="2103120"/>
+            <a:ext cx="1280160" cy="1188720"/>
+          </a:xfrm>
+          <a:prstGeom prst="rect">
+            <a:avLst/>
+          </a:prstGeom>
+          <a:noFill/>
+        </p:spPr>
+        <p:txBody>
+          <a:bodyPr wrap="square" lIns="0" rIns="0" tIns="0" bIns="0">
+            <a:spAutoFit/>
+          </a:bodyPr>
+          <a:lstStyle/>
+          <a:p>
+            <a:pPr algn="ctr">
+              <a:defRPr sz="850">
+                <a:solidFill>
+                  <a:srgbClr val="0F172A"/>
+                </a:solidFill>
+              </a:defRPr>
+            </a:pPr>
+            <a:r>
+              <a:t>Claim Auditing</a:t>
+            </a:r>
+            <a:br/>
+            <a:r>
+              <a:t>Grounding Scoring</a:t>
+            </a:r>
+            <a:br/>
+            <a:r>
+              <a:t>Fact Consistency</a:t>
+            </a:r>
+          </a:p>
+        </p:txBody>
+      </p:sp>
+      <p:sp>
+        <p:nvSpPr>
+          <p:cNvPr id="29" name="TextBox 28"/>
+          <p:cNvSpPr txBox="1"/>
+          <p:nvPr/>
+        </p:nvSpPr>
+        <p:spPr>
+          <a:xfrm>
+            <a:off x="9848088" y="2377440"/>
+            <a:ext cx="128016" cy="274320"/>
+          </a:xfrm>
+          <a:prstGeom prst="rect">
+            <a:avLst/>
+          </a:prstGeom>
+          <a:noFill/>
+        </p:spPr>
+        <p:txBody>
+          <a:bodyPr wrap="none" lIns="0" rIns="0" tIns="0" bIns="0">
+            <a:spAutoFit/>
+          </a:bodyPr>
+          <a:lstStyle/>
+          <a:p>
+            <a:pPr algn="ctr">
+              <a:defRPr sz="1100" b="1">
+                <a:solidFill>
+                  <a:srgbClr val="0284C7"/>
+                </a:solidFill>
+              </a:defRPr>
+            </a:pPr>
+            <a:r>
+              <a:t>➔</a:t>
+            </a:r>
+          </a:p>
+        </p:txBody>
+      </p:sp>
+      <p:sp>
+        <p:nvSpPr>
+          <p:cNvPr id="30" name="Rounded Rectangle 29"/>
+          <p:cNvSpPr/>
+          <p:nvPr/>
+        </p:nvSpPr>
+        <p:spPr>
+          <a:xfrm>
+            <a:off x="9976104" y="1783080"/>
+            <a:ext cx="1389888" cy="1554480"/>
+          </a:xfrm>
+          <a:prstGeom prst="roundRect">
+            <a:avLst/>
+          </a:prstGeom>
+          <a:solidFill>
+            <a:srgbClr val="FAFCFF"/>
+          </a:solidFill>
+          <a:ln w="15240">
+            <a:solidFill>
+              <a:srgbClr val="0B1220"/>
+            </a:solidFill>
+          </a:ln>
+        </p:spPr>
+        <p:style>
+          <a:lnRef idx="1">
+            <a:schemeClr val="accent1"/>
+          </a:lnRef>
+          <a:fillRef idx="3">
+            <a:schemeClr val="accent1"/>
+          </a:fillRef>
+          <a:effectRef idx="2">
+            <a:schemeClr val="accent1"/>
+          </a:effectRef>
+          <a:fontRef idx="minor">
+            <a:schemeClr val="lt1"/>
+          </a:fontRef>
+        </p:style>
+        <p:txBody>
+          <a:bodyPr rtlCol="0" anchor="ctr"/>
+          <a:lstStyle/>
+          <a:p>
+            <a:pPr algn="ctr"/>
+          </a:p>
+        </p:txBody>
+      </p:sp>
+      <p:sp>
+        <p:nvSpPr>
+          <p:cNvPr id="31" name="Rounded Rectangle 30"/>
+          <p:cNvSpPr/>
+          <p:nvPr/>
+        </p:nvSpPr>
+        <p:spPr>
+          <a:xfrm>
+            <a:off x="9976104" y="1783080"/>
+            <a:ext cx="1389888" cy="256032"/>
+          </a:xfrm>
+          <a:prstGeom prst="roundRect">
+            <a:avLst/>
+          </a:prstGeom>
+          <a:solidFill>
+            <a:srgbClr val="0B1220"/>
+          </a:solidFill>
+          <a:ln>
+            <a:noFill/>
+          </a:ln>
+        </p:spPr>
+        <p:style>
+          <a:lnRef idx="1">
+            <a:schemeClr val="accent1"/>
+          </a:lnRef>
+          <a:fillRef idx="3">
+            <a:schemeClr val="accent1"/>
+          </a:fillRef>
+          <a:effectRef idx="2">
+            <a:schemeClr val="accent1"/>
+          </a:effectRef>
+          <a:fontRef idx="minor">
+            <a:schemeClr val="lt1"/>
+          </a:fontRef>
+        </p:style>
+        <p:txBody>
+          <a:bodyPr rtlCol="0" anchor="ctr" wrap="none" lIns="0" tIns="0" rIns="0" bIns="0"/>
+          <a:lstStyle/>
+          <a:p>
+            <a:pPr algn="ctr">
+              <a:defRPr sz="800" b="1">
+                <a:solidFill>
+                  <a:srgbClr val="FFFFFF"/>
+                </a:solidFill>
+              </a:defRPr>
+            </a:pPr>
+            <a:r>
+              <a:t>7. BLOCKCHAIN SEAL</a:t>
+            </a:r>
+          </a:p>
+        </p:txBody>
+      </p:sp>
+      <p:sp>
+        <p:nvSpPr>
+          <p:cNvPr id="32" name="TextBox 31"/>
+          <p:cNvSpPr txBox="1"/>
+          <p:nvPr/>
+        </p:nvSpPr>
+        <p:spPr>
+          <a:xfrm>
+            <a:off x="10030968" y="2103120"/>
+            <a:ext cx="1280160" cy="1188720"/>
+          </a:xfrm>
+          <a:prstGeom prst="rect">
+            <a:avLst/>
+          </a:prstGeom>
+          <a:noFill/>
+        </p:spPr>
+        <p:txBody>
+          <a:bodyPr wrap="square" lIns="0" rIns="0" tIns="0" bIns="0">
+            <a:spAutoFit/>
+          </a:bodyPr>
+          <a:lstStyle/>
+          <a:p>
+            <a:pPr algn="ctr">
+              <a:defRPr sz="850">
+                <a:solidFill>
+                  <a:srgbClr val="0F172A"/>
+                </a:solidFill>
+              </a:defRPr>
+            </a:pPr>
+            <a:r>
+              <a:t>Ethereum Sepolia</a:t>
+            </a:r>
+            <a:br/>
+            <a:r>
+              <a:t>SHA-256 Digest</a:t>
+            </a:r>
+            <a:br/>
+            <a:r>
+              <a:t>Ed25519 Sign</a:t>
+            </a:r>
+          </a:p>
+        </p:txBody>
+      </p:sp>
+      <p:sp>
+        <p:nvSpPr>
+          <p:cNvPr id="33" name="Rounded Rectangle 32"/>
+          <p:cNvSpPr/>
+          <p:nvPr/>
+        </p:nvSpPr>
+        <p:spPr>
+          <a:xfrm>
+            <a:off x="731520" y="3977639"/>
+            <a:ext cx="10728655" cy="2651760"/>
+          </a:xfrm>
+          <a:prstGeom prst="roundRect">
+            <a:avLst/>
+          </a:prstGeom>
+          <a:solidFill>
+            <a:srgbClr val="FFFFFF"/>
+          </a:solidFill>
+          <a:ln w="15240">
+            <a:solidFill>
+              <a:srgbClr val="E2E8F0"/>
+            </a:solidFill>
+          </a:ln>
+        </p:spPr>
+        <p:style>
+          <a:lnRef idx="1">
+            <a:schemeClr val="accent1"/>
+          </a:lnRef>
+          <a:fillRef idx="3">
+            <a:schemeClr val="accent1"/>
+          </a:fillRef>
+          <a:effectRef idx="2">
+            <a:schemeClr val="accent1"/>
+          </a:effectRef>
+          <a:fontRef idx="minor">
+            <a:schemeClr val="lt1"/>
+          </a:fontRef>
+        </p:style>
+        <p:txBody>
+          <a:bodyPr rtlCol="0" anchor="ctr"/>
+          <a:lstStyle/>
+          <a:p>
+            <a:pPr algn="ctr"/>
+          </a:p>
+        </p:txBody>
+      </p:sp>
+      <p:sp>
+        <p:nvSpPr>
+          <p:cNvPr id="34" name="Rounded Rectangle 33"/>
+          <p:cNvSpPr/>
+          <p:nvPr/>
+        </p:nvSpPr>
+        <p:spPr>
+          <a:xfrm>
+            <a:off x="868680" y="4069080"/>
+            <a:ext cx="3657600" cy="237744"/>
+          </a:xfrm>
+          <a:prstGeom prst="roundRect">
+            <a:avLst/>
+          </a:prstGeom>
+          <a:solidFill>
+            <a:srgbClr val="0284C7"/>
+          </a:solidFill>
+          <a:ln>
+            <a:noFill/>
+          </a:ln>
+        </p:spPr>
+        <p:style>
+          <a:lnRef idx="1">
+            <a:schemeClr val="accent1"/>
+          </a:lnRef>
+          <a:fillRef idx="3">
+            <a:schemeClr val="accent1"/>
+          </a:fillRef>
+          <a:effectRef idx="2">
+            <a:schemeClr val="accent1"/>
+          </a:effectRef>
+          <a:fontRef idx="minor">
+            <a:schemeClr val="lt1"/>
+          </a:fontRef>
+        </p:style>
+        <p:txBody>
+          <a:bodyPr rtlCol="0" anchor="ctr" wrap="none" lIns="0" tIns="0" rIns="0" bIns="0"/>
+          <a:lstStyle/>
+          <a:p>
+            <a:pPr algn="ctr">
+              <a:defRPr sz="850" b="1">
+                <a:solidFill>
+                  <a:srgbClr val="FFFFFF"/>
+                </a:solidFill>
+              </a:defRPr>
+            </a:pPr>
+            <a:r>
+              <a:t>SEVEN GOVERNED, AUDIENCE-TAILORED DELIVERABLES</a:t>
+            </a:r>
+          </a:p>
+        </p:txBody>
+      </p:sp>
+      <p:sp>
+        <p:nvSpPr>
+          <p:cNvPr id="35" name="Rounded Rectangle 34"/>
+          <p:cNvSpPr/>
+          <p:nvPr/>
+        </p:nvSpPr>
+        <p:spPr>
+          <a:xfrm>
+            <a:off x="868680" y="4407408"/>
+            <a:ext cx="1444752" cy="2057400"/>
+          </a:xfrm>
+          <a:prstGeom prst="roundRect">
+            <a:avLst/>
+          </a:prstGeom>
+          <a:solidFill>
+            <a:srgbClr val="FDFEFF"/>
+          </a:solidFill>
+          <a:ln w="12700">
+            <a:solidFill>
+              <a:srgbClr val="0284C7"/>
+            </a:solidFill>
+          </a:ln>
+        </p:spPr>
+        <p:style>
+          <a:lnRef idx="1">
+            <a:schemeClr val="accent1"/>
+          </a:lnRef>
+          <a:fillRef idx="3">
+            <a:schemeClr val="accent1"/>
+          </a:fillRef>
+          <a:effectRef idx="2">
+            <a:schemeClr val="accent1"/>
+          </a:effectRef>
+          <a:fontRef idx="minor">
+            <a:schemeClr val="lt1"/>
+          </a:fontRef>
+        </p:style>
+        <p:txBody>
+          <a:bodyPr rtlCol="0" anchor="ctr"/>
+          <a:lstStyle/>
+          <a:p>
+            <a:pPr algn="ctr"/>
+          </a:p>
+        </p:txBody>
+      </p:sp>
+      <p:sp>
+        <p:nvSpPr>
+          <p:cNvPr id="36" name="Rounded Rectangle 35"/>
+          <p:cNvSpPr/>
+          <p:nvPr/>
+        </p:nvSpPr>
+        <p:spPr>
+          <a:xfrm>
+            <a:off x="868680" y="4407408"/>
+            <a:ext cx="1444752" cy="237744"/>
+          </a:xfrm>
+          <a:prstGeom prst="roundRect">
+            <a:avLst/>
+          </a:prstGeom>
+          <a:solidFill>
+            <a:srgbClr val="0284C7"/>
+          </a:solidFill>
+          <a:ln>
+            <a:noFill/>
+          </a:ln>
+        </p:spPr>
+        <p:style>
+          <a:lnRef idx="1">
+            <a:schemeClr val="accent1"/>
+          </a:lnRef>
+          <a:fillRef idx="3">
+            <a:schemeClr val="accent1"/>
+          </a:fillRef>
+          <a:effectRef idx="2">
+            <a:schemeClr val="accent1"/>
+          </a:effectRef>
+          <a:fontRef idx="minor">
+            <a:schemeClr val="lt1"/>
+          </a:fontRef>
+        </p:style>
+        <p:txBody>
+          <a:bodyPr rtlCol="0" anchor="ctr" wrap="none" lIns="0" tIns="0" rIns="0" bIns="0"/>
+          <a:lstStyle/>
+          <a:p>
+            <a:pPr algn="ctr">
+              <a:defRPr sz="800" b="1">
+                <a:solidFill>
+                  <a:srgbClr val="FFFFFF"/>
+                </a:solidFill>
+              </a:defRPr>
+            </a:pPr>
+            <a:r>
+              <a:t>1. SUMMARY</a:t>
+            </a:r>
+          </a:p>
+        </p:txBody>
+      </p:sp>
+      <p:sp>
+        <p:nvSpPr>
+          <p:cNvPr id="37" name="TextBox 36"/>
+          <p:cNvSpPr txBox="1"/>
+          <p:nvPr/>
+        </p:nvSpPr>
+        <p:spPr>
+          <a:xfrm>
+            <a:off x="923544" y="4700016"/>
+            <a:ext cx="1335024" cy="1728216"/>
+          </a:xfrm>
+          <a:prstGeom prst="rect">
+            <a:avLst/>
+          </a:prstGeom>
+          <a:noFill/>
+        </p:spPr>
+        <p:txBody>
+          <a:bodyPr wrap="square" lIns="0" rIns="0" tIns="0" bIns="0">
+            <a:spAutoFit/>
+          </a:bodyPr>
+          <a:lstStyle/>
+          <a:p>
             <a:pPr>
               <a:spcAft>
-                <a:spcPts val="800"/>
+                <a:spcPts val="200"/>
               </a:spcAft>
-              <a:defRPr sz="1300" b="1">
-                <a:solidFill>
-                  <a:srgbClr val="0F172A"/>
-                </a:solidFill>
-              </a:defRPr>
-            </a:pPr>
-            <a:r>
-              <a:t>PERSISTENCE &amp; STORAGE</a:t>
+              <a:defRPr sz="800" b="1">
+                <a:solidFill>
+                  <a:srgbClr val="0284C7"/>
+                </a:solidFill>
+              </a:defRPr>
+            </a:pPr>
+            <a:r>
+              <a:t>Target: Executive C-Suite</a:t>
             </a:r>
           </a:p>
           <a:p>
             <a:pPr>
               <a:spcAft>
-                <a:spcPts val="600"/>
+                <a:spcPts val="300"/>
               </a:spcAft>
-            </a:pPr>
-            <a:r>
-              <a:rPr b="1" sz="1000">
-                <a:solidFill>
-                  <a:srgbClr val="0F172A"/>
-                </a:solidFill>
-              </a:rPr>
-              <a:t>• PostgreSQL 16 + pgvector: </a:t>
-            </a:r>
-            <a:r>
-              <a:rPr sz="900">
+              <a:defRPr sz="750">
                 <a:solidFill>
                   <a:srgbClr val="475569"/>
                 </a:solidFill>
-              </a:rPr>
-              <a:t>Relational persistence for jobs, outputs, verification logs, and 768-dim vector embeddings.</a:t>
-            </a:r>
-          </a:p>
+              </a:defRPr>
+            </a:pPr>
+            <a:r>
+              <a:t>High-level strategic brief, key metrics, financial &amp; policy impact.</a:t>
+            </a:r>
+          </a:p>
+          <a:p>
+            <a:pPr>
+              <a:defRPr sz="720" b="1">
+                <a:solidFill>
+                  <a:srgbClr val="0B1220"/>
+                </a:solidFill>
+              </a:defRPr>
+            </a:pPr>
+            <a:r>
+              <a:t>Format:</a:t>
+            </a:r>
+            <a:br/>
+            <a:r>
+              <a:t>Markdown / Clean Text / DOCX</a:t>
+            </a:r>
+          </a:p>
+        </p:txBody>
+      </p:sp>
+      <p:sp>
+        <p:nvSpPr>
+          <p:cNvPr id="38" name="Rounded Rectangle 37"/>
+          <p:cNvSpPr/>
+          <p:nvPr/>
+        </p:nvSpPr>
+        <p:spPr>
+          <a:xfrm>
+            <a:off x="2386584" y="4407408"/>
+            <a:ext cx="1444752" cy="2057400"/>
+          </a:xfrm>
+          <a:prstGeom prst="roundRect">
+            <a:avLst/>
+          </a:prstGeom>
+          <a:solidFill>
+            <a:srgbClr val="FDFEFF"/>
+          </a:solidFill>
+          <a:ln w="12700">
+            <a:solidFill>
+              <a:srgbClr val="E11D48"/>
+            </a:solidFill>
+          </a:ln>
+        </p:spPr>
+        <p:style>
+          <a:lnRef idx="1">
+            <a:schemeClr val="accent1"/>
+          </a:lnRef>
+          <a:fillRef idx="3">
+            <a:schemeClr val="accent1"/>
+          </a:fillRef>
+          <a:effectRef idx="2">
+            <a:schemeClr val="accent1"/>
+          </a:effectRef>
+          <a:fontRef idx="minor">
+            <a:schemeClr val="lt1"/>
+          </a:fontRef>
+        </p:style>
+        <p:txBody>
+          <a:bodyPr rtlCol="0" anchor="ctr"/>
+          <a:lstStyle/>
+          <a:p>
+            <a:pPr algn="ctr"/>
+          </a:p>
+        </p:txBody>
+      </p:sp>
+      <p:sp>
+        <p:nvSpPr>
+          <p:cNvPr id="39" name="Rounded Rectangle 38"/>
+          <p:cNvSpPr/>
+          <p:nvPr/>
+        </p:nvSpPr>
+        <p:spPr>
+          <a:xfrm>
+            <a:off x="2386584" y="4407408"/>
+            <a:ext cx="1444752" cy="237744"/>
+          </a:xfrm>
+          <a:prstGeom prst="roundRect">
+            <a:avLst/>
+          </a:prstGeom>
+          <a:solidFill>
+            <a:srgbClr val="E11D48"/>
+          </a:solidFill>
+          <a:ln>
+            <a:noFill/>
+          </a:ln>
+        </p:spPr>
+        <p:style>
+          <a:lnRef idx="1">
+            <a:schemeClr val="accent1"/>
+          </a:lnRef>
+          <a:fillRef idx="3">
+            <a:schemeClr val="accent1"/>
+          </a:fillRef>
+          <a:effectRef idx="2">
+            <a:schemeClr val="accent1"/>
+          </a:effectRef>
+          <a:fontRef idx="minor">
+            <a:schemeClr val="lt1"/>
+          </a:fontRef>
+        </p:style>
+        <p:txBody>
+          <a:bodyPr rtlCol="0" anchor="ctr" wrap="none" lIns="0" tIns="0" rIns="0" bIns="0"/>
+          <a:lstStyle/>
+          <a:p>
+            <a:pPr algn="ctr">
+              <a:defRPr sz="800" b="1">
+                <a:solidFill>
+                  <a:srgbClr val="FFFFFF"/>
+                </a:solidFill>
+              </a:defRPr>
+            </a:pPr>
+            <a:r>
+              <a:t>2. ADVISORY</a:t>
+            </a:r>
+          </a:p>
+        </p:txBody>
+      </p:sp>
+      <p:sp>
+        <p:nvSpPr>
+          <p:cNvPr id="40" name="TextBox 39"/>
+          <p:cNvSpPr txBox="1"/>
+          <p:nvPr/>
+        </p:nvSpPr>
+        <p:spPr>
+          <a:xfrm>
+            <a:off x="2441448" y="4700016"/>
+            <a:ext cx="1335024" cy="1728216"/>
+          </a:xfrm>
+          <a:prstGeom prst="rect">
+            <a:avLst/>
+          </a:prstGeom>
+          <a:noFill/>
+        </p:spPr>
+        <p:txBody>
+          <a:bodyPr wrap="square" lIns="0" rIns="0" tIns="0" bIns="0">
+            <a:spAutoFit/>
+          </a:bodyPr>
+          <a:lstStyle/>
           <a:p>
             <a:pPr>
               <a:spcAft>
-                <a:spcPts val="600"/>
+                <a:spcPts val="200"/>
               </a:spcAft>
-            </a:pPr>
-            <a:r>
-              <a:rPr b="1" sz="1000">
-                <a:solidFill>
-                  <a:srgbClr val="0F172A"/>
-                </a:solidFill>
-              </a:rPr>
-              <a:t>• Redis 7 + RQ Worker: </a:t>
-            </a:r>
-            <a:r>
-              <a:rPr sz="900">
-                <a:solidFill>
-                  <a:srgbClr val="475569"/>
-                </a:solidFill>
-              </a:rPr>
-              <a:t>Asynchronous job queuing, worker task dispatch, and rate-limiting cache.</a:t>
+              <a:defRPr sz="800" b="1">
+                <a:solidFill>
+                  <a:srgbClr val="E11D48"/>
+                </a:solidFill>
+              </a:defRPr>
+            </a:pPr>
+            <a:r>
+              <a:t>Target: Technical Teams</a:t>
             </a:r>
           </a:p>
           <a:p>
             <a:pPr>
               <a:spcAft>
-                <a:spcPts val="600"/>
+                <a:spcPts val="300"/>
               </a:spcAft>
-            </a:pPr>
-            <a:r>
-              <a:rPr b="1" sz="1000">
-                <a:solidFill>
-                  <a:srgbClr val="0F172A"/>
-                </a:solidFill>
-              </a:rPr>
-              <a:t>• S3 / MinIO Object Store: </a:t>
-            </a:r>
-            <a:r>
-              <a:rPr sz="900">
+              <a:defRPr sz="750">
                 <a:solidFill>
                   <a:srgbClr val="475569"/>
                 </a:solidFill>
-              </a:rPr>
-              <a:t>Binary storage for raw uploaded sources, PPTX presentations, PNGs, and PDF packages.</a:t>
-            </a:r>
-          </a:p>
+              </a:defRPr>
+            </a:pPr>
+            <a:r>
+              <a:t>Structured threat/policy advisory, impact ratings, mitigation roadmap.</a:t>
+            </a:r>
+          </a:p>
+          <a:p>
+            <a:pPr>
+              <a:defRPr sz="720" b="1">
+                <a:solidFill>
+                  <a:srgbClr val="0B1220"/>
+                </a:solidFill>
+              </a:defRPr>
+            </a:pPr>
+            <a:r>
+              <a:t>Format:</a:t>
+            </a:r>
+            <a:br/>
+            <a:r>
+              <a:t>Standardized Advisory Format</a:t>
+            </a:r>
+          </a:p>
+        </p:txBody>
+      </p:sp>
+      <p:sp>
+        <p:nvSpPr>
+          <p:cNvPr id="41" name="Rounded Rectangle 40"/>
+          <p:cNvSpPr/>
+          <p:nvPr/>
+        </p:nvSpPr>
+        <p:spPr>
+          <a:xfrm>
+            <a:off x="3904488" y="4407408"/>
+            <a:ext cx="1444752" cy="2057400"/>
+          </a:xfrm>
+          <a:prstGeom prst="roundRect">
+            <a:avLst/>
+          </a:prstGeom>
+          <a:solidFill>
+            <a:srgbClr val="FDFEFF"/>
+          </a:solidFill>
+          <a:ln w="12700">
+            <a:solidFill>
+              <a:srgbClr val="0891B2"/>
+            </a:solidFill>
+          </a:ln>
+        </p:spPr>
+        <p:style>
+          <a:lnRef idx="1">
+            <a:schemeClr val="accent1"/>
+          </a:lnRef>
+          <a:fillRef idx="3">
+            <a:schemeClr val="accent1"/>
+          </a:fillRef>
+          <a:effectRef idx="2">
+            <a:schemeClr val="accent1"/>
+          </a:effectRef>
+          <a:fontRef idx="minor">
+            <a:schemeClr val="lt1"/>
+          </a:fontRef>
+        </p:style>
+        <p:txBody>
+          <a:bodyPr rtlCol="0" anchor="ctr"/>
+          <a:lstStyle/>
+          <a:p>
+            <a:pPr algn="ctr"/>
+          </a:p>
+        </p:txBody>
+      </p:sp>
+      <p:sp>
+        <p:nvSpPr>
+          <p:cNvPr id="42" name="Rounded Rectangle 41"/>
+          <p:cNvSpPr/>
+          <p:nvPr/>
+        </p:nvSpPr>
+        <p:spPr>
+          <a:xfrm>
+            <a:off x="3904488" y="4407408"/>
+            <a:ext cx="1444752" cy="237744"/>
+          </a:xfrm>
+          <a:prstGeom prst="roundRect">
+            <a:avLst/>
+          </a:prstGeom>
+          <a:solidFill>
+            <a:srgbClr val="0891B2"/>
+          </a:solidFill>
+          <a:ln>
+            <a:noFill/>
+          </a:ln>
+        </p:spPr>
+        <p:style>
+          <a:lnRef idx="1">
+            <a:schemeClr val="accent1"/>
+          </a:lnRef>
+          <a:fillRef idx="3">
+            <a:schemeClr val="accent1"/>
+          </a:fillRef>
+          <a:effectRef idx="2">
+            <a:schemeClr val="accent1"/>
+          </a:effectRef>
+          <a:fontRef idx="minor">
+            <a:schemeClr val="lt1"/>
+          </a:fontRef>
+        </p:style>
+        <p:txBody>
+          <a:bodyPr rtlCol="0" anchor="ctr" wrap="none" lIns="0" tIns="0" rIns="0" bIns="0"/>
+          <a:lstStyle/>
+          <a:p>
+            <a:pPr algn="ctr">
+              <a:defRPr sz="800" b="1">
+                <a:solidFill>
+                  <a:srgbClr val="FFFFFF"/>
+                </a:solidFill>
+              </a:defRPr>
+            </a:pPr>
+            <a:r>
+              <a:t>3. PRESENTATION</a:t>
+            </a:r>
+          </a:p>
+        </p:txBody>
+      </p:sp>
+      <p:sp>
+        <p:nvSpPr>
+          <p:cNvPr id="43" name="TextBox 42"/>
+          <p:cNvSpPr txBox="1"/>
+          <p:nvPr/>
+        </p:nvSpPr>
+        <p:spPr>
+          <a:xfrm>
+            <a:off x="3959352" y="4700016"/>
+            <a:ext cx="1335024" cy="1728216"/>
+          </a:xfrm>
+          <a:prstGeom prst="rect">
+            <a:avLst/>
+          </a:prstGeom>
+          <a:noFill/>
+        </p:spPr>
+        <p:txBody>
+          <a:bodyPr wrap="square" lIns="0" rIns="0" tIns="0" bIns="0">
+            <a:spAutoFit/>
+          </a:bodyPr>
+          <a:lstStyle/>
           <a:p>
             <a:pPr>
               <a:spcAft>
-                <a:spcPts val="600"/>
+                <a:spcPts val="200"/>
               </a:spcAft>
-            </a:pPr>
-            <a:r>
-              <a:rPr b="1" sz="1000">
-                <a:solidFill>
-                  <a:srgbClr val="0F172A"/>
-                </a:solidFill>
-              </a:rPr>
-              <a:t>• Cryptographic Ledger Boundary: </a:t>
-            </a:r>
-            <a:r>
-              <a:rPr sz="900">
+              <a:defRPr sz="800" b="1">
+                <a:solidFill>
+                  <a:srgbClr val="0891B2"/>
+                </a:solidFill>
+              </a:defRPr>
+            </a:pPr>
+            <a:r>
+              <a:t>Target: Board &amp; Stakeholders</a:t>
+            </a:r>
+          </a:p>
+          <a:p>
+            <a:pPr>
+              <a:spcAft>
+                <a:spcPts val="300"/>
+              </a:spcAft>
+              <a:defRPr sz="750">
                 <a:solidFill>
                   <a:srgbClr val="475569"/>
                 </a:solidFill>
-              </a:rPr>
-              <a:t>Configuration-ready provenance ledger interface storing immutable SHA-256 digest trees.</a:t>
+              </a:defRPr>
+            </a:pPr>
+            <a:r>
+              <a:t>Structured executive slide deck programmatically compiled into native slides.</a:t>
+            </a:r>
+          </a:p>
+          <a:p>
+            <a:pPr>
+              <a:defRPr sz="720" b="1">
+                <a:solidFill>
+                  <a:srgbClr val="0B1220"/>
+                </a:solidFill>
+              </a:defRPr>
+            </a:pPr>
+            <a:r>
+              <a:t>Format:</a:t>
+            </a:r>
+            <a:br/>
+            <a:r>
+              <a:t>Native Microsoft PPTX (.pptx)</a:t>
+            </a:r>
+          </a:p>
+        </p:txBody>
+      </p:sp>
+      <p:sp>
+        <p:nvSpPr>
+          <p:cNvPr id="44" name="Rounded Rectangle 43"/>
+          <p:cNvSpPr/>
+          <p:nvPr/>
+        </p:nvSpPr>
+        <p:spPr>
+          <a:xfrm>
+            <a:off x="5422392" y="4407408"/>
+            <a:ext cx="1444752" cy="2057400"/>
+          </a:xfrm>
+          <a:prstGeom prst="roundRect">
+            <a:avLst/>
+          </a:prstGeom>
+          <a:solidFill>
+            <a:srgbClr val="FDFEFF"/>
+          </a:solidFill>
+          <a:ln w="12700">
+            <a:solidFill>
+              <a:srgbClr val="7C3AED"/>
+            </a:solidFill>
+          </a:ln>
+        </p:spPr>
+        <p:style>
+          <a:lnRef idx="1">
+            <a:schemeClr val="accent1"/>
+          </a:lnRef>
+          <a:fillRef idx="3">
+            <a:schemeClr val="accent1"/>
+          </a:fillRef>
+          <a:effectRef idx="2">
+            <a:schemeClr val="accent1"/>
+          </a:effectRef>
+          <a:fontRef idx="minor">
+            <a:schemeClr val="lt1"/>
+          </a:fontRef>
+        </p:style>
+        <p:txBody>
+          <a:bodyPr rtlCol="0" anchor="ctr"/>
+          <a:lstStyle/>
+          <a:p>
+            <a:pPr algn="ctr"/>
+          </a:p>
+        </p:txBody>
+      </p:sp>
+      <p:sp>
+        <p:nvSpPr>
+          <p:cNvPr id="45" name="Rounded Rectangle 44"/>
+          <p:cNvSpPr/>
+          <p:nvPr/>
+        </p:nvSpPr>
+        <p:spPr>
+          <a:xfrm>
+            <a:off x="5422392" y="4407408"/>
+            <a:ext cx="1444752" cy="237744"/>
+          </a:xfrm>
+          <a:prstGeom prst="roundRect">
+            <a:avLst/>
+          </a:prstGeom>
+          <a:solidFill>
+            <a:srgbClr val="7C3AED"/>
+          </a:solidFill>
+          <a:ln>
+            <a:noFill/>
+          </a:ln>
+        </p:spPr>
+        <p:style>
+          <a:lnRef idx="1">
+            <a:schemeClr val="accent1"/>
+          </a:lnRef>
+          <a:fillRef idx="3">
+            <a:schemeClr val="accent1"/>
+          </a:fillRef>
+          <a:effectRef idx="2">
+            <a:schemeClr val="accent1"/>
+          </a:effectRef>
+          <a:fontRef idx="minor">
+            <a:schemeClr val="lt1"/>
+          </a:fontRef>
+        </p:style>
+        <p:txBody>
+          <a:bodyPr rtlCol="0" anchor="ctr" wrap="none" lIns="0" tIns="0" rIns="0" bIns="0"/>
+          <a:lstStyle/>
+          <a:p>
+            <a:pPr algn="ctr">
+              <a:defRPr sz="800" b="1">
+                <a:solidFill>
+                  <a:srgbClr val="FFFFFF"/>
+                </a:solidFill>
+              </a:defRPr>
+            </a:pPr>
+            <a:r>
+              <a:t>4. INFOGRAPHIC</a:t>
+            </a:r>
+          </a:p>
+        </p:txBody>
+      </p:sp>
+      <p:sp>
+        <p:nvSpPr>
+          <p:cNvPr id="46" name="TextBox 45"/>
+          <p:cNvSpPr txBox="1"/>
+          <p:nvPr/>
+        </p:nvSpPr>
+        <p:spPr>
+          <a:xfrm>
+            <a:off x="5477256" y="4700016"/>
+            <a:ext cx="1335024" cy="1728216"/>
+          </a:xfrm>
+          <a:prstGeom prst="rect">
+            <a:avLst/>
+          </a:prstGeom>
+          <a:noFill/>
+        </p:spPr>
+        <p:txBody>
+          <a:bodyPr wrap="square" lIns="0" rIns="0" tIns="0" bIns="0">
+            <a:spAutoFit/>
+          </a:bodyPr>
+          <a:lstStyle/>
+          <a:p>
+            <a:pPr>
+              <a:spcAft>
+                <a:spcPts val="200"/>
+              </a:spcAft>
+              <a:defRPr sz="800" b="1">
+                <a:solidFill>
+                  <a:srgbClr val="7C3AED"/>
+                </a:solidFill>
+              </a:defRPr>
+            </a:pPr>
+            <a:r>
+              <a:t>Target: Broad Audience</a:t>
+            </a:r>
+          </a:p>
+          <a:p>
+            <a:pPr>
+              <a:spcAft>
+                <a:spcPts val="300"/>
+              </a:spcAft>
+              <a:defRPr sz="750">
+                <a:solidFill>
+                  <a:srgbClr val="475569"/>
+                </a:solidFill>
+              </a:defRPr>
+            </a:pPr>
+            <a:r>
+              <a:t>Visual metrics breakdown, hierarchy blueprints, flow diagrams.</a:t>
+            </a:r>
+          </a:p>
+          <a:p>
+            <a:pPr>
+              <a:defRPr sz="720" b="1">
+                <a:solidFill>
+                  <a:srgbClr val="0B1220"/>
+                </a:solidFill>
+              </a:defRPr>
+            </a:pPr>
+            <a:r>
+              <a:t>Format:</a:t>
+            </a:r>
+            <a:br/>
+            <a:r>
+              <a:t>Semantic JSON + Scalable SVG</a:t>
+            </a:r>
+          </a:p>
+        </p:txBody>
+      </p:sp>
+      <p:sp>
+        <p:nvSpPr>
+          <p:cNvPr id="47" name="Rounded Rectangle 46"/>
+          <p:cNvSpPr/>
+          <p:nvPr/>
+        </p:nvSpPr>
+        <p:spPr>
+          <a:xfrm>
+            <a:off x="6940296" y="4407408"/>
+            <a:ext cx="1444752" cy="2057400"/>
+          </a:xfrm>
+          <a:prstGeom prst="roundRect">
+            <a:avLst/>
+          </a:prstGeom>
+          <a:solidFill>
+            <a:srgbClr val="FDFEFF"/>
+          </a:solidFill>
+          <a:ln w="12700">
+            <a:solidFill>
+              <a:srgbClr val="0B1220"/>
+            </a:solidFill>
+          </a:ln>
+        </p:spPr>
+        <p:style>
+          <a:lnRef idx="1">
+            <a:schemeClr val="accent1"/>
+          </a:lnRef>
+          <a:fillRef idx="3">
+            <a:schemeClr val="accent1"/>
+          </a:fillRef>
+          <a:effectRef idx="2">
+            <a:schemeClr val="accent1"/>
+          </a:effectRef>
+          <a:fontRef idx="minor">
+            <a:schemeClr val="lt1"/>
+          </a:fontRef>
+        </p:style>
+        <p:txBody>
+          <a:bodyPr rtlCol="0" anchor="ctr"/>
+          <a:lstStyle/>
+          <a:p>
+            <a:pPr algn="ctr"/>
+          </a:p>
+        </p:txBody>
+      </p:sp>
+      <p:sp>
+        <p:nvSpPr>
+          <p:cNvPr id="48" name="Rounded Rectangle 47"/>
+          <p:cNvSpPr/>
+          <p:nvPr/>
+        </p:nvSpPr>
+        <p:spPr>
+          <a:xfrm>
+            <a:off x="6940296" y="4407408"/>
+            <a:ext cx="1444752" cy="237744"/>
+          </a:xfrm>
+          <a:prstGeom prst="roundRect">
+            <a:avLst/>
+          </a:prstGeom>
+          <a:solidFill>
+            <a:srgbClr val="0B1220"/>
+          </a:solidFill>
+          <a:ln>
+            <a:noFill/>
+          </a:ln>
+        </p:spPr>
+        <p:style>
+          <a:lnRef idx="1">
+            <a:schemeClr val="accent1"/>
+          </a:lnRef>
+          <a:fillRef idx="3">
+            <a:schemeClr val="accent1"/>
+          </a:fillRef>
+          <a:effectRef idx="2">
+            <a:schemeClr val="accent1"/>
+          </a:effectRef>
+          <a:fontRef idx="minor">
+            <a:schemeClr val="lt1"/>
+          </a:fontRef>
+        </p:style>
+        <p:txBody>
+          <a:bodyPr rtlCol="0" anchor="ctr" wrap="none" lIns="0" tIns="0" rIns="0" bIns="0"/>
+          <a:lstStyle/>
+          <a:p>
+            <a:pPr algn="ctr">
+              <a:defRPr sz="800" b="1">
+                <a:solidFill>
+                  <a:srgbClr val="FFFFFF"/>
+                </a:solidFill>
+              </a:defRPr>
+            </a:pPr>
+            <a:r>
+              <a:t>5. VIDEO BRIEF</a:t>
+            </a:r>
+          </a:p>
+        </p:txBody>
+      </p:sp>
+      <p:sp>
+        <p:nvSpPr>
+          <p:cNvPr id="49" name="TextBox 48"/>
+          <p:cNvSpPr txBox="1"/>
+          <p:nvPr/>
+        </p:nvSpPr>
+        <p:spPr>
+          <a:xfrm>
+            <a:off x="6995160" y="4700016"/>
+            <a:ext cx="1335024" cy="1728216"/>
+          </a:xfrm>
+          <a:prstGeom prst="rect">
+            <a:avLst/>
+          </a:prstGeom>
+          <a:noFill/>
+        </p:spPr>
+        <p:txBody>
+          <a:bodyPr wrap="square" lIns="0" rIns="0" tIns="0" bIns="0">
+            <a:spAutoFit/>
+          </a:bodyPr>
+          <a:lstStyle/>
+          <a:p>
+            <a:pPr>
+              <a:spcAft>
+                <a:spcPts val="200"/>
+              </a:spcAft>
+              <a:defRPr sz="800" b="1">
+                <a:solidFill>
+                  <a:srgbClr val="0B1220"/>
+                </a:solidFill>
+              </a:defRPr>
+            </a:pPr>
+            <a:r>
+              <a:t>Target: Media &amp; Production</a:t>
+            </a:r>
+          </a:p>
+          <a:p>
+            <a:pPr>
+              <a:spcAft>
+                <a:spcPts val="300"/>
+              </a:spcAft>
+              <a:defRPr sz="750">
+                <a:solidFill>
+                  <a:srgbClr val="475569"/>
+                </a:solidFill>
+              </a:defRPr>
+            </a:pPr>
+            <a:r>
+              <a:t>Scene-by-scene storyboard (PDF) + synchronized subtitle cue file (.srt).</a:t>
+            </a:r>
+          </a:p>
+          <a:p>
+            <a:pPr>
+              <a:defRPr sz="720" b="1">
+                <a:solidFill>
+                  <a:srgbClr val="0B1220"/>
+                </a:solidFill>
+              </a:defRPr>
+            </a:pPr>
+            <a:r>
+              <a:t>Format:</a:t>
+            </a:r>
+            <a:br/>
+            <a:r>
+              <a:t>Storyboard PDF + SRT Subtitles</a:t>
+            </a:r>
+          </a:p>
+        </p:txBody>
+      </p:sp>
+      <p:sp>
+        <p:nvSpPr>
+          <p:cNvPr id="50" name="Rounded Rectangle 49"/>
+          <p:cNvSpPr/>
+          <p:nvPr/>
+        </p:nvSpPr>
+        <p:spPr>
+          <a:xfrm>
+            <a:off x="8458200" y="4407408"/>
+            <a:ext cx="1444752" cy="2057400"/>
+          </a:xfrm>
+          <a:prstGeom prst="roundRect">
+            <a:avLst/>
+          </a:prstGeom>
+          <a:solidFill>
+            <a:srgbClr val="FDFEFF"/>
+          </a:solidFill>
+          <a:ln w="12700">
+            <a:solidFill>
+              <a:srgbClr val="0284C7"/>
+            </a:solidFill>
+          </a:ln>
+        </p:spPr>
+        <p:style>
+          <a:lnRef idx="1">
+            <a:schemeClr val="accent1"/>
+          </a:lnRef>
+          <a:fillRef idx="3">
+            <a:schemeClr val="accent1"/>
+          </a:fillRef>
+          <a:effectRef idx="2">
+            <a:schemeClr val="accent1"/>
+          </a:effectRef>
+          <a:fontRef idx="minor">
+            <a:schemeClr val="lt1"/>
+          </a:fontRef>
+        </p:style>
+        <p:txBody>
+          <a:bodyPr rtlCol="0" anchor="ctr"/>
+          <a:lstStyle/>
+          <a:p>
+            <a:pPr algn="ctr"/>
+          </a:p>
+        </p:txBody>
+      </p:sp>
+      <p:sp>
+        <p:nvSpPr>
+          <p:cNvPr id="51" name="Rounded Rectangle 50"/>
+          <p:cNvSpPr/>
+          <p:nvPr/>
+        </p:nvSpPr>
+        <p:spPr>
+          <a:xfrm>
+            <a:off x="8458200" y="4407408"/>
+            <a:ext cx="1444752" cy="237744"/>
+          </a:xfrm>
+          <a:prstGeom prst="roundRect">
+            <a:avLst/>
+          </a:prstGeom>
+          <a:solidFill>
+            <a:srgbClr val="0284C7"/>
+          </a:solidFill>
+          <a:ln>
+            <a:noFill/>
+          </a:ln>
+        </p:spPr>
+        <p:style>
+          <a:lnRef idx="1">
+            <a:schemeClr val="accent1"/>
+          </a:lnRef>
+          <a:fillRef idx="3">
+            <a:schemeClr val="accent1"/>
+          </a:fillRef>
+          <a:effectRef idx="2">
+            <a:schemeClr val="accent1"/>
+          </a:effectRef>
+          <a:fontRef idx="minor">
+            <a:schemeClr val="lt1"/>
+          </a:fontRef>
+        </p:style>
+        <p:txBody>
+          <a:bodyPr rtlCol="0" anchor="ctr" wrap="none" lIns="0" tIns="0" rIns="0" bIns="0"/>
+          <a:lstStyle/>
+          <a:p>
+            <a:pPr algn="ctr">
+              <a:defRPr sz="800" b="1">
+                <a:solidFill>
+                  <a:srgbClr val="FFFFFF"/>
+                </a:solidFill>
+              </a:defRPr>
+            </a:pPr>
+            <a:r>
+              <a:t>6. LINKEDIN</a:t>
+            </a:r>
+          </a:p>
+        </p:txBody>
+      </p:sp>
+      <p:sp>
+        <p:nvSpPr>
+          <p:cNvPr id="52" name="TextBox 51"/>
+          <p:cNvSpPr txBox="1"/>
+          <p:nvPr/>
+        </p:nvSpPr>
+        <p:spPr>
+          <a:xfrm>
+            <a:off x="8513064" y="4700016"/>
+            <a:ext cx="1335024" cy="1728216"/>
+          </a:xfrm>
+          <a:prstGeom prst="rect">
+            <a:avLst/>
+          </a:prstGeom>
+          <a:noFill/>
+        </p:spPr>
+        <p:txBody>
+          <a:bodyPr wrap="square" lIns="0" rIns="0" tIns="0" bIns="0">
+            <a:spAutoFit/>
+          </a:bodyPr>
+          <a:lstStyle/>
+          <a:p>
+            <a:pPr>
+              <a:spcAft>
+                <a:spcPts val="200"/>
+              </a:spcAft>
+              <a:defRPr sz="800" b="1">
+                <a:solidFill>
+                  <a:srgbClr val="0284C7"/>
+                </a:solidFill>
+              </a:defRPr>
+            </a:pPr>
+            <a:r>
+              <a:t>Target: Professional Public</a:t>
+            </a:r>
+          </a:p>
+          <a:p>
+            <a:pPr>
+              <a:spcAft>
+                <a:spcPts val="300"/>
+              </a:spcAft>
+              <a:defRPr sz="750">
+                <a:solidFill>
+                  <a:srgbClr val="475569"/>
+                </a:solidFill>
+              </a:defRPr>
+            </a:pPr>
+            <a:r>
+              <a:t>Thought leadership payload, engagement hooks, structured key takeaways.</a:t>
+            </a:r>
+          </a:p>
+          <a:p>
+            <a:pPr>
+              <a:defRPr sz="720" b="1">
+                <a:solidFill>
+                  <a:srgbClr val="0B1220"/>
+                </a:solidFill>
+              </a:defRPr>
+            </a:pPr>
+            <a:r>
+              <a:t>Format:</a:t>
+            </a:r>
+            <a:br/>
+            <a:r>
+              <a:t>Social Markdown + Hashtags</a:t>
+            </a:r>
+          </a:p>
+        </p:txBody>
+      </p:sp>
+      <p:sp>
+        <p:nvSpPr>
+          <p:cNvPr id="53" name="Rounded Rectangle 52"/>
+          <p:cNvSpPr/>
+          <p:nvPr/>
+        </p:nvSpPr>
+        <p:spPr>
+          <a:xfrm>
+            <a:off x="9976104" y="4407408"/>
+            <a:ext cx="1444752" cy="2057400"/>
+          </a:xfrm>
+          <a:prstGeom prst="roundRect">
+            <a:avLst/>
+          </a:prstGeom>
+          <a:solidFill>
+            <a:srgbClr val="FDFEFF"/>
+          </a:solidFill>
+          <a:ln w="12700">
+            <a:solidFill>
+              <a:srgbClr val="10B981"/>
+            </a:solidFill>
+          </a:ln>
+        </p:spPr>
+        <p:style>
+          <a:lnRef idx="1">
+            <a:schemeClr val="accent1"/>
+          </a:lnRef>
+          <a:fillRef idx="3">
+            <a:schemeClr val="accent1"/>
+          </a:fillRef>
+          <a:effectRef idx="2">
+            <a:schemeClr val="accent1"/>
+          </a:effectRef>
+          <a:fontRef idx="minor">
+            <a:schemeClr val="lt1"/>
+          </a:fontRef>
+        </p:style>
+        <p:txBody>
+          <a:bodyPr rtlCol="0" anchor="ctr"/>
+          <a:lstStyle/>
+          <a:p>
+            <a:pPr algn="ctr"/>
+          </a:p>
+        </p:txBody>
+      </p:sp>
+      <p:sp>
+        <p:nvSpPr>
+          <p:cNvPr id="54" name="Rounded Rectangle 53"/>
+          <p:cNvSpPr/>
+          <p:nvPr/>
+        </p:nvSpPr>
+        <p:spPr>
+          <a:xfrm>
+            <a:off x="9976104" y="4407408"/>
+            <a:ext cx="1444752" cy="237744"/>
+          </a:xfrm>
+          <a:prstGeom prst="roundRect">
+            <a:avLst/>
+          </a:prstGeom>
+          <a:solidFill>
+            <a:srgbClr val="10B981"/>
+          </a:solidFill>
+          <a:ln>
+            <a:noFill/>
+          </a:ln>
+        </p:spPr>
+        <p:style>
+          <a:lnRef idx="1">
+            <a:schemeClr val="accent1"/>
+          </a:lnRef>
+          <a:fillRef idx="3">
+            <a:schemeClr val="accent1"/>
+          </a:fillRef>
+          <a:effectRef idx="2">
+            <a:schemeClr val="accent1"/>
+          </a:effectRef>
+          <a:fontRef idx="minor">
+            <a:schemeClr val="lt1"/>
+          </a:fontRef>
+        </p:style>
+        <p:txBody>
+          <a:bodyPr rtlCol="0" anchor="ctr" wrap="none" lIns="0" tIns="0" rIns="0" bIns="0"/>
+          <a:lstStyle/>
+          <a:p>
+            <a:pPr algn="ctr">
+              <a:defRPr sz="800" b="1">
+                <a:solidFill>
+                  <a:srgbClr val="FFFFFF"/>
+                </a:solidFill>
+              </a:defRPr>
+            </a:pPr>
+            <a:r>
+              <a:t>7. X THREAD</a:t>
+            </a:r>
+          </a:p>
+        </p:txBody>
+      </p:sp>
+      <p:sp>
+        <p:nvSpPr>
+          <p:cNvPr id="55" name="TextBox 54"/>
+          <p:cNvSpPr txBox="1"/>
+          <p:nvPr/>
+        </p:nvSpPr>
+        <p:spPr>
+          <a:xfrm>
+            <a:off x="10030968" y="4700016"/>
+            <a:ext cx="1335024" cy="1728216"/>
+          </a:xfrm>
+          <a:prstGeom prst="rect">
+            <a:avLst/>
+          </a:prstGeom>
+          <a:noFill/>
+        </p:spPr>
+        <p:txBody>
+          <a:bodyPr wrap="square" lIns="0" rIns="0" tIns="0" bIns="0">
+            <a:spAutoFit/>
+          </a:bodyPr>
+          <a:lstStyle/>
+          <a:p>
+            <a:pPr>
+              <a:spcAft>
+                <a:spcPts val="200"/>
+              </a:spcAft>
+              <a:defRPr sz="800" b="1">
+                <a:solidFill>
+                  <a:srgbClr val="10B981"/>
+                </a:solidFill>
+              </a:defRPr>
+            </a:pPr>
+            <a:r>
+              <a:t>Target: Public / Press</a:t>
+            </a:r>
+          </a:p>
+          <a:p>
+            <a:pPr>
+              <a:spcAft>
+                <a:spcPts val="300"/>
+              </a:spcAft>
+              <a:defRPr sz="750">
+                <a:solidFill>
+                  <a:srgbClr val="475569"/>
+                </a:solidFill>
+              </a:defRPr>
+            </a:pPr>
+            <a:r>
+              <a:t>Sequential 280-char numbered announcement thread for rapid public alerts.</a:t>
+            </a:r>
+          </a:p>
+          <a:p>
+            <a:pPr>
+              <a:defRPr sz="720" b="1">
+                <a:solidFill>
+                  <a:srgbClr val="0B1220"/>
+                </a:solidFill>
+              </a:defRPr>
+            </a:pPr>
+            <a:r>
+              <a:t>Format:</a:t>
+            </a:r>
+            <a:br/>
+            <a:r>
+              <a:t>Numbered Multi-Post Thread</a:t>
             </a:r>
           </a:p>
         </p:txBody>
@@ -4318,75 +6795,23 @@
       <p:grpSpPr/>
       <p:sp>
         <p:nvSpPr>
-          <p:cNvPr id="2" name="TextBox 1"/>
-          <p:cNvSpPr txBox="1"/>
-          <p:nvPr/>
-        </p:nvSpPr>
-        <p:spPr>
-          <a:xfrm>
-            <a:off x="731520" y="365760"/>
-            <a:ext cx="10728655" cy="1005840"/>
+          <p:cNvPr id="2" name="Rectangle 1"/>
+          <p:cNvSpPr/>
+          <p:nvPr/>
+        </p:nvSpPr>
+        <p:spPr>
+          <a:xfrm>
+            <a:off x="0" y="0"/>
+            <a:ext cx="12191695" cy="6858000"/>
           </a:xfrm>
           <a:prstGeom prst="rect">
-            <a:avLst/>
-          </a:prstGeom>
-          <a:noFill/>
-        </p:spPr>
-        <p:txBody>
-          <a:bodyPr wrap="square" lIns="0" tIns="0" rIns="0" bIns="0">
-            <a:spAutoFit/>
-          </a:bodyPr>
-          <a:lstStyle/>
-          <a:p>
-            <a:pPr>
-              <a:spcAft>
-                <a:spcPts val="200"/>
-              </a:spcAft>
-              <a:defRPr sz="1000" b="1">
-                <a:solidFill>
-                  <a:srgbClr val="0284C7"/>
-                </a:solidFill>
-              </a:defRPr>
-            </a:pPr>
-            <a:r>
-              <a:t>SIH 26154 • BLOCKCHAIN &amp; CYBERSECURITY</a:t>
-            </a:r>
-          </a:p>
-          <a:p>
-            <a:pPr>
-              <a:defRPr sz="2600" b="1">
-                <a:solidFill>
-                  <a:srgbClr val="0F172A"/>
-                </a:solidFill>
-              </a:defRPr>
-            </a:pPr>
-            <a:r>
-              <a:t>END-TO-END PROCESS WORKFLOW: FROM SOURCE TO SEVEN OUTPUTS</a:t>
-            </a:r>
-          </a:p>
-        </p:txBody>
-      </p:sp>
-      <p:sp>
-        <p:nvSpPr>
-          <p:cNvPr id="3" name="Rounded Rectangle 2"/>
-          <p:cNvSpPr/>
-          <p:nvPr/>
-        </p:nvSpPr>
-        <p:spPr>
-          <a:xfrm>
-            <a:off x="731520" y="1463040"/>
-            <a:ext cx="5120640" cy="749808"/>
-          </a:xfrm>
-          <a:prstGeom prst="roundRect">
             <a:avLst/>
           </a:prstGeom>
           <a:solidFill>
             <a:srgbClr val="F8FAFC"/>
           </a:solidFill>
-          <a:ln w="19050">
-            <a:solidFill>
-              <a:srgbClr val="CBD5E1"/>
-            </a:solidFill>
+          <a:ln>
+            <a:noFill/>
           </a:ln>
         </p:spPr>
         <p:style>
@@ -4413,14 +6838,14 @@
       </p:sp>
       <p:sp>
         <p:nvSpPr>
-          <p:cNvPr id="4" name="TextBox 3"/>
+          <p:cNvPr id="3" name="TextBox 2"/>
           <p:cNvSpPr txBox="1"/>
           <p:nvPr/>
         </p:nvSpPr>
         <p:spPr>
           <a:xfrm>
-            <a:off x="868680" y="1499616"/>
-            <a:ext cx="4846320" cy="658368"/>
+            <a:off x="731520" y="320040"/>
+            <a:ext cx="10728655" cy="960120"/>
           </a:xfrm>
           <a:prstGeom prst="rect">
             <a:avLst/>
@@ -4428,54 +6853,59 @@
           <a:noFill/>
         </p:spPr>
         <p:txBody>
-          <a:bodyPr wrap="square">
+          <a:bodyPr wrap="square" lIns="0" tIns="0" rIns="0" bIns="0">
             <a:spAutoFit/>
           </a:bodyPr>
           <a:lstStyle/>
           <a:p>
-            <a:r>
-              <a:rPr b="1" sz="1050">
+            <a:pPr>
+              <a:spcAft>
+                <a:spcPts val="200"/>
+              </a:spcAft>
+              <a:defRPr sz="950" b="1">
                 <a:solidFill>
                   <a:srgbClr val="0284C7"/>
                 </a:solidFill>
-              </a:rPr>
-              <a:t>1. SOURCE INPUT  </a:t>
+              </a:defRPr>
+            </a:pPr>
+            <a:r>
+              <a:t>SMART INDIA HACKATHON 2026 • PS ID: SIH 26154 • THEME: BLOCKCHAIN &amp; CYBERSECURITY</a:t>
             </a:r>
           </a:p>
           <a:p>
             <a:pPr>
-              <a:defRPr sz="900">
-                <a:solidFill>
-                  <a:srgbClr val="475569"/>
-                </a:solidFill>
-              </a:defRPr>
-            </a:pPr>
-            <a:r>
-              <a:t>User uploads PDF, DOCX, TXT or raw prompt with target audience, tone, and language directives.</a:t>
-            </a:r>
-          </a:p>
-        </p:txBody>
-      </p:sp>
-      <p:sp>
-        <p:nvSpPr>
-          <p:cNvPr id="5" name="Rounded Rectangle 4"/>
+              <a:defRPr sz="2200" b="1">
+                <a:solidFill>
+                  <a:srgbClr val="0B1220"/>
+                </a:solidFill>
+              </a:defRPr>
+            </a:pPr>
+            <a:r>
+              <a:t>TECHNICAL APPROACH: 4-TIER ARCHITECTURE &amp; CONCRETE STACK</a:t>
+            </a:r>
+          </a:p>
+        </p:txBody>
+      </p:sp>
+      <p:sp>
+        <p:nvSpPr>
+          <p:cNvPr id="4" name="Rounded Rectangle 3"/>
           <p:cNvSpPr/>
           <p:nvPr/>
         </p:nvSpPr>
         <p:spPr>
           <a:xfrm>
-            <a:off x="731520" y="2331720"/>
-            <a:ext cx="5120640" cy="749808"/>
+            <a:off x="731520" y="1325880"/>
+            <a:ext cx="6949440" cy="1188720"/>
           </a:xfrm>
           <a:prstGeom prst="roundRect">
             <a:avLst/>
           </a:prstGeom>
           <a:solidFill>
-            <a:srgbClr val="F8FAFC"/>
+            <a:srgbClr val="FFFFFF"/>
           </a:solidFill>
-          <a:ln w="19050">
+          <a:ln w="15240">
             <a:solidFill>
-              <a:srgbClr val="CBD5E1"/>
+              <a:srgbClr val="E2E8F0"/>
             </a:solidFill>
           </a:ln>
         </p:spPr>
@@ -4503,70 +6933,23 @@
       </p:sp>
       <p:sp>
         <p:nvSpPr>
-          <p:cNvPr id="6" name="TextBox 5"/>
-          <p:cNvSpPr txBox="1"/>
-          <p:nvPr/>
-        </p:nvSpPr>
-        <p:spPr>
-          <a:xfrm>
-            <a:off x="868680" y="2368296"/>
-            <a:ext cx="4846320" cy="658368"/>
+          <p:cNvPr id="5" name="Rectangle 4"/>
+          <p:cNvSpPr/>
+          <p:nvPr/>
+        </p:nvSpPr>
+        <p:spPr>
+          <a:xfrm>
+            <a:off x="731520" y="1325880"/>
+            <a:ext cx="109728" cy="1188720"/>
           </a:xfrm>
           <a:prstGeom prst="rect">
             <a:avLst/>
           </a:prstGeom>
-          <a:noFill/>
-        </p:spPr>
-        <p:txBody>
-          <a:bodyPr wrap="square">
-            <a:spAutoFit/>
-          </a:bodyPr>
-          <a:lstStyle/>
-          <a:p>
-            <a:r>
-              <a:rPr b="1" sz="1050">
-                <a:solidFill>
-                  <a:srgbClr val="0D9488"/>
-                </a:solidFill>
-              </a:rPr>
-              <a:t>2. INGESTION &amp; SCAN  </a:t>
-            </a:r>
-          </a:p>
-          <a:p>
-            <a:pPr>
-              <a:defRPr sz="900">
-                <a:solidFill>
-                  <a:srgbClr val="475569"/>
-                </a:solidFill>
-              </a:defRPr>
-            </a:pPr>
-            <a:r>
-              <a:t>Magic byte verification, ClamAV anti-malware scan, PII detection, text extraction &amp; chunking.</a:t>
-            </a:r>
-          </a:p>
-        </p:txBody>
-      </p:sp>
-      <p:sp>
-        <p:nvSpPr>
-          <p:cNvPr id="7" name="Rounded Rectangle 6"/>
-          <p:cNvSpPr/>
-          <p:nvPr/>
-        </p:nvSpPr>
-        <p:spPr>
-          <a:xfrm>
-            <a:off x="731520" y="3200400"/>
-            <a:ext cx="5120640" cy="749808"/>
-          </a:xfrm>
-          <a:prstGeom prst="roundRect">
-            <a:avLst/>
-          </a:prstGeom>
           <a:solidFill>
-            <a:srgbClr val="F8FAFC"/>
+            <a:srgbClr val="0284C7"/>
           </a:solidFill>
-          <a:ln w="19050">
-            <a:solidFill>
-              <a:srgbClr val="CBD5E1"/>
-            </a:solidFill>
+          <a:ln>
+            <a:noFill/>
           </a:ln>
         </p:spPr>
         <p:style>
@@ -4593,14 +6976,14 @@
       </p:sp>
       <p:sp>
         <p:nvSpPr>
-          <p:cNvPr id="8" name="TextBox 7"/>
+          <p:cNvPr id="6" name="TextBox 5"/>
           <p:cNvSpPr txBox="1"/>
           <p:nvPr/>
         </p:nvSpPr>
         <p:spPr>
           <a:xfrm>
-            <a:off x="868680" y="3236976"/>
-            <a:ext cx="4846320" cy="658368"/>
+            <a:off x="960120" y="1399032"/>
+            <a:ext cx="6583680" cy="1042416"/>
           </a:xfrm>
           <a:prstGeom prst="rect">
             <a:avLst/>
@@ -4608,54 +6991,74 @@
           <a:noFill/>
         </p:spPr>
         <p:txBody>
-          <a:bodyPr wrap="square">
+          <a:bodyPr wrap="square" lIns="0" rIns="0" tIns="0" bIns="0">
             <a:spAutoFit/>
           </a:bodyPr>
           <a:lstStyle/>
           <a:p>
-            <a:r>
-              <a:rPr b="1" sz="1050">
-                <a:solidFill>
-                  <a:srgbClr val="EA580C"/>
-                </a:solidFill>
-              </a:rPr>
-              <a:t>3. CLASSIFICATION &amp; POLICY  </a:t>
-            </a:r>
-          </a:p>
-          <a:p>
             <a:pPr>
-              <a:defRPr sz="900">
+              <a:spcAft>
+                <a:spcPts val="100"/>
+              </a:spcAft>
+              <a:defRPr sz="1000" b="1">
+                <a:solidFill>
+                  <a:srgbClr val="0284C7"/>
+                </a:solidFill>
+              </a:defRPr>
+            </a:pPr>
+            <a:r>
+              <a:t>TIER 1: USER EXPERIENCE &amp; ENTERPRISE CONSOLE</a:t>
+            </a:r>
+          </a:p>
+          <a:p>
+            <a:pPr>
+              <a:spcAft>
+                <a:spcPts val="200"/>
+              </a:spcAft>
+              <a:defRPr sz="850" b="1">
+                <a:solidFill>
+                  <a:srgbClr val="0B1220"/>
+                </a:solidFill>
+              </a:defRPr>
+            </a:pPr>
+            <a:r>
+              <a:t>Stack: Next.js 14 (App Router) • React 18 • TypeScript 5.7 • Tailwind CSS 3.4</a:t>
+            </a:r>
+          </a:p>
+          <a:p>
+            <a:pPr>
+              <a:defRPr sz="819">
                 <a:solidFill>
                   <a:srgbClr val="475569"/>
                 </a:solidFill>
               </a:defRPr>
             </a:pPr>
             <a:r>
-              <a:t>Evaluates PUBLIC, INTERNAL, CONFIDENTIAL, RESTRICTED. Denies cloud processing for sensitive data.</a:t>
-            </a:r>
-          </a:p>
-        </p:txBody>
-      </p:sp>
-      <p:sp>
-        <p:nvSpPr>
-          <p:cNvPr id="9" name="Rounded Rectangle 8"/>
+              <a:t>Enterprise Trust Cockpit, Live Artifact Inspector, On-Demand Verification Tool, Real-time SSE streaming, and 38s Interactive Architecture Visualizer.</a:t>
+            </a:r>
+          </a:p>
+        </p:txBody>
+      </p:sp>
+      <p:sp>
+        <p:nvSpPr>
+          <p:cNvPr id="7" name="Rounded Rectangle 6"/>
           <p:cNvSpPr/>
           <p:nvPr/>
         </p:nvSpPr>
         <p:spPr>
           <a:xfrm>
-            <a:off x="731520" y="4069079"/>
-            <a:ext cx="5120640" cy="749808"/>
+            <a:off x="731520" y="2624328"/>
+            <a:ext cx="6949440" cy="1188720"/>
           </a:xfrm>
           <a:prstGeom prst="roundRect">
             <a:avLst/>
           </a:prstGeom>
           <a:solidFill>
-            <a:srgbClr val="F8FAFC"/>
+            <a:srgbClr val="FFFFFF"/>
           </a:solidFill>
-          <a:ln w="19050">
+          <a:ln w="15240">
             <a:solidFill>
-              <a:srgbClr val="CBD5E1"/>
+              <a:srgbClr val="E2E8F0"/>
             </a:solidFill>
           </a:ln>
         </p:spPr>
@@ -4683,70 +7086,23 @@
       </p:sp>
       <p:sp>
         <p:nvSpPr>
-          <p:cNvPr id="10" name="TextBox 9"/>
-          <p:cNvSpPr txBox="1"/>
-          <p:nvPr/>
-        </p:nvSpPr>
-        <p:spPr>
-          <a:xfrm>
-            <a:off x="868680" y="4105655"/>
-            <a:ext cx="4846320" cy="658368"/>
+          <p:cNvPr id="8" name="Rectangle 7"/>
+          <p:cNvSpPr/>
+          <p:nvPr/>
+        </p:nvSpPr>
+        <p:spPr>
+          <a:xfrm>
+            <a:off x="731520" y="2624328"/>
+            <a:ext cx="109728" cy="1188720"/>
           </a:xfrm>
           <a:prstGeom prst="rect">
             <a:avLst/>
           </a:prstGeom>
-          <a:noFill/>
-        </p:spPr>
-        <p:txBody>
-          <a:bodyPr wrap="square">
-            <a:spAutoFit/>
-          </a:bodyPr>
-          <a:lstStyle/>
-          <a:p>
-            <a:r>
-              <a:rPr b="1" sz="1050">
-                <a:solidFill>
-                  <a:srgbClr val="7C3AED"/>
-                </a:solidFill>
-              </a:rPr>
-              <a:t>4. COMPLIANT AI ROUTING  </a:t>
-            </a:r>
-          </a:p>
-          <a:p>
-            <a:pPr>
-              <a:defRPr sz="900">
-                <a:solidFill>
-                  <a:srgbClr val="475569"/>
-                </a:solidFill>
-              </a:defRPr>
-            </a:pPr>
-            <a:r>
-              <a:t>Routes unclassified data to Cloud AI (Gemini) or air-gapped sensitive data to Private AI (Gemma 3 12B).</a:t>
-            </a:r>
-          </a:p>
-        </p:txBody>
-      </p:sp>
-      <p:sp>
-        <p:nvSpPr>
-          <p:cNvPr id="11" name="Rounded Rectangle 10"/>
-          <p:cNvSpPr/>
-          <p:nvPr/>
-        </p:nvSpPr>
-        <p:spPr>
-          <a:xfrm>
-            <a:off x="731520" y="4937760"/>
-            <a:ext cx="5120640" cy="749808"/>
-          </a:xfrm>
-          <a:prstGeom prst="roundRect">
-            <a:avLst/>
-          </a:prstGeom>
           <a:solidFill>
-            <a:srgbClr val="F8FAFC"/>
+            <a:srgbClr val="E11D48"/>
           </a:solidFill>
-          <a:ln w="19050">
-            <a:solidFill>
-              <a:srgbClr val="CBD5E1"/>
-            </a:solidFill>
+          <a:ln>
+            <a:noFill/>
           </a:ln>
         </p:spPr>
         <p:style>
@@ -4773,14 +7129,14 @@
       </p:sp>
       <p:sp>
         <p:nvSpPr>
-          <p:cNvPr id="12" name="TextBox 11"/>
+          <p:cNvPr id="9" name="TextBox 8"/>
           <p:cNvSpPr txBox="1"/>
           <p:nvPr/>
         </p:nvSpPr>
         <p:spPr>
           <a:xfrm>
-            <a:off x="868680" y="4974336"/>
-            <a:ext cx="4846320" cy="658368"/>
+            <a:off x="960120" y="2697480"/>
+            <a:ext cx="6583680" cy="1042416"/>
           </a:xfrm>
           <a:prstGeom prst="rect">
             <a:avLst/>
@@ -4788,54 +7144,74 @@
           <a:noFill/>
         </p:spPr>
         <p:txBody>
-          <a:bodyPr wrap="square">
+          <a:bodyPr wrap="square" lIns="0" rIns="0" tIns="0" bIns="0">
             <a:spAutoFit/>
           </a:bodyPr>
           <a:lstStyle/>
           <a:p>
-            <a:r>
-              <a:rPr b="1" sz="1050">
-                <a:solidFill>
-                  <a:srgbClr val="0284C7"/>
-                </a:solidFill>
-              </a:rPr>
-              <a:t>5. EVIDENCE-GROUNDED RAG  </a:t>
-            </a:r>
-          </a:p>
-          <a:p>
             <a:pPr>
-              <a:defRPr sz="900">
+              <a:spcAft>
+                <a:spcPts val="100"/>
+              </a:spcAft>
+              <a:defRPr sz="1000" b="1">
+                <a:solidFill>
+                  <a:srgbClr val="E11D48"/>
+                </a:solidFill>
+              </a:defRPr>
+            </a:pPr>
+            <a:r>
+              <a:t>TIER 2: INGRESS DEFENSE, POLICY &amp; ORCHESTRATION GATEWAY</a:t>
+            </a:r>
+          </a:p>
+          <a:p>
+            <a:pPr>
+              <a:spcAft>
+                <a:spcPts val="200"/>
+              </a:spcAft>
+              <a:defRPr sz="850" b="1">
+                <a:solidFill>
+                  <a:srgbClr val="0B1220"/>
+                </a:solidFill>
+              </a:defRPr>
+            </a:pPr>
+            <a:r>
+              <a:t>Stack: FastAPI 0.115 Async • Python 3.12 • Pydantic 2.10 • LangGraph 0.2 • Redis 7 + Python-RQ</a:t>
+            </a:r>
+          </a:p>
+          <a:p>
+            <a:pPr>
+              <a:defRPr sz="819">
                 <a:solidFill>
                   <a:srgbClr val="475569"/>
                 </a:solidFill>
               </a:defRPr>
             </a:pPr>
             <a:r>
-              <a:t>Task-aware vector retrieval formulates top-k citations into an immutable canonical semantic brief.</a:t>
-            </a:r>
-          </a:p>
-        </p:txBody>
-      </p:sp>
-      <p:sp>
-        <p:nvSpPr>
-          <p:cNvPr id="13" name="Rounded Rectangle 12"/>
+              <a:t>MIME magic-byte verification (%PDF-, PK), ClamAV daemon antivirus hooks, regex PII scrubbing (Aadhaar/PAN/Tokens), and deterministic 4-tier policy routing.</a:t>
+            </a:r>
+          </a:p>
+        </p:txBody>
+      </p:sp>
+      <p:sp>
+        <p:nvSpPr>
+          <p:cNvPr id="10" name="Rounded Rectangle 9"/>
           <p:cNvSpPr/>
           <p:nvPr/>
         </p:nvSpPr>
         <p:spPr>
           <a:xfrm>
-            <a:off x="6217920" y="1463040"/>
-            <a:ext cx="5212080" cy="932688"/>
+            <a:off x="731520" y="3922776"/>
+            <a:ext cx="6949440" cy="1188720"/>
           </a:xfrm>
           <a:prstGeom prst="roundRect">
             <a:avLst/>
           </a:prstGeom>
           <a:solidFill>
-            <a:srgbClr val="F8FAFC"/>
+            <a:srgbClr val="FFFFFF"/>
           </a:solidFill>
-          <a:ln w="19050">
+          <a:ln w="15240">
             <a:solidFill>
-              <a:srgbClr val="CBD5E1"/>
+              <a:srgbClr val="E2E8F0"/>
             </a:solidFill>
           </a:ln>
         </p:spPr>
@@ -4863,70 +7239,23 @@
       </p:sp>
       <p:sp>
         <p:nvSpPr>
-          <p:cNvPr id="14" name="TextBox 13"/>
-          <p:cNvSpPr txBox="1"/>
-          <p:nvPr/>
-        </p:nvSpPr>
-        <p:spPr>
-          <a:xfrm>
-            <a:off x="6355080" y="1517904"/>
-            <a:ext cx="4937760" cy="822960"/>
+          <p:cNvPr id="11" name="Rectangle 10"/>
+          <p:cNvSpPr/>
+          <p:nvPr/>
+        </p:nvSpPr>
+        <p:spPr>
+          <a:xfrm>
+            <a:off x="731520" y="3922776"/>
+            <a:ext cx="109728" cy="1188720"/>
           </a:xfrm>
           <a:prstGeom prst="rect">
             <a:avLst/>
           </a:prstGeom>
-          <a:noFill/>
-        </p:spPr>
-        <p:txBody>
-          <a:bodyPr wrap="square">
-            <a:spAutoFit/>
-          </a:bodyPr>
-          <a:lstStyle/>
-          <a:p>
-            <a:r>
-              <a:rPr b="1" sz="1050">
-                <a:solidFill>
-                  <a:srgbClr val="7C3AED"/>
-                </a:solidFill>
-              </a:rPr>
-              <a:t>6. TRANSFORMATION &amp; GENERATION  </a:t>
-            </a:r>
-          </a:p>
-          <a:p>
-            <a:pPr>
-              <a:defRPr sz="900">
-                <a:solidFill>
-                  <a:srgbClr val="475569"/>
-                </a:solidFill>
-              </a:defRPr>
-            </a:pPr>
-            <a:r>
-              <a:t>7 isolated output generators execute in parallel with nested savepoints and bounded regeneration.</a:t>
-            </a:r>
-          </a:p>
-        </p:txBody>
-      </p:sp>
-      <p:sp>
-        <p:nvSpPr>
-          <p:cNvPr id="15" name="Rounded Rectangle 14"/>
-          <p:cNvSpPr/>
-          <p:nvPr/>
-        </p:nvSpPr>
-        <p:spPr>
-          <a:xfrm>
-            <a:off x="6217920" y="2542032"/>
-            <a:ext cx="5212080" cy="932688"/>
-          </a:xfrm>
-          <a:prstGeom prst="roundRect">
-            <a:avLst/>
-          </a:prstGeom>
           <a:solidFill>
-            <a:srgbClr val="F8FAFC"/>
+            <a:srgbClr val="7C3AED"/>
           </a:solidFill>
-          <a:ln w="19050">
-            <a:solidFill>
-              <a:srgbClr val="CBD5E1"/>
-            </a:solidFill>
+          <a:ln>
+            <a:noFill/>
           </a:ln>
         </p:spPr>
         <p:style>
@@ -4953,14 +7282,14 @@
       </p:sp>
       <p:sp>
         <p:nvSpPr>
-          <p:cNvPr id="16" name="TextBox 15"/>
+          <p:cNvPr id="12" name="TextBox 11"/>
           <p:cNvSpPr txBox="1"/>
           <p:nvPr/>
         </p:nvSpPr>
         <p:spPr>
           <a:xfrm>
-            <a:off x="6355080" y="2596896"/>
-            <a:ext cx="4937760" cy="822960"/>
+            <a:off x="960120" y="3995928"/>
+            <a:ext cx="6583680" cy="1042416"/>
           </a:xfrm>
           <a:prstGeom prst="rect">
             <a:avLst/>
@@ -4968,54 +7297,74 @@
           <a:noFill/>
         </p:spPr>
         <p:txBody>
-          <a:bodyPr wrap="square">
+          <a:bodyPr wrap="square" lIns="0" rIns="0" tIns="0" bIns="0">
             <a:spAutoFit/>
           </a:bodyPr>
           <a:lstStyle/>
           <a:p>
-            <a:r>
-              <a:rPr b="1" sz="1050">
-                <a:solidFill>
-                  <a:srgbClr val="0D9488"/>
-                </a:solidFill>
-              </a:rPr>
-              <a:t>7. FACT &amp; SCHEMA VERIFICATION  </a:t>
-            </a:r>
-          </a:p>
-          <a:p>
             <a:pPr>
-              <a:defRPr sz="900">
+              <a:spcAft>
+                <a:spcPts val="100"/>
+              </a:spcAft>
+              <a:defRPr sz="1000" b="1">
+                <a:solidFill>
+                  <a:srgbClr val="7C3AED"/>
+                </a:solidFill>
+              </a:defRPr>
+            </a:pPr>
+            <a:r>
+              <a:t>TIER 3: AI INFERENCE, RAG GROUNDING &amp; NLI FACT VERIFICATION</a:t>
+            </a:r>
+          </a:p>
+          <a:p>
+            <a:pPr>
+              <a:spcAft>
+                <a:spcPts val="200"/>
+              </a:spcAft>
+              <a:defRPr sz="850" b="1">
+                <a:solidFill>
+                  <a:srgbClr val="0B1220"/>
+                </a:solidFill>
+              </a:defRPr>
+            </a:pPr>
+            <a:r>
+              <a:t>Stack: Groq (openai/gpt-oss-120b) • Google Gemini API • Local Ollama/vLLM (Gemma 3 12B) • pgvector</a:t>
+            </a:r>
+          </a:p>
+          <a:p>
+            <a:pPr>
+              <a:defRPr sz="819">
                 <a:solidFill>
                   <a:srgbClr val="475569"/>
                 </a:solidFill>
               </a:defRPr>
             </a:pPr>
             <a:r>
-              <a:t>Automated fact-checking: claim extraction, numeric consistency, date conflict detection, grounding scores.</a:t>
-            </a:r>
-          </a:p>
-        </p:txBody>
-      </p:sp>
-      <p:sp>
-        <p:nvSpPr>
-          <p:cNvPr id="17" name="Rounded Rectangle 16"/>
+              <a:t>Dense semantic retrieval over HNSW index, chunk citation anchors, prompt delimiter fencing, and NLI entailment scoring (SUPPORTED/CONTRADICTED/UNVERIFIED).</a:t>
+            </a:r>
+          </a:p>
+        </p:txBody>
+      </p:sp>
+      <p:sp>
+        <p:nvSpPr>
+          <p:cNvPr id="13" name="Rounded Rectangle 12"/>
           <p:cNvSpPr/>
           <p:nvPr/>
         </p:nvSpPr>
         <p:spPr>
           <a:xfrm>
-            <a:off x="6217920" y="3621024"/>
-            <a:ext cx="5212080" cy="932688"/>
+            <a:off x="731520" y="5221224"/>
+            <a:ext cx="6949440" cy="1188720"/>
           </a:xfrm>
           <a:prstGeom prst="roundRect">
             <a:avLst/>
           </a:prstGeom>
           <a:solidFill>
-            <a:srgbClr val="F8FAFC"/>
+            <a:srgbClr val="FFFFFF"/>
           </a:solidFill>
-          <a:ln w="19050">
+          <a:ln w="15240">
             <a:solidFill>
-              <a:srgbClr val="CBD5E1"/>
+              <a:srgbClr val="E2E8F0"/>
             </a:solidFill>
           </a:ln>
         </p:spPr>
@@ -5043,70 +7392,23 @@
       </p:sp>
       <p:sp>
         <p:nvSpPr>
-          <p:cNvPr id="18" name="TextBox 17"/>
-          <p:cNvSpPr txBox="1"/>
-          <p:nvPr/>
-        </p:nvSpPr>
-        <p:spPr>
-          <a:xfrm>
-            <a:off x="6355080" y="3675888"/>
-            <a:ext cx="4937760" cy="822960"/>
+          <p:cNvPr id="14" name="Rectangle 13"/>
+          <p:cNvSpPr/>
+          <p:nvPr/>
+        </p:nvSpPr>
+        <p:spPr>
+          <a:xfrm>
+            <a:off x="731520" y="5221224"/>
+            <a:ext cx="109728" cy="1188720"/>
           </a:xfrm>
           <a:prstGeom prst="rect">
             <a:avLst/>
           </a:prstGeom>
-          <a:noFill/>
-        </p:spPr>
-        <p:txBody>
-          <a:bodyPr wrap="square">
-            <a:spAutoFit/>
-          </a:bodyPr>
-          <a:lstStyle/>
-          <a:p>
-            <a:r>
-              <a:rPr b="1" sz="1050">
-                <a:solidFill>
-                  <a:srgbClr val="EA580C"/>
-                </a:solidFill>
-              </a:rPr>
-              <a:t>8. HUMAN APPROVAL GATE  </a:t>
-            </a:r>
-          </a:p>
-          <a:p>
-            <a:pPr>
-              <a:defRPr sz="900">
-                <a:solidFill>
-                  <a:srgbClr val="475569"/>
-                </a:solidFill>
-              </a:defRPr>
-            </a:pPr>
-            <a:r>
-              <a:t>Governance review: policy overrides approval. Operators review and approve or reject before release.</a:t>
-            </a:r>
-          </a:p>
-        </p:txBody>
-      </p:sp>
-      <p:sp>
-        <p:nvSpPr>
-          <p:cNvPr id="19" name="Rounded Rectangle 18"/>
-          <p:cNvSpPr/>
-          <p:nvPr/>
-        </p:nvSpPr>
-        <p:spPr>
-          <a:xfrm>
-            <a:off x="6217920" y="4700016"/>
-            <a:ext cx="5212080" cy="932688"/>
-          </a:xfrm>
-          <a:prstGeom prst="roundRect">
-            <a:avLst/>
-          </a:prstGeom>
           <a:solidFill>
-            <a:srgbClr val="F8FAFC"/>
+            <a:srgbClr val="10B981"/>
           </a:solidFill>
-          <a:ln w="19050">
-            <a:solidFill>
-              <a:srgbClr val="CBD5E1"/>
-            </a:solidFill>
+          <a:ln>
+            <a:noFill/>
           </a:ln>
         </p:spPr>
         <p:style>
@@ -5133,14 +7435,14 @@
       </p:sp>
       <p:sp>
         <p:nvSpPr>
-          <p:cNvPr id="20" name="TextBox 19"/>
+          <p:cNvPr id="15" name="TextBox 14"/>
           <p:cNvSpPr txBox="1"/>
           <p:nvPr/>
         </p:nvSpPr>
         <p:spPr>
           <a:xfrm>
-            <a:off x="6355080" y="4754880"/>
-            <a:ext cx="4937760" cy="822960"/>
+            <a:off x="960120" y="5294376"/>
+            <a:ext cx="6583680" cy="1042416"/>
           </a:xfrm>
           <a:prstGeom prst="rect">
             <a:avLst/>
@@ -5148,54 +7450,74 @@
           <a:noFill/>
         </p:spPr>
         <p:txBody>
-          <a:bodyPr wrap="square">
+          <a:bodyPr wrap="square" lIns="0" rIns="0" tIns="0" bIns="0">
             <a:spAutoFit/>
           </a:bodyPr>
           <a:lstStyle/>
           <a:p>
-            <a:r>
-              <a:rPr b="1" sz="1050">
-                <a:solidFill>
-                  <a:srgbClr val="0F172A"/>
-                </a:solidFill>
-              </a:rPr>
-              <a:t>9. DISSEMINATION &amp; SIGNING  </a:t>
-            </a:r>
-          </a:p>
-          <a:p>
             <a:pPr>
-              <a:defRPr sz="900">
+              <a:spcAft>
+                <a:spcPts val="100"/>
+              </a:spcAft>
+              <a:defRPr sz="1000" b="1">
+                <a:solidFill>
+                  <a:srgbClr val="10B981"/>
+                </a:solidFill>
+              </a:defRPr>
+            </a:pPr>
+            <a:r>
+              <a:t>TIER 4: STORAGE, DECENTRALIZED PROVENANCE &amp; LEDGER PLANE</a:t>
+            </a:r>
+          </a:p>
+          <a:p>
+            <a:pPr>
+              <a:spcAft>
+                <a:spcPts val="200"/>
+              </a:spcAft>
+              <a:defRPr sz="850" b="1">
+                <a:solidFill>
+                  <a:srgbClr val="0B1220"/>
+                </a:solidFill>
+              </a:defRPr>
+            </a:pPr>
+            <a:r>
+              <a:t>Stack: PostgreSQL 16 + pgvector • MinIO / AWS S3 • Ethereum Sepolia Smart Contract • Ed25519 Web3.py</a:t>
+            </a:r>
+          </a:p>
+          <a:p>
+            <a:pPr>
+              <a:defRPr sz="819">
                 <a:solidFill>
                   <a:srgbClr val="475569"/>
                 </a:solidFill>
               </a:defRPr>
             </a:pPr>
             <a:r>
-              <a:t>Controlled multi-channel release (LinkedIn, X, PPTX/PDF export). Sealed with SHA-256 and Ed25519.</a:t>
-            </a:r>
-          </a:p>
-        </p:txBody>
-      </p:sp>
-      <p:sp>
-        <p:nvSpPr>
-          <p:cNvPr id="21" name="Rounded Rectangle 20"/>
+              <a:t>Immutable SHA-256 artifact digests anchored on Ethereum Sepolia contract (0x8AEf...7c08) with Ed25519 asymmetric signatures (RFC 8032) for non-repudiation.</a:t>
+            </a:r>
+          </a:p>
+        </p:txBody>
+      </p:sp>
+      <p:sp>
+        <p:nvSpPr>
+          <p:cNvPr id="16" name="Rounded Rectangle 15"/>
           <p:cNvSpPr/>
           <p:nvPr/>
         </p:nvSpPr>
         <p:spPr>
           <a:xfrm>
-            <a:off x="731520" y="5806440"/>
-            <a:ext cx="10698480" cy="731520"/>
+            <a:off x="7863840" y="1325880"/>
+            <a:ext cx="3596335" cy="5084064"/>
           </a:xfrm>
           <a:prstGeom prst="roundRect">
             <a:avLst/>
           </a:prstGeom>
           <a:solidFill>
-            <a:srgbClr val="F0FDF4"/>
+            <a:srgbClr val="FFFFFF"/>
           </a:solidFill>
-          <a:ln w="19050">
+          <a:ln w="15240">
             <a:solidFill>
-              <a:srgbClr val="22C55E"/>
+              <a:srgbClr val="E2E8F0"/>
             </a:solidFill>
           </a:ln>
         </p:spPr>
@@ -5223,14 +7545,66 @@
       </p:sp>
       <p:sp>
         <p:nvSpPr>
-          <p:cNvPr id="22" name="TextBox 21"/>
+          <p:cNvPr id="17" name="Rounded Rectangle 16"/>
+          <p:cNvSpPr/>
+          <p:nvPr/>
+        </p:nvSpPr>
+        <p:spPr>
+          <a:xfrm>
+            <a:off x="8001000" y="1463040"/>
+            <a:ext cx="3322015" cy="256032"/>
+          </a:xfrm>
+          <a:prstGeom prst="roundRect">
+            <a:avLst/>
+          </a:prstGeom>
+          <a:solidFill>
+            <a:srgbClr val="0B1220"/>
+          </a:solidFill>
+          <a:ln>
+            <a:noFill/>
+          </a:ln>
+        </p:spPr>
+        <p:style>
+          <a:lnRef idx="1">
+            <a:schemeClr val="accent1"/>
+          </a:lnRef>
+          <a:fillRef idx="3">
+            <a:schemeClr val="accent1"/>
+          </a:fillRef>
+          <a:effectRef idx="2">
+            <a:schemeClr val="accent1"/>
+          </a:effectRef>
+          <a:fontRef idx="minor">
+            <a:schemeClr val="lt1"/>
+          </a:fontRef>
+        </p:style>
+        <p:txBody>
+          <a:bodyPr rtlCol="0" anchor="ctr" wrap="none" lIns="0" tIns="0" rIns="0" bIns="0"/>
+          <a:lstStyle/>
+          <a:p>
+            <a:pPr algn="ctr">
+              <a:defRPr sz="850" b="1">
+                <a:solidFill>
+                  <a:srgbClr val="FFFFFF"/>
+                </a:solidFill>
+              </a:defRPr>
+            </a:pPr>
+            <a:r>
+              <a:t>CORE TECHNICAL &amp; SECURITY SPECS</a:t>
+            </a:r>
+          </a:p>
+        </p:txBody>
+      </p:sp>
+      <p:sp>
+        <p:nvSpPr>
+          <p:cNvPr id="18" name="TextBox 17"/>
           <p:cNvSpPr txBox="1"/>
           <p:nvPr/>
         </p:nvSpPr>
         <p:spPr>
           <a:xfrm>
-            <a:off x="868680" y="5870448"/>
-            <a:ext cx="10424160" cy="594360"/>
+            <a:off x="8001000" y="1810512"/>
+            <a:ext cx="3322015" cy="4480560"/>
           </a:xfrm>
           <a:prstGeom prst="rect">
             <a:avLst/>
@@ -5238,36 +7612,123 @@
           <a:noFill/>
         </p:spPr>
         <p:txBody>
-          <a:bodyPr wrap="square">
+          <a:bodyPr wrap="square" lIns="0" rIns="0" tIns="0" bIns="0">
             <a:spAutoFit/>
           </a:bodyPr>
           <a:lstStyle/>
           <a:p>
             <a:pPr>
-              <a:defRPr b="1" sz="1000">
-                <a:solidFill>
-                  <a:srgbClr val="166534"/>
-                </a:solidFill>
-              </a:defRPr>
-            </a:pPr>
-            <a:r>
-              <a:t>THE 7 PARALLEL OUTPUT PACKAGES:  </a:t>
+              <a:spcAft>
+                <a:spcPts val="600"/>
+              </a:spcAft>
+            </a:pPr>
+            <a:r>
+              <a:rPr b="1" sz="880">
+                <a:solidFill>
+                  <a:srgbClr val="0284C7"/>
+                </a:solidFill>
+              </a:rPr>
+              <a:t>▶ Deterministic Policy Routing: </a:t>
+            </a:r>
+            <a:r>
+              <a:rPr sz="800">
+                <a:solidFill>
+                  <a:srgbClr val="475569"/>
+                </a:solidFill>
+              </a:rPr>
+              <a:t>Zero-LLM Authority: Policy engine is 100% pure Python. It decides whether content can use cloud or air-gapped local endpoints based on PUBLIC, INTERNAL, CONFIDENTIAL, RESTRICTED classification.</a:t>
             </a:r>
           </a:p>
           <a:p>
             <a:pPr>
-              <a:defRPr sz="900">
-                <a:solidFill>
-                  <a:srgbClr val="0F172A"/>
-                </a:solidFill>
-              </a:defRPr>
-            </a:pPr>
-            <a:r>
-              <a:t>[1] Executive Summary (Briefing)  •  [2] LinkedIn Post (Social)  •  [3] Policy Advisory (Impact &amp; Risks)  •  [4] Presentation Deck (.pptx)</a:t>
-            </a:r>
-            <a:br/>
-            <a:r>
-              <a:t>[5] X Micro-Copy (Thread)  •  [6] Infographic (PNG + PDF)  •  [7] Video Package (Structured Storyboard PDF + SRT Subtitles — NOT MP4)</a:t>
+              <a:spcAft>
+                <a:spcPts val="600"/>
+              </a:spcAft>
+            </a:pPr>
+            <a:r>
+              <a:rPr b="1" sz="880">
+                <a:solidFill>
+                  <a:srgbClr val="7C3AED"/>
+                </a:solidFill>
+              </a:rPr>
+              <a:t>▶ Air-Gapped Sovereign Route: </a:t>
+            </a:r>
+            <a:r>
+              <a:rPr sz="800">
+                <a:solidFill>
+                  <a:srgbClr val="475569"/>
+                </a:solidFill>
+              </a:rPr>
+              <a:t>Sensitive data is physically restricted from cloud API egress; routed strictly to local Ollama / vLLM running Gemma 3 12B with 0% data leakage.</a:t>
+            </a:r>
+          </a:p>
+          <a:p>
+            <a:pPr>
+              <a:spcAft>
+                <a:spcPts val="600"/>
+              </a:spcAft>
+            </a:pPr>
+            <a:r>
+              <a:rPr b="1" sz="880">
+                <a:solidFill>
+                  <a:srgbClr val="10B981"/>
+                </a:solidFill>
+              </a:rPr>
+              <a:t>▶ Fault Isolation Architecture: </a:t>
+            </a:r>
+            <a:r>
+              <a:rPr sz="800">
+                <a:solidFill>
+                  <a:srgbClr val="475569"/>
+                </a:solidFill>
+              </a:rPr>
+              <a:t>Nested database savepoints isolate individual generator errors. If one deliverable encounters an issue, the remaining 6 continue cleanly.</a:t>
+            </a:r>
+          </a:p>
+          <a:p>
+            <a:pPr>
+              <a:spcAft>
+                <a:spcPts val="600"/>
+              </a:spcAft>
+            </a:pPr>
+            <a:r>
+              <a:rPr b="1" sz="880">
+                <a:solidFill>
+                  <a:srgbClr val="0891B2"/>
+                </a:solidFill>
+              </a:rPr>
+              <a:t>▶ EVM Sepolia Smart Contract: </a:t>
+            </a:r>
+            <a:r>
+              <a:rPr sz="800">
+                <a:solidFill>
+                  <a:srgbClr val="475569"/>
+                </a:solidFill>
+              </a:rPr>
+              <a:t>Post-generation hook submits 32-byte content digests via Web3.py to Ethereum Sepolia. verifyDigest() enables public tamper detection.</a:t>
+            </a:r>
+          </a:p>
+          <a:p>
+            <a:pPr>
+              <a:spcAft>
+                <a:spcPts val="600"/>
+              </a:spcAft>
+            </a:pPr>
+            <a:r>
+              <a:rPr b="1" sz="880">
+                <a:solidFill>
+                  <a:srgbClr val="D97706"/>
+                </a:solidFill>
+              </a:rPr>
+              <a:t>▶ Automated Fact Verification: </a:t>
+            </a:r>
+            <a:r>
+              <a:rPr sz="800">
+                <a:solidFill>
+                  <a:srgbClr val="475569"/>
+                </a:solidFill>
+              </a:rPr>
+              <a:t>Natural Language Inference (NLI) cross-checks generated claims against source chunks, scoring grounding from 0.0 to 1.0.</a:t>
             </a:r>
           </a:p>
         </p:txBody>
@@ -5292,75 +7753,23 @@
       <p:grpSpPr/>
       <p:sp>
         <p:nvSpPr>
-          <p:cNvPr id="2" name="TextBox 1"/>
-          <p:cNvSpPr txBox="1"/>
-          <p:nvPr/>
-        </p:nvSpPr>
-        <p:spPr>
-          <a:xfrm>
-            <a:off x="731520" y="365760"/>
-            <a:ext cx="10728655" cy="1005840"/>
+          <p:cNvPr id="2" name="Rectangle 1"/>
+          <p:cNvSpPr/>
+          <p:nvPr/>
+        </p:nvSpPr>
+        <p:spPr>
+          <a:xfrm>
+            <a:off x="0" y="0"/>
+            <a:ext cx="12191695" cy="6858000"/>
           </a:xfrm>
           <a:prstGeom prst="rect">
-            <a:avLst/>
-          </a:prstGeom>
-          <a:noFill/>
-        </p:spPr>
-        <p:txBody>
-          <a:bodyPr wrap="square" lIns="0" tIns="0" rIns="0" bIns="0">
-            <a:spAutoFit/>
-          </a:bodyPr>
-          <a:lstStyle/>
-          <a:p>
-            <a:pPr>
-              <a:spcAft>
-                <a:spcPts val="200"/>
-              </a:spcAft>
-              <a:defRPr sz="1000" b="1">
-                <a:solidFill>
-                  <a:srgbClr val="0284C7"/>
-                </a:solidFill>
-              </a:defRPr>
-            </a:pPr>
-            <a:r>
-              <a:t>SIH 26154 • BLOCKCHAIN &amp; CYBERSECURITY</a:t>
-            </a:r>
-          </a:p>
-          <a:p>
-            <a:pPr>
-              <a:defRPr sz="2600" b="1">
-                <a:solidFill>
-                  <a:srgbClr val="0F172A"/>
-                </a:solidFill>
-              </a:defRPr>
-            </a:pPr>
-            <a:r>
-              <a:t>SECURITY, GOVERNANCE &amp; INNOVATION HIGHLIGHTS</a:t>
-            </a:r>
-          </a:p>
-        </p:txBody>
-      </p:sp>
-      <p:sp>
-        <p:nvSpPr>
-          <p:cNvPr id="3" name="Rounded Rectangle 2"/>
-          <p:cNvSpPr/>
-          <p:nvPr/>
-        </p:nvSpPr>
-        <p:spPr>
-          <a:xfrm>
-            <a:off x="731520" y="1463040"/>
-            <a:ext cx="5257800" cy="2331720"/>
-          </a:xfrm>
-          <a:prstGeom prst="roundRect">
             <a:avLst/>
           </a:prstGeom>
           <a:solidFill>
             <a:srgbClr val="F8FAFC"/>
           </a:solidFill>
-          <a:ln w="19050">
-            <a:solidFill>
-              <a:srgbClr val="CBD5E1"/>
-            </a:solidFill>
+          <a:ln>
+            <a:noFill/>
           </a:ln>
         </p:spPr>
         <p:style>
@@ -5387,14 +7796,14 @@
       </p:sp>
       <p:sp>
         <p:nvSpPr>
-          <p:cNvPr id="4" name="TextBox 3"/>
+          <p:cNvPr id="3" name="TextBox 2"/>
           <p:cNvSpPr txBox="1"/>
           <p:nvPr/>
         </p:nvSpPr>
         <p:spPr>
           <a:xfrm>
-            <a:off x="868680" y="1572768"/>
-            <a:ext cx="4983480" cy="2148840"/>
+            <a:off x="731520" y="320040"/>
+            <a:ext cx="10728655" cy="960120"/>
           </a:xfrm>
           <a:prstGeom prst="rect">
             <a:avLst/>
@@ -5402,139 +7811,59 @@
           <a:noFill/>
         </p:spPr>
         <p:txBody>
-          <a:bodyPr wrap="square">
+          <a:bodyPr wrap="square" lIns="0" tIns="0" rIns="0" bIns="0">
             <a:spAutoFit/>
           </a:bodyPr>
           <a:lstStyle/>
           <a:p>
             <a:pPr>
               <a:spcAft>
-                <a:spcPts val="600"/>
+                <a:spcPts val="200"/>
               </a:spcAft>
-              <a:defRPr b="1" sz="1200">
-                <a:solidFill>
-                  <a:srgbClr val="EA580C"/>
-                </a:solidFill>
-              </a:defRPr>
-            </a:pPr>
-            <a:r>
-              <a:t>POLICY-CONTROLLED AI ROUTING</a:t>
+              <a:defRPr sz="950" b="1">
+                <a:solidFill>
+                  <a:srgbClr val="0284C7"/>
+                </a:solidFill>
+              </a:defRPr>
+            </a:pPr>
+            <a:r>
+              <a:t>SMART INDIA HACKATHON 2026 • PS ID: SIH 26154 • THEME: BLOCKCHAIN &amp; CYBERSECURITY</a:t>
             </a:r>
           </a:p>
           <a:p>
             <a:pPr>
-              <a:spcAft>
-                <a:spcPts val="300"/>
-              </a:spcAft>
-            </a:pPr>
-            <a:r>
-              <a:rPr b="1" sz="950">
-                <a:solidFill>
-                  <a:srgbClr val="0F172A"/>
-                </a:solidFill>
-              </a:rPr>
-              <a:t>• Zero-LLM Authority: </a:t>
-            </a:r>
-            <a:r>
-              <a:rPr sz="900">
-                <a:solidFill>
-                  <a:srgbClr val="475569"/>
-                </a:solidFill>
-              </a:rPr>
-              <a:t>Policy engine is pure Python, deterministic, and offline. Never allows LLM to override access rules.</a:t>
-            </a:r>
-          </a:p>
-          <a:p>
-            <a:pPr>
-              <a:spcAft>
-                <a:spcPts val="300"/>
-              </a:spcAft>
-            </a:pPr>
-            <a:r>
-              <a:rPr b="1" sz="950">
-                <a:solidFill>
-                  <a:srgbClr val="0F172A"/>
-                </a:solidFill>
-              </a:rPr>
-              <a:t>• Information Classification: </a:t>
-            </a:r>
-            <a:r>
-              <a:rPr sz="900">
-                <a:solidFill>
-                  <a:srgbClr val="475569"/>
-                </a:solidFill>
-              </a:rPr>
-              <a:t>PUBLIC, INTERNAL, CONFIDENTIAL, RESTRICTED assigned at ingestion.</a:t>
-            </a:r>
-          </a:p>
-          <a:p>
-            <a:pPr>
-              <a:spcAft>
-                <a:spcPts val="300"/>
-              </a:spcAft>
-            </a:pPr>
-            <a:r>
-              <a:rPr b="1" sz="950">
-                <a:solidFill>
-                  <a:srgbClr val="0F172A"/>
-                </a:solidFill>
-              </a:rPr>
-              <a:t>• Air-Gapped Sovereign Enforcement: </a:t>
-            </a:r>
-            <a:r>
-              <a:rPr sz="900">
-                <a:solidFill>
-                  <a:srgbClr val="475569"/>
-                </a:solidFill>
-              </a:rPr>
-              <a:t>CONFIDENTIAL/RESTRICTED data is strictly forbidden from external cloud LLMs. Fails closed with HTTP 403.</a:t>
-            </a:r>
-          </a:p>
-          <a:p>
-            <a:pPr>
-              <a:spcAft>
-                <a:spcPts val="300"/>
-              </a:spcAft>
-            </a:pPr>
-            <a:r>
-              <a:rPr b="1" sz="950">
-                <a:solidFill>
-                  <a:srgbClr val="0F172A"/>
-                </a:solidFill>
-              </a:rPr>
-              <a:t>• Dissemination Restrictions: </a:t>
-            </a:r>
-            <a:r>
-              <a:rPr sz="900">
-                <a:solidFill>
-                  <a:srgbClr val="475569"/>
-                </a:solidFill>
-              </a:rPr>
-              <a:t>Restricted materials are hard-blocked from public social channels (LinkedIn/X).</a:t>
-            </a:r>
-          </a:p>
-        </p:txBody>
-      </p:sp>
-      <p:sp>
-        <p:nvSpPr>
-          <p:cNvPr id="5" name="Rounded Rectangle 4"/>
+              <a:defRPr sz="2200" b="1">
+                <a:solidFill>
+                  <a:srgbClr val="0B1220"/>
+                </a:solidFill>
+              </a:defRPr>
+            </a:pPr>
+            <a:r>
+              <a:t>FEASIBILITY, OPERATIONAL VIABILITY &amp; RISK SAFEGUARDS</a:t>
+            </a:r>
+          </a:p>
+        </p:txBody>
+      </p:sp>
+      <p:sp>
+        <p:nvSpPr>
+          <p:cNvPr id="4" name="Rounded Rectangle 3"/>
           <p:cNvSpPr/>
           <p:nvPr/>
         </p:nvSpPr>
         <p:spPr>
           <a:xfrm>
-            <a:off x="6172200" y="1463040"/>
-            <a:ext cx="5257800" cy="2331720"/>
+            <a:off x="731520" y="1325880"/>
+            <a:ext cx="5257800" cy="1920240"/>
           </a:xfrm>
           <a:prstGeom prst="roundRect">
             <a:avLst/>
           </a:prstGeom>
           <a:solidFill>
-            <a:srgbClr val="F8FAFC"/>
+            <a:srgbClr val="FFFFFF"/>
           </a:solidFill>
-          <a:ln w="19050">
+          <a:ln w="15240">
             <a:solidFill>
-              <a:srgbClr val="CBD5E1"/>
+              <a:srgbClr val="E2E8F0"/>
             </a:solidFill>
           </a:ln>
         </p:spPr>
@@ -5562,155 +7891,23 @@
       </p:sp>
       <p:sp>
         <p:nvSpPr>
-          <p:cNvPr id="6" name="TextBox 5"/>
-          <p:cNvSpPr txBox="1"/>
-          <p:nvPr/>
-        </p:nvSpPr>
-        <p:spPr>
-          <a:xfrm>
-            <a:off x="6309360" y="1572768"/>
-            <a:ext cx="4983480" cy="2148840"/>
-          </a:xfrm>
-          <a:prstGeom prst="rect">
-            <a:avLst/>
-          </a:prstGeom>
-          <a:noFill/>
-        </p:spPr>
-        <p:txBody>
-          <a:bodyPr wrap="square">
-            <a:spAutoFit/>
-          </a:bodyPr>
-          <a:lstStyle/>
-          <a:p>
-            <a:pPr>
-              <a:spcAft>
-                <a:spcPts val="600"/>
-              </a:spcAft>
-              <a:defRPr b="1" sz="1200">
-                <a:solidFill>
-                  <a:srgbClr val="0284C7"/>
-                </a:solidFill>
-              </a:defRPr>
-            </a:pPr>
-            <a:r>
-              <a:t>EVIDENCE-GROUNDED GENERATION</a:t>
-            </a:r>
-          </a:p>
-          <a:p>
-            <a:pPr>
-              <a:spcAft>
-                <a:spcPts val="300"/>
-              </a:spcAft>
-            </a:pPr>
-            <a:r>
-              <a:rPr b="1" sz="950">
-                <a:solidFill>
-                  <a:srgbClr val="0F172A"/>
-                </a:solidFill>
-              </a:rPr>
-              <a:t>• Single Canonical Brief: </a:t>
-            </a:r>
-            <a:r>
-              <a:rPr sz="900">
-                <a:solidFill>
-                  <a:srgbClr val="475569"/>
-                </a:solidFill>
-              </a:rPr>
-              <a:t>Extracts facts, claims, statistics, and entities once into CanonicalContent to prevent drift.</a:t>
-            </a:r>
-          </a:p>
-          <a:p>
-            <a:pPr>
-              <a:spcAft>
-                <a:spcPts val="300"/>
-              </a:spcAft>
-            </a:pPr>
-            <a:r>
-              <a:rPr b="1" sz="950">
-                <a:solidFill>
-                  <a:srgbClr val="0F172A"/>
-                </a:solidFill>
-              </a:rPr>
-              <a:t>• Top-k Citations: </a:t>
-            </a:r>
-            <a:r>
-              <a:rPr sz="900">
-                <a:solidFill>
-                  <a:srgbClr val="475569"/>
-                </a:solidFill>
-              </a:rPr>
-              <a:t>RAGService anchors generation to exact source chunk offsets with SHA-256 chunk hashes.</a:t>
-            </a:r>
-          </a:p>
-          <a:p>
-            <a:pPr>
-              <a:spcAft>
-                <a:spcPts val="300"/>
-              </a:spcAft>
-            </a:pPr>
-            <a:r>
-              <a:rPr b="1" sz="950">
-                <a:solidFill>
-                  <a:srgbClr val="0F172A"/>
-                </a:solidFill>
-              </a:rPr>
-              <a:t>• Bounded Regeneration: </a:t>
-            </a:r>
-            <a:r>
-              <a:rPr sz="900">
-                <a:solidFill>
-                  <a:srgbClr val="475569"/>
-                </a:solidFill>
-              </a:rPr>
-              <a:t>Pydantic output schema validation retries on structural errors without prompt re-injection.</a:t>
-            </a:r>
-          </a:p>
-          <a:p>
-            <a:pPr>
-              <a:spcAft>
-                <a:spcPts val="300"/>
-              </a:spcAft>
-            </a:pPr>
-            <a:r>
-              <a:rPr b="1" sz="950">
-                <a:solidFill>
-                  <a:srgbClr val="0F172A"/>
-                </a:solidFill>
-              </a:rPr>
-              <a:t>• Failure Isolation: </a:t>
-            </a:r>
-            <a:r>
-              <a:rPr sz="900">
-                <a:solidFill>
-                  <a:srgbClr val="475569"/>
-                </a:solidFill>
-              </a:rPr>
-              <a:t>Nested DB savepoints isolate output errors so one failure never cancels remaining siblings.</a:t>
-            </a:r>
-          </a:p>
-        </p:txBody>
-      </p:sp>
-      <p:sp>
-        <p:nvSpPr>
-          <p:cNvPr id="7" name="Rounded Rectangle 6"/>
+          <p:cNvPr id="5" name="Rounded Rectangle 4"/>
           <p:cNvSpPr/>
           <p:nvPr/>
         </p:nvSpPr>
         <p:spPr>
           <a:xfrm>
-            <a:off x="731520" y="3931920"/>
-            <a:ext cx="5257800" cy="2331720"/>
+            <a:off x="841248" y="1417320"/>
+            <a:ext cx="2926080" cy="219456"/>
           </a:xfrm>
           <a:prstGeom prst="roundRect">
             <a:avLst/>
           </a:prstGeom>
           <a:solidFill>
-            <a:srgbClr val="F8FAFC"/>
+            <a:srgbClr val="0284C7"/>
           </a:solidFill>
-          <a:ln w="19050">
-            <a:solidFill>
-              <a:srgbClr val="CBD5E1"/>
-            </a:solidFill>
+          <a:ln>
+            <a:noFill/>
           </a:ln>
         </p:spPr>
         <p:style>
@@ -5728,23 +7925,32 @@
           </a:fontRef>
         </p:style>
         <p:txBody>
-          <a:bodyPr rtlCol="0" anchor="ctr"/>
-          <a:lstStyle/>
-          <a:p>
-            <a:pPr algn="ctr"/>
-          </a:p>
-        </p:txBody>
-      </p:sp>
-      <p:sp>
-        <p:nvSpPr>
-          <p:cNvPr id="8" name="TextBox 7"/>
+          <a:bodyPr rtlCol="0" anchor="ctr" wrap="none" lIns="0" tIns="0" rIns="0" bIns="0"/>
+          <a:lstStyle/>
+          <a:p>
+            <a:pPr algn="ctr">
+              <a:defRPr sz="800" b="1">
+                <a:solidFill>
+                  <a:srgbClr val="FFFFFF"/>
+                </a:solidFill>
+              </a:defRPr>
+            </a:pPr>
+            <a:r>
+              <a:t>TECHNICAL FEASIBILITY</a:t>
+            </a:r>
+          </a:p>
+        </p:txBody>
+      </p:sp>
+      <p:sp>
+        <p:nvSpPr>
+          <p:cNvPr id="6" name="TextBox 5"/>
           <p:cNvSpPr txBox="1"/>
           <p:nvPr/>
         </p:nvSpPr>
         <p:spPr>
           <a:xfrm>
-            <a:off x="868680" y="4041648"/>
-            <a:ext cx="4983480" cy="2148840"/>
+            <a:off x="841248" y="1691640"/>
+            <a:ext cx="5029200" cy="1463040"/>
           </a:xfrm>
           <a:prstGeom prst="rect">
             <a:avLst/>
@@ -5752,25 +7958,10 @@
           <a:noFill/>
         </p:spPr>
         <p:txBody>
-          <a:bodyPr wrap="square">
+          <a:bodyPr wrap="square" lIns="0" rIns="0" tIns="0" bIns="0">
             <a:spAutoFit/>
           </a:bodyPr>
           <a:lstStyle/>
-          <a:p>
-            <a:pPr>
-              <a:spcAft>
-                <a:spcPts val="600"/>
-              </a:spcAft>
-              <a:defRPr b="1" sz="1200">
-                <a:solidFill>
-                  <a:srgbClr val="0D9488"/>
-                </a:solidFill>
-              </a:defRPr>
-            </a:pPr>
-            <a:r>
-              <a:t>DETERMINISTIC FACT VERIFICATION</a:t>
-            </a:r>
-          </a:p>
           <a:p>
             <a:pPr>
               <a:spcAft>
@@ -5778,20 +7969,20 @@
               </a:spcAft>
             </a:pPr>
             <a:r>
-              <a:rPr b="1" sz="950">
-                <a:solidFill>
-                  <a:srgbClr val="0F172A"/>
+              <a:rPr b="1" sz="850">
+                <a:solidFill>
+                  <a:srgbClr val="0B1220"/>
                 </a:solidFill>
               </a:rPr>
-              <a:t>• Automated Claim Auditing: </a:t>
-            </a:r>
-            <a:r>
-              <a:rPr sz="900">
+              <a:t>• Asynchronous Queue Scaling: </a:t>
+            </a:r>
+            <a:r>
+              <a:rPr sz="800">
                 <a:solidFill>
                   <a:srgbClr val="475569"/>
                 </a:solidFill>
               </a:rPr>
-              <a:t>Extracts checkable claims from generated outputs and validates them against source chunks.</a:t>
+              <a:t>Redis 7 + Python-RQ workers decouple generation from HTTP requests, eliminating timeouts on heavy PDF/PPTX builds.</a:t>
             </a:r>
           </a:p>
           <a:p>
@@ -5801,20 +7992,20 @@
               </a:spcAft>
             </a:pPr>
             <a:r>
-              <a:rPr b="1" sz="950">
-                <a:solidFill>
-                  <a:srgbClr val="0F172A"/>
+              <a:rPr b="1" sz="850">
+                <a:solidFill>
+                  <a:srgbClr val="0B1220"/>
                 </a:solidFill>
               </a:rPr>
-              <a:t>• Numeric &amp; Date Conflict Checks: </a:t>
-            </a:r>
-            <a:r>
-              <a:rPr sz="900">
+              <a:t>• Stateful Modular Isolation: </a:t>
+            </a:r>
+            <a:r>
+              <a:rPr sz="800">
                 <a:solidFill>
                   <a:srgbClr val="475569"/>
                 </a:solidFill>
               </a:rPr>
-              <a:t>Flags metric discrepancies and mismatched timeline dates automatically as warnings/errors.</a:t>
+              <a:t>7 generator adapters execute independently. Failure in one output never crashes remaining siblings.</a:t>
             </a:r>
           </a:p>
           <a:p>
@@ -5824,67 +8015,44 @@
               </a:spcAft>
             </a:pPr>
             <a:r>
-              <a:rPr b="1" sz="950">
-                <a:solidFill>
-                  <a:srgbClr val="0F172A"/>
+              <a:rPr b="1" sz="850">
+                <a:solidFill>
+                  <a:srgbClr val="0B1220"/>
                 </a:solidFill>
               </a:rPr>
-              <a:t>• Consistency Scoring: </a:t>
-            </a:r>
-            <a:r>
-              <a:rPr sz="900">
+              <a:t>• Hybrid Model Interoperability: </a:t>
+            </a:r>
+            <a:r>
+              <a:rPr sz="800">
                 <a:solidFill>
                   <a:srgbClr val="475569"/>
                 </a:solidFill>
               </a:rPr>
-              <a:t>Provides quantitative grounding and consistency scores on every completed deliverable.</a:t>
-            </a:r>
-          </a:p>
-          <a:p>
-            <a:pPr>
-              <a:spcAft>
-                <a:spcPts val="300"/>
-              </a:spcAft>
-            </a:pPr>
-            <a:r>
-              <a:rPr b="1" sz="950">
-                <a:solidFill>
-                  <a:srgbClr val="0F172A"/>
-                </a:solidFill>
-              </a:rPr>
-              <a:t>• On-Demand Verification: </a:t>
-            </a:r>
-            <a:r>
-              <a:rPr sz="900">
-                <a:solidFill>
-                  <a:srgbClr val="475569"/>
-                </a:solidFill>
-              </a:rPr>
-              <a:t>Standalone fact verifier assigns explicit SUPPORTED / CONTRADICTED / UNVERIFIED verdicts.</a:t>
-            </a:r>
-          </a:p>
-        </p:txBody>
-      </p:sp>
-      <p:sp>
-        <p:nvSpPr>
-          <p:cNvPr id="9" name="Rounded Rectangle 8"/>
+              <a:t>Provider interface dynamically routes between Groq, Gemini, and local Ollama Gemma 3.</a:t>
+            </a:r>
+          </a:p>
+        </p:txBody>
+      </p:sp>
+      <p:sp>
+        <p:nvSpPr>
+          <p:cNvPr id="7" name="Rounded Rectangle 6"/>
           <p:cNvSpPr/>
           <p:nvPr/>
         </p:nvSpPr>
         <p:spPr>
           <a:xfrm>
-            <a:off x="6172200" y="3931920"/>
-            <a:ext cx="5257800" cy="2331720"/>
+            <a:off x="6172200" y="1325880"/>
+            <a:ext cx="5257800" cy="1920240"/>
           </a:xfrm>
           <a:prstGeom prst="roundRect">
             <a:avLst/>
           </a:prstGeom>
           <a:solidFill>
-            <a:srgbClr val="F8FAFC"/>
+            <a:srgbClr val="FFFFFF"/>
           </a:solidFill>
-          <a:ln w="19050">
+          <a:ln w="15240">
             <a:solidFill>
-              <a:srgbClr val="CBD5E1"/>
+              <a:srgbClr val="E2E8F0"/>
             </a:solidFill>
           </a:ln>
         </p:spPr>
@@ -5912,14 +8080,66 @@
       </p:sp>
       <p:sp>
         <p:nvSpPr>
-          <p:cNvPr id="10" name="TextBox 9"/>
+          <p:cNvPr id="8" name="Rounded Rectangle 7"/>
+          <p:cNvSpPr/>
+          <p:nvPr/>
+        </p:nvSpPr>
+        <p:spPr>
+          <a:xfrm>
+            <a:off x="6281928" y="1417320"/>
+            <a:ext cx="2926080" cy="219456"/>
+          </a:xfrm>
+          <a:prstGeom prst="roundRect">
+            <a:avLst/>
+          </a:prstGeom>
+          <a:solidFill>
+            <a:srgbClr val="E11D48"/>
+          </a:solidFill>
+          <a:ln>
+            <a:noFill/>
+          </a:ln>
+        </p:spPr>
+        <p:style>
+          <a:lnRef idx="1">
+            <a:schemeClr val="accent1"/>
+          </a:lnRef>
+          <a:fillRef idx="3">
+            <a:schemeClr val="accent1"/>
+          </a:fillRef>
+          <a:effectRef idx="2">
+            <a:schemeClr val="accent1"/>
+          </a:effectRef>
+          <a:fontRef idx="minor">
+            <a:schemeClr val="lt1"/>
+          </a:fontRef>
+        </p:style>
+        <p:txBody>
+          <a:bodyPr rtlCol="0" anchor="ctr" wrap="none" lIns="0" tIns="0" rIns="0" bIns="0"/>
+          <a:lstStyle/>
+          <a:p>
+            <a:pPr algn="ctr">
+              <a:defRPr sz="800" b="1">
+                <a:solidFill>
+                  <a:srgbClr val="FFFFFF"/>
+                </a:solidFill>
+              </a:defRPr>
+            </a:pPr>
+            <a:r>
+              <a:t>SECURITY &amp; COMPLIANCE FEASIBILITY</a:t>
+            </a:r>
+          </a:p>
+        </p:txBody>
+      </p:sp>
+      <p:sp>
+        <p:nvSpPr>
+          <p:cNvPr id="9" name="TextBox 8"/>
           <p:cNvSpPr txBox="1"/>
           <p:nvPr/>
         </p:nvSpPr>
         <p:spPr>
           <a:xfrm>
-            <a:off x="6309360" y="4041648"/>
-            <a:ext cx="4983480" cy="2148840"/>
+            <a:off x="6281928" y="1691640"/>
+            <a:ext cx="5029200" cy="1463040"/>
           </a:xfrm>
           <a:prstGeom prst="rect">
             <a:avLst/>
@@ -5927,25 +8147,10 @@
           <a:noFill/>
         </p:spPr>
         <p:txBody>
-          <a:bodyPr wrap="square">
+          <a:bodyPr wrap="square" lIns="0" rIns="0" tIns="0" bIns="0">
             <a:spAutoFit/>
           </a:bodyPr>
           <a:lstStyle/>
-          <a:p>
-            <a:pPr>
-              <a:spcAft>
-                <a:spcPts val="600"/>
-              </a:spcAft>
-              <a:defRPr b="1" sz="1200">
-                <a:solidFill>
-                  <a:srgbClr val="0F172A"/>
-                </a:solidFill>
-              </a:defRPr>
-            </a:pPr>
-            <a:r>
-              <a:t>CRYPTOGRAPHIC TRUST &amp; AUDIT LINEAGE</a:t>
-            </a:r>
-          </a:p>
           <a:p>
             <a:pPr>
               <a:spcAft>
@@ -5953,20 +8158,20 @@
               </a:spcAft>
             </a:pPr>
             <a:r>
-              <a:rPr b="1" sz="950">
-                <a:solidFill>
-                  <a:srgbClr val="0F172A"/>
+              <a:rPr b="1" sz="850">
+                <a:solidFill>
+                  <a:srgbClr val="0B1220"/>
                 </a:solidFill>
               </a:rPr>
-              <a:t>• SHA-256 Storage Digests: </a:t>
-            </a:r>
-            <a:r>
-              <a:rPr sz="900">
+              <a:t>• NIST SP 800-207 Zero-Trust: </a:t>
+            </a:r>
+            <a:r>
+              <a:rPr sz="800">
                 <a:solidFill>
                   <a:srgbClr val="475569"/>
                 </a:solidFill>
               </a:rPr>
-              <a:t>Calculates exact cryptographic hashes of all generated binary artifacts (.pptx, .png, .pdf, .srt).</a:t>
+              <a:t>Pre-flight perimeter inspection: ClamAV anti-malware, magic-byte checks, and regex DLP PII scrubbing.</a:t>
             </a:r>
           </a:p>
           <a:p>
@@ -5976,20 +8181,20 @@
               </a:spcAft>
             </a:pPr>
             <a:r>
-              <a:rPr b="1" sz="950">
-                <a:solidFill>
-                  <a:srgbClr val="0F172A"/>
+              <a:rPr b="1" sz="850">
+                <a:solidFill>
+                  <a:srgbClr val="0B1220"/>
                 </a:solidFill>
               </a:rPr>
-              <a:t>• Ed25519 Asymmetric Signatures: </a:t>
-            </a:r>
-            <a:r>
-              <a:rPr sz="900">
+              <a:t>• Air-Gapped Sovereign Enforcement: </a:t>
+            </a:r>
+            <a:r>
+              <a:rPr sz="800">
                 <a:solidFill>
                   <a:srgbClr val="475569"/>
                 </a:solidFill>
               </a:rPr>
-              <a:t>Authoritative production signing for non-repudiation. Zero private keys exposed in API or logs.</a:t>
+              <a:t>Confidential institutional records physically forbidden from leaving private enclave networks.</a:t>
             </a:r>
           </a:p>
           <a:p>
@@ -5999,22 +8204,142 @@
               </a:spcAft>
             </a:pPr>
             <a:r>
-              <a:rPr b="1" sz="950">
-                <a:solidFill>
-                  <a:srgbClr val="0F172A"/>
+              <a:rPr b="1" sz="850">
+                <a:solidFill>
+                  <a:srgbClr val="0B1220"/>
                 </a:solidFill>
               </a:rPr>
-              <a:t>• Human-in-the-Loop Approval: </a:t>
-            </a:r>
-            <a:r>
-              <a:rPr sz="900">
+              <a:t>• Prompt Injection Fencing: </a:t>
+            </a:r>
+            <a:r>
+              <a:rPr sz="800">
                 <a:solidFill>
                   <a:srgbClr val="475569"/>
                 </a:solidFill>
               </a:rPr>
-              <a:t>Dissemination policy trumps approval. Operators must sign off before external publication.</a:t>
-            </a:r>
-          </a:p>
+              <a:t>Strict instruction/data delimiters neutralize indirect prompt injection attacks.</a:t>
+            </a:r>
+          </a:p>
+        </p:txBody>
+      </p:sp>
+      <p:sp>
+        <p:nvSpPr>
+          <p:cNvPr id="10" name="Rounded Rectangle 9"/>
+          <p:cNvSpPr/>
+          <p:nvPr/>
+        </p:nvSpPr>
+        <p:spPr>
+          <a:xfrm>
+            <a:off x="731520" y="3355848"/>
+            <a:ext cx="5257800" cy="1920240"/>
+          </a:xfrm>
+          <a:prstGeom prst="roundRect">
+            <a:avLst/>
+          </a:prstGeom>
+          <a:solidFill>
+            <a:srgbClr val="FFFFFF"/>
+          </a:solidFill>
+          <a:ln w="15240">
+            <a:solidFill>
+              <a:srgbClr val="E2E8F0"/>
+            </a:solidFill>
+          </a:ln>
+        </p:spPr>
+        <p:style>
+          <a:lnRef idx="1">
+            <a:schemeClr val="accent1"/>
+          </a:lnRef>
+          <a:fillRef idx="3">
+            <a:schemeClr val="accent1"/>
+          </a:fillRef>
+          <a:effectRef idx="2">
+            <a:schemeClr val="accent1"/>
+          </a:effectRef>
+          <a:fontRef idx="minor">
+            <a:schemeClr val="lt1"/>
+          </a:fontRef>
+        </p:style>
+        <p:txBody>
+          <a:bodyPr rtlCol="0" anchor="ctr"/>
+          <a:lstStyle/>
+          <a:p>
+            <a:pPr algn="ctr"/>
+          </a:p>
+        </p:txBody>
+      </p:sp>
+      <p:sp>
+        <p:nvSpPr>
+          <p:cNvPr id="11" name="Rounded Rectangle 10"/>
+          <p:cNvSpPr/>
+          <p:nvPr/>
+        </p:nvSpPr>
+        <p:spPr>
+          <a:xfrm>
+            <a:off x="841248" y="3447288"/>
+            <a:ext cx="2926080" cy="219456"/>
+          </a:xfrm>
+          <a:prstGeom prst="roundRect">
+            <a:avLst/>
+          </a:prstGeom>
+          <a:solidFill>
+            <a:srgbClr val="7C3AED"/>
+          </a:solidFill>
+          <a:ln>
+            <a:noFill/>
+          </a:ln>
+        </p:spPr>
+        <p:style>
+          <a:lnRef idx="1">
+            <a:schemeClr val="accent1"/>
+          </a:lnRef>
+          <a:fillRef idx="3">
+            <a:schemeClr val="accent1"/>
+          </a:fillRef>
+          <a:effectRef idx="2">
+            <a:schemeClr val="accent1"/>
+          </a:effectRef>
+          <a:fontRef idx="minor">
+            <a:schemeClr val="lt1"/>
+          </a:fontRef>
+        </p:style>
+        <p:txBody>
+          <a:bodyPr rtlCol="0" anchor="ctr" wrap="none" lIns="0" tIns="0" rIns="0" bIns="0"/>
+          <a:lstStyle/>
+          <a:p>
+            <a:pPr algn="ctr">
+              <a:defRPr sz="800" b="1">
+                <a:solidFill>
+                  <a:srgbClr val="FFFFFF"/>
+                </a:solidFill>
+              </a:defRPr>
+            </a:pPr>
+            <a:r>
+              <a:t>OPERATIONAL &amp; WORKFLOW FEASIBILITY</a:t>
+            </a:r>
+          </a:p>
+        </p:txBody>
+      </p:sp>
+      <p:sp>
+        <p:nvSpPr>
+          <p:cNvPr id="12" name="TextBox 11"/>
+          <p:cNvSpPr txBox="1"/>
+          <p:nvPr/>
+        </p:nvSpPr>
+        <p:spPr>
+          <a:xfrm>
+            <a:off x="841248" y="3721608"/>
+            <a:ext cx="5029200" cy="1463040"/>
+          </a:xfrm>
+          <a:prstGeom prst="rect">
+            <a:avLst/>
+          </a:prstGeom>
+          <a:noFill/>
+        </p:spPr>
+        <p:txBody>
+          <a:bodyPr wrap="square" lIns="0" rIns="0" tIns="0" bIns="0">
+            <a:spAutoFit/>
+          </a:bodyPr>
+          <a:lstStyle/>
           <a:p>
             <a:pPr>
               <a:spcAft>
@@ -6022,24 +8347,738 @@
               </a:spcAft>
             </a:pPr>
             <a:r>
-              <a:rPr b="1" sz="950">
-                <a:solidFill>
-                  <a:srgbClr val="0F172A"/>
+              <a:rPr b="1" sz="850">
+                <a:solidFill>
+                  <a:srgbClr val="0B1220"/>
                 </a:solidFill>
               </a:rPr>
-              <a:t>• Provenance Ledger Boundary: </a:t>
-            </a:r>
-            <a:r>
-              <a:rPr sz="900">
+              <a:t>• Dual-Key Human Approval Gate: </a:t>
+            </a:r>
+            <a:r>
+              <a:rPr sz="800">
                 <a:solidFill>
                   <a:srgbClr val="475569"/>
                 </a:solidFill>
               </a:rPr>
-              <a:t>Pre-built ledger adapter ready for immutable audit tracking (FakeLedger mock in test, RealLedger in prod).</a:t>
-            </a:r>
-          </a:p>
-        </p:txBody>
-      </p:sp>
+              <a:t>Mandatory human review checkpoint before external publication or social dissemination.</a:t>
+            </a:r>
+          </a:p>
+          <a:p>
+            <a:pPr>
+              <a:spcAft>
+                <a:spcPts val="300"/>
+              </a:spcAft>
+            </a:pPr>
+            <a:r>
+              <a:rPr b="1" sz="850">
+                <a:solidFill>
+                  <a:srgbClr val="0B1220"/>
+                </a:solidFill>
+              </a:rPr>
+              <a:t>• Destination-Aware Policies: </a:t>
+            </a:r>
+            <a:r>
+              <a:rPr sz="800">
+                <a:solidFill>
+                  <a:srgbClr val="475569"/>
+                </a:solidFill>
+              </a:rPr>
+              <a:t>Restricted/internal outputs are hard-blocked from public social channels (LinkedIn/X).</a:t>
+            </a:r>
+          </a:p>
+          <a:p>
+            <a:pPr>
+              <a:spcAft>
+                <a:spcPts val="300"/>
+              </a:spcAft>
+            </a:pPr>
+            <a:r>
+              <a:rPr b="1" sz="850">
+                <a:solidFill>
+                  <a:srgbClr val="0B1220"/>
+                </a:solidFill>
+              </a:rPr>
+              <a:t>• SIEM-Ready Structured Audit: </a:t>
+            </a:r>
+            <a:r>
+              <a:rPr sz="800">
+                <a:solidFill>
+                  <a:srgbClr val="475569"/>
+                </a:solidFill>
+              </a:rPr>
+              <a:t>JSON audit logs capture all authentication, policy decisions, and verification events.</a:t>
+            </a:r>
+          </a:p>
+        </p:txBody>
+      </p:sp>
+      <p:sp>
+        <p:nvSpPr>
+          <p:cNvPr id="13" name="Rounded Rectangle 12"/>
+          <p:cNvSpPr/>
+          <p:nvPr/>
+        </p:nvSpPr>
+        <p:spPr>
+          <a:xfrm>
+            <a:off x="6172200" y="3355848"/>
+            <a:ext cx="5257800" cy="1920240"/>
+          </a:xfrm>
+          <a:prstGeom prst="roundRect">
+            <a:avLst/>
+          </a:prstGeom>
+          <a:solidFill>
+            <a:srgbClr val="FFFFFF"/>
+          </a:solidFill>
+          <a:ln w="15240">
+            <a:solidFill>
+              <a:srgbClr val="E2E8F0"/>
+            </a:solidFill>
+          </a:ln>
+        </p:spPr>
+        <p:style>
+          <a:lnRef idx="1">
+            <a:schemeClr val="accent1"/>
+          </a:lnRef>
+          <a:fillRef idx="3">
+            <a:schemeClr val="accent1"/>
+          </a:fillRef>
+          <a:effectRef idx="2">
+            <a:schemeClr val="accent1"/>
+          </a:effectRef>
+          <a:fontRef idx="minor">
+            <a:schemeClr val="lt1"/>
+          </a:fontRef>
+        </p:style>
+        <p:txBody>
+          <a:bodyPr rtlCol="0" anchor="ctr"/>
+          <a:lstStyle/>
+          <a:p>
+            <a:pPr algn="ctr"/>
+          </a:p>
+        </p:txBody>
+      </p:sp>
+      <p:sp>
+        <p:nvSpPr>
+          <p:cNvPr id="14" name="Rounded Rectangle 13"/>
+          <p:cNvSpPr/>
+          <p:nvPr/>
+        </p:nvSpPr>
+        <p:spPr>
+          <a:xfrm>
+            <a:off x="6281928" y="3447288"/>
+            <a:ext cx="2926080" cy="219456"/>
+          </a:xfrm>
+          <a:prstGeom prst="roundRect">
+            <a:avLst/>
+          </a:prstGeom>
+          <a:solidFill>
+            <a:srgbClr val="10B981"/>
+          </a:solidFill>
+          <a:ln>
+            <a:noFill/>
+          </a:ln>
+        </p:spPr>
+        <p:style>
+          <a:lnRef idx="1">
+            <a:schemeClr val="accent1"/>
+          </a:lnRef>
+          <a:fillRef idx="3">
+            <a:schemeClr val="accent1"/>
+          </a:fillRef>
+          <a:effectRef idx="2">
+            <a:schemeClr val="accent1"/>
+          </a:effectRef>
+          <a:fontRef idx="minor">
+            <a:schemeClr val="lt1"/>
+          </a:fontRef>
+        </p:style>
+        <p:txBody>
+          <a:bodyPr rtlCol="0" anchor="ctr" wrap="none" lIns="0" tIns="0" rIns="0" bIns="0"/>
+          <a:lstStyle/>
+          <a:p>
+            <a:pPr algn="ctr">
+              <a:defRPr sz="800" b="1">
+                <a:solidFill>
+                  <a:srgbClr val="FFFFFF"/>
+                </a:solidFill>
+              </a:defRPr>
+            </a:pPr>
+            <a:r>
+              <a:t>ECONOMIC &amp; FINANCIAL FEASIBILITY</a:t>
+            </a:r>
+          </a:p>
+        </p:txBody>
+      </p:sp>
+      <p:sp>
+        <p:nvSpPr>
+          <p:cNvPr id="15" name="TextBox 14"/>
+          <p:cNvSpPr txBox="1"/>
+          <p:nvPr/>
+        </p:nvSpPr>
+        <p:spPr>
+          <a:xfrm>
+            <a:off x="6281928" y="3721608"/>
+            <a:ext cx="5029200" cy="1463040"/>
+          </a:xfrm>
+          <a:prstGeom prst="rect">
+            <a:avLst/>
+          </a:prstGeom>
+          <a:noFill/>
+        </p:spPr>
+        <p:txBody>
+          <a:bodyPr wrap="square" lIns="0" rIns="0" tIns="0" bIns="0">
+            <a:spAutoFit/>
+          </a:bodyPr>
+          <a:lstStyle/>
+          <a:p>
+            <a:pPr>
+              <a:spcAft>
+                <a:spcPts val="300"/>
+              </a:spcAft>
+            </a:pPr>
+            <a:r>
+              <a:rPr b="1" sz="850">
+                <a:solidFill>
+                  <a:srgbClr val="0B1220"/>
+                </a:solidFill>
+              </a:rPr>
+              <a:t>• Ultra-Low Cost per Transformation: </a:t>
+            </a:r>
+            <a:r>
+              <a:rPr sz="800">
+                <a:solidFill>
+                  <a:srgbClr val="475569"/>
+                </a:solidFill>
+              </a:rPr>
+              <a:t>Groq / Gemini Flash costs &lt; ₹0.25 per 7-deliverable run; local air-gapped runs cost ₹0.00 in API fees.</a:t>
+            </a:r>
+          </a:p>
+          <a:p>
+            <a:pPr>
+              <a:spcAft>
+                <a:spcPts val="300"/>
+              </a:spcAft>
+            </a:pPr>
+            <a:r>
+              <a:rPr b="1" sz="850">
+                <a:solidFill>
+                  <a:srgbClr val="0B1220"/>
+                </a:solidFill>
+              </a:rPr>
+              <a:t>• Zero External Vector DB Fees: </a:t>
+            </a:r>
+            <a:r>
+              <a:rPr sz="800">
+                <a:solidFill>
+                  <a:srgbClr val="475569"/>
+                </a:solidFill>
+              </a:rPr>
+              <a:t>Native pgvector inside PostgreSQL 16 eliminates costly third-party Pinecone/Weaviate subscriptions.</a:t>
+            </a:r>
+          </a:p>
+          <a:p>
+            <a:pPr>
+              <a:spcAft>
+                <a:spcPts val="300"/>
+              </a:spcAft>
+            </a:pPr>
+            <a:r>
+              <a:rPr b="1" sz="850">
+                <a:solidFill>
+                  <a:srgbClr val="0B1220"/>
+                </a:solidFill>
+              </a:rPr>
+              <a:t>• Massive 98%+ Operational ROI: </a:t>
+            </a:r>
+            <a:r>
+              <a:rPr sz="800">
+                <a:solidFill>
+                  <a:srgbClr val="475569"/>
+                </a:solidFill>
+              </a:rPr>
+              <a:t>Replaces 4–6+ hours of human specialist synthesis with &lt;25s automated execution.</a:t>
+            </a:r>
+          </a:p>
+        </p:txBody>
+      </p:sp>
+      <p:sp>
+        <p:nvSpPr>
+          <p:cNvPr id="16" name="Rounded Rectangle 15"/>
+          <p:cNvSpPr/>
+          <p:nvPr/>
+        </p:nvSpPr>
+        <p:spPr>
+          <a:xfrm>
+            <a:off x="731520" y="5440680"/>
+            <a:ext cx="10728655" cy="1143000"/>
+          </a:xfrm>
+          <a:prstGeom prst="roundRect">
+            <a:avLst/>
+          </a:prstGeom>
+          <a:solidFill>
+            <a:srgbClr val="FFFFFF"/>
+          </a:solidFill>
+          <a:ln w="15240">
+            <a:solidFill>
+              <a:srgbClr val="E2E8F0"/>
+            </a:solidFill>
+          </a:ln>
+        </p:spPr>
+        <p:style>
+          <a:lnRef idx="1">
+            <a:schemeClr val="accent1"/>
+          </a:lnRef>
+          <a:fillRef idx="3">
+            <a:schemeClr val="accent1"/>
+          </a:fillRef>
+          <a:effectRef idx="2">
+            <a:schemeClr val="accent1"/>
+          </a:effectRef>
+          <a:fontRef idx="minor">
+            <a:schemeClr val="lt1"/>
+          </a:fontRef>
+        </p:style>
+        <p:txBody>
+          <a:bodyPr rtlCol="0" anchor="ctr"/>
+          <a:lstStyle/>
+          <a:p>
+            <a:pPr algn="ctr"/>
+          </a:p>
+        </p:txBody>
+      </p:sp>
+      <p:sp>
+        <p:nvSpPr>
+          <p:cNvPr id="17" name="Rounded Rectangle 16"/>
+          <p:cNvSpPr/>
+          <p:nvPr/>
+        </p:nvSpPr>
+        <p:spPr>
+          <a:xfrm>
+            <a:off x="868680" y="5285232"/>
+            <a:ext cx="3291840" cy="219456"/>
+          </a:xfrm>
+          <a:prstGeom prst="roundRect">
+            <a:avLst/>
+          </a:prstGeom>
+          <a:solidFill>
+            <a:srgbClr val="0B1220"/>
+          </a:solidFill>
+          <a:ln>
+            <a:noFill/>
+          </a:ln>
+        </p:spPr>
+        <p:style>
+          <a:lnRef idx="1">
+            <a:schemeClr val="accent1"/>
+          </a:lnRef>
+          <a:fillRef idx="3">
+            <a:schemeClr val="accent1"/>
+          </a:fillRef>
+          <a:effectRef idx="2">
+            <a:schemeClr val="accent1"/>
+          </a:effectRef>
+          <a:fontRef idx="minor">
+            <a:schemeClr val="lt1"/>
+          </a:fontRef>
+        </p:style>
+        <p:txBody>
+          <a:bodyPr rtlCol="0" anchor="ctr" wrap="none" lIns="0" tIns="0" rIns="0" bIns="0"/>
+          <a:lstStyle/>
+          <a:p>
+            <a:pPr algn="ctr">
+              <a:defRPr sz="800" b="1">
+                <a:solidFill>
+                  <a:srgbClr val="FFFFFF"/>
+                </a:solidFill>
+              </a:defRPr>
+            </a:pPr>
+            <a:r>
+              <a:t>SECURITY &amp; OPERATIONAL RISK MITIGATION MATRIX</a:t>
+            </a:r>
+          </a:p>
+        </p:txBody>
+      </p:sp>
+      <p:graphicFrame>
+        <p:nvGraphicFramePr>
+          <p:cNvPr id="18" name="Table 17"/>
+          <p:cNvGraphicFramePr>
+            <a:graphicFrameLocks noGrp="1"/>
+          </p:cNvGraphicFramePr>
+          <p:nvPr/>
+        </p:nvGraphicFramePr>
+        <p:xfrm>
+          <a:off x="822960" y="5559552"/>
+          <a:ext cx="10515600" cy="914400"/>
+        </p:xfrm>
+        <a:graphic>
+          <a:graphicData uri="http://schemas.openxmlformats.org/drawingml/2006/table">
+            <a:tbl>
+              <a:tblPr firstRow="1" bandRow="1">
+                <a:tableStyleId>{5C22544A-7EE6-4342-B048-85BDC9FD1C3A}</a:tableStyleId>
+              </a:tblPr>
+              <a:tblGrid>
+                <a:gridCol w="2103120"/>
+                <a:gridCol w="2103120"/>
+                <a:gridCol w="6309360"/>
+              </a:tblGrid>
+              <a:tr h="182880">
+                <a:tc>
+                  <a:txBody>
+                    <a:bodyPr wrap="square"/>
+                    <a:lstStyle/>
+                    <a:p>
+                      <a:pPr algn="ctr">
+                        <a:defRPr sz="800" b="1">
+                          <a:solidFill>
+                            <a:srgbClr val="FFFFFF"/>
+                          </a:solidFill>
+                        </a:defRPr>
+                      </a:pPr>
+                      <a:r>
+                        <a:t>Potential Risk Factor</a:t>
+                      </a:r>
+                    </a:p>
+                  </a:txBody>
+                  <a:tcPr anchor="ctr" marL="73152" marR="73152" marT="45720" marB="45720">
+                    <a:solidFill>
+                      <a:srgbClr val="0B1220"/>
+                    </a:solidFill>
+                  </a:tcPr>
+                </a:tc>
+                <a:tc>
+                  <a:txBody>
+                    <a:bodyPr wrap="square"/>
+                    <a:lstStyle/>
+                    <a:p>
+                      <a:pPr algn="ctr">
+                        <a:defRPr sz="800" b="1">
+                          <a:solidFill>
+                            <a:srgbClr val="FFFFFF"/>
+                          </a:solidFill>
+                        </a:defRPr>
+                      </a:pPr>
+                      <a:r>
+                        <a:t>System Vulnerability</a:t>
+                      </a:r>
+                    </a:p>
+                  </a:txBody>
+                  <a:tcPr anchor="ctr" marL="73152" marR="73152" marT="45720" marB="45720">
+                    <a:solidFill>
+                      <a:srgbClr val="0B1220"/>
+                    </a:solidFill>
+                  </a:tcPr>
+                </a:tc>
+                <a:tc>
+                  <a:txBody>
+                    <a:bodyPr wrap="square"/>
+                    <a:lstStyle/>
+                    <a:p>
+                      <a:pPr algn="ctr">
+                        <a:defRPr sz="800" b="1">
+                          <a:solidFill>
+                            <a:srgbClr val="FFFFFF"/>
+                          </a:solidFill>
+                        </a:defRPr>
+                      </a:pPr>
+                      <a:r>
+                        <a:t>KaryaSetu Concrete Mitigation Strategy</a:t>
+                      </a:r>
+                    </a:p>
+                  </a:txBody>
+                  <a:tcPr anchor="ctr" marL="73152" marR="73152" marT="45720" marB="45720">
+                    <a:solidFill>
+                      <a:srgbClr val="0B1220"/>
+                    </a:solidFill>
+                  </a:tcPr>
+                </a:tc>
+              </a:tr>
+              <a:tr h="182880">
+                <a:tc>
+                  <a:txBody>
+                    <a:bodyPr wrap="square"/>
+                    <a:lstStyle/>
+                    <a:p>
+                      <a:pPr algn="l">
+                        <a:defRPr sz="750" b="1">
+                          <a:solidFill>
+                            <a:srgbClr val="E11D48"/>
+                          </a:solidFill>
+                        </a:defRPr>
+                      </a:pPr>
+                      <a:r>
+                        <a:t>Prompt Injection &amp; Hijacking</a:t>
+                      </a:r>
+                    </a:p>
+                  </a:txBody>
+                  <a:tcPr anchor="ctr" marL="73152" marR="73152" marT="45720" marB="45720">
+                    <a:solidFill>
+                      <a:srgbClr val="F8FAFC"/>
+                    </a:solidFill>
+                  </a:tcPr>
+                </a:tc>
+                <a:tc>
+                  <a:txBody>
+                    <a:bodyPr wrap="square"/>
+                    <a:lstStyle/>
+                    <a:p>
+                      <a:pPr algn="l">
+                        <a:defRPr sz="750" b="0">
+                          <a:solidFill>
+                            <a:srgbClr val="475569"/>
+                          </a:solidFill>
+                        </a:defRPr>
+                      </a:pPr>
+                      <a:r>
+                        <a:t>Embedded commands inside untrusted files</a:t>
+                      </a:r>
+                    </a:p>
+                  </a:txBody>
+                  <a:tcPr anchor="ctr" marL="73152" marR="73152" marT="45720" marB="45720">
+                    <a:solidFill>
+                      <a:srgbClr val="F8FAFC"/>
+                    </a:solidFill>
+                  </a:tcPr>
+                </a:tc>
+                <a:tc>
+                  <a:txBody>
+                    <a:bodyPr wrap="square"/>
+                    <a:lstStyle/>
+                    <a:p>
+                      <a:pPr algn="l">
+                        <a:defRPr sz="750" b="0">
+                          <a:solidFill>
+                            <a:srgbClr val="0F172A"/>
+                          </a:solidFill>
+                        </a:defRPr>
+                      </a:pPr>
+                      <a:r>
+                        <a:t>Strict delimiter encapsulation (&lt;source_data&gt;), tag neutralization, and input size clamping.</a:t>
+                      </a:r>
+                    </a:p>
+                  </a:txBody>
+                  <a:tcPr anchor="ctr" marL="73152" marR="73152" marT="45720" marB="45720">
+                    <a:solidFill>
+                      <a:srgbClr val="F8FAFC"/>
+                    </a:solidFill>
+                  </a:tcPr>
+                </a:tc>
+              </a:tr>
+              <a:tr h="182880">
+                <a:tc>
+                  <a:txBody>
+                    <a:bodyPr wrap="square"/>
+                    <a:lstStyle/>
+                    <a:p>
+                      <a:pPr algn="l">
+                        <a:defRPr sz="750" b="1">
+                          <a:solidFill>
+                            <a:srgbClr val="E11D48"/>
+                          </a:solidFill>
+                        </a:defRPr>
+                      </a:pPr>
+                      <a:r>
+                        <a:t>Factual Hallucination &amp; Drift</a:t>
+                      </a:r>
+                    </a:p>
+                  </a:txBody>
+                  <a:tcPr anchor="ctr" marL="73152" marR="73152" marT="45720" marB="45720">
+                    <a:solidFill>
+                      <a:srgbClr val="FFFFFF"/>
+                    </a:solidFill>
+                  </a:tcPr>
+                </a:tc>
+                <a:tc>
+                  <a:txBody>
+                    <a:bodyPr wrap="square"/>
+                    <a:lstStyle/>
+                    <a:p>
+                      <a:pPr algn="l">
+                        <a:defRPr sz="750" b="0">
+                          <a:solidFill>
+                            <a:srgbClr val="475569"/>
+                          </a:solidFill>
+                        </a:defRPr>
+                      </a:pPr>
+                      <a:r>
+                        <a:t>Generators invent numbers/entities</a:t>
+                      </a:r>
+                    </a:p>
+                  </a:txBody>
+                  <a:tcPr anchor="ctr" marL="73152" marR="73152" marT="45720" marB="45720">
+                    <a:solidFill>
+                      <a:srgbClr val="FFFFFF"/>
+                    </a:solidFill>
+                  </a:tcPr>
+                </a:tc>
+                <a:tc>
+                  <a:txBody>
+                    <a:bodyPr wrap="square"/>
+                    <a:lstStyle/>
+                    <a:p>
+                      <a:pPr algn="l">
+                        <a:defRPr sz="750" b="0">
+                          <a:solidFill>
+                            <a:srgbClr val="0F172A"/>
+                          </a:solidFill>
+                        </a:defRPr>
+                      </a:pPr>
+                      <a:r>
+                        <a:t>pgvector chunk-level citation anchoring + automated NLI entailment cross-verification.</a:t>
+                      </a:r>
+                    </a:p>
+                  </a:txBody>
+                  <a:tcPr anchor="ctr" marL="73152" marR="73152" marT="45720" marB="45720">
+                    <a:solidFill>
+                      <a:srgbClr val="FFFFFF"/>
+                    </a:solidFill>
+                  </a:tcPr>
+                </a:tc>
+              </a:tr>
+              <a:tr h="182880">
+                <a:tc>
+                  <a:txBody>
+                    <a:bodyPr wrap="square"/>
+                    <a:lstStyle/>
+                    <a:p>
+                      <a:pPr algn="l">
+                        <a:defRPr sz="750" b="1">
+                          <a:solidFill>
+                            <a:srgbClr val="E11D48"/>
+                          </a:solidFill>
+                        </a:defRPr>
+                      </a:pPr>
+                      <a:r>
+                        <a:t>Confidential Data Exfiltration</a:t>
+                      </a:r>
+                    </a:p>
+                  </a:txBody>
+                  <a:tcPr anchor="ctr" marL="73152" marR="73152" marT="45720" marB="45720">
+                    <a:solidFill>
+                      <a:srgbClr val="F8FAFC"/>
+                    </a:solidFill>
+                  </a:tcPr>
+                </a:tc>
+                <a:tc>
+                  <a:txBody>
+                    <a:bodyPr wrap="square"/>
+                    <a:lstStyle/>
+                    <a:p>
+                      <a:pPr algn="l">
+                        <a:defRPr sz="750" b="0">
+                          <a:solidFill>
+                            <a:srgbClr val="475569"/>
+                          </a:solidFill>
+                        </a:defRPr>
+                      </a:pPr>
+                      <a:r>
+                        <a:t>Sensitive data egress to public cloud</a:t>
+                      </a:r>
+                    </a:p>
+                  </a:txBody>
+                  <a:tcPr anchor="ctr" marL="73152" marR="73152" marT="45720" marB="45720">
+                    <a:solidFill>
+                      <a:srgbClr val="F8FAFC"/>
+                    </a:solidFill>
+                  </a:tcPr>
+                </a:tc>
+                <a:tc>
+                  <a:txBody>
+                    <a:bodyPr wrap="square"/>
+                    <a:lstStyle/>
+                    <a:p>
+                      <a:pPr algn="l">
+                        <a:defRPr sz="750" b="0">
+                          <a:solidFill>
+                            <a:srgbClr val="0F172A"/>
+                          </a:solidFill>
+                        </a:defRPr>
+                      </a:pPr>
+                      <a:r>
+                        <a:t>Deterministic Python policy gate (zero LLM discretion); fails closed with HTTP 403 Forbidden.</a:t>
+                      </a:r>
+                    </a:p>
+                  </a:txBody>
+                  <a:tcPr anchor="ctr" marL="73152" marR="73152" marT="45720" marB="45720">
+                    <a:solidFill>
+                      <a:srgbClr val="F8FAFC"/>
+                    </a:solidFill>
+                  </a:tcPr>
+                </a:tc>
+              </a:tr>
+              <a:tr h="182880">
+                <a:tc>
+                  <a:txBody>
+                    <a:bodyPr wrap="square"/>
+                    <a:lstStyle/>
+                    <a:p>
+                      <a:pPr algn="l">
+                        <a:defRPr sz="750" b="1">
+                          <a:solidFill>
+                            <a:srgbClr val="E11D48"/>
+                          </a:solidFill>
+                        </a:defRPr>
+                      </a:pPr>
+                      <a:r>
+                        <a:t>Post-Generation Deliverable Tamper</a:t>
+                      </a:r>
+                    </a:p>
+                  </a:txBody>
+                  <a:tcPr anchor="ctr" marL="73152" marR="73152" marT="45720" marB="45720">
+                    <a:solidFill>
+                      <a:srgbClr val="FFFFFF"/>
+                    </a:solidFill>
+                  </a:tcPr>
+                </a:tc>
+                <a:tc>
+                  <a:txBody>
+                    <a:bodyPr wrap="square"/>
+                    <a:lstStyle/>
+                    <a:p>
+                      <a:pPr algn="l">
+                        <a:defRPr sz="750" b="0">
+                          <a:solidFill>
+                            <a:srgbClr val="475569"/>
+                          </a:solidFill>
+                        </a:defRPr>
+                      </a:pPr>
+                      <a:r>
+                        <a:t>Unauthorized document alteration</a:t>
+                      </a:r>
+                    </a:p>
+                  </a:txBody>
+                  <a:tcPr anchor="ctr" marL="73152" marR="73152" marT="45720" marB="45720">
+                    <a:solidFill>
+                      <a:srgbClr val="FFFFFF"/>
+                    </a:solidFill>
+                  </a:tcPr>
+                </a:tc>
+                <a:tc>
+                  <a:txBody>
+                    <a:bodyPr wrap="square"/>
+                    <a:lstStyle/>
+                    <a:p>
+                      <a:pPr algn="l">
+                        <a:defRPr sz="750" b="0">
+                          <a:solidFill>
+                            <a:srgbClr val="0F172A"/>
+                          </a:solidFill>
+                        </a:defRPr>
+                      </a:pPr>
+                      <a:r>
+                        <a:t>Immutable SHA-256 hash anchored to Ethereum Sepolia smart contract + Ed25519 signature.</a:t>
+                      </a:r>
+                    </a:p>
+                  </a:txBody>
+                  <a:tcPr anchor="ctr" marL="73152" marR="73152" marT="45720" marB="45720">
+                    <a:solidFill>
+                      <a:srgbClr val="FFFFFF"/>
+                    </a:solidFill>
+                  </a:tcPr>
+                </a:tc>
+              </a:tr>
+            </a:tbl>
+          </a:graphicData>
+        </a:graphic>
+      </p:graphicFrame>
     </p:spTree>
   </p:cSld>
   <p:clrMapOvr>
@@ -6060,75 +9099,23 @@
       <p:grpSpPr/>
       <p:sp>
         <p:nvSpPr>
-          <p:cNvPr id="2" name="TextBox 1"/>
-          <p:cNvSpPr txBox="1"/>
-          <p:nvPr/>
-        </p:nvSpPr>
-        <p:spPr>
-          <a:xfrm>
-            <a:off x="731520" y="365760"/>
-            <a:ext cx="10728655" cy="1005840"/>
+          <p:cNvPr id="2" name="Rectangle 1"/>
+          <p:cNvSpPr/>
+          <p:nvPr/>
+        </p:nvSpPr>
+        <p:spPr>
+          <a:xfrm>
+            <a:off x="0" y="0"/>
+            <a:ext cx="12191695" cy="6858000"/>
           </a:xfrm>
           <a:prstGeom prst="rect">
-            <a:avLst/>
-          </a:prstGeom>
-          <a:noFill/>
-        </p:spPr>
-        <p:txBody>
-          <a:bodyPr wrap="square" lIns="0" tIns="0" rIns="0" bIns="0">
-            <a:spAutoFit/>
-          </a:bodyPr>
-          <a:lstStyle/>
-          <a:p>
-            <a:pPr>
-              <a:spcAft>
-                <a:spcPts val="200"/>
-              </a:spcAft>
-              <a:defRPr sz="1000" b="1">
-                <a:solidFill>
-                  <a:srgbClr val="0284C7"/>
-                </a:solidFill>
-              </a:defRPr>
-            </a:pPr>
-            <a:r>
-              <a:t>SIH 26154 • BLOCKCHAIN &amp; CYBERSECURITY</a:t>
-            </a:r>
-          </a:p>
-          <a:p>
-            <a:pPr>
-              <a:defRPr sz="2600" b="1">
-                <a:solidFill>
-                  <a:srgbClr val="0F172A"/>
-                </a:solidFill>
-              </a:defRPr>
-            </a:pPr>
-            <a:r>
-              <a:t>IMPACT, DEPLOYMENT &amp; STRATEGIC EXTENSIBILITY</a:t>
-            </a:r>
-          </a:p>
-        </p:txBody>
-      </p:sp>
-      <p:sp>
-        <p:nvSpPr>
-          <p:cNvPr id="3" name="Rounded Rectangle 2"/>
-          <p:cNvSpPr/>
-          <p:nvPr/>
-        </p:nvSpPr>
-        <p:spPr>
-          <a:xfrm>
-            <a:off x="731520" y="1463040"/>
-            <a:ext cx="5257800" cy="4892040"/>
-          </a:xfrm>
-          <a:prstGeom prst="roundRect">
             <a:avLst/>
           </a:prstGeom>
           <a:solidFill>
             <a:srgbClr val="F8FAFC"/>
           </a:solidFill>
-          <a:ln w="19050">
-            <a:solidFill>
-              <a:srgbClr val="CBD5E1"/>
-            </a:solidFill>
+          <a:ln>
+            <a:noFill/>
           </a:ln>
         </p:spPr>
         <p:style>
@@ -6155,14 +9142,14 @@
       </p:sp>
       <p:sp>
         <p:nvSpPr>
-          <p:cNvPr id="4" name="TextBox 3"/>
+          <p:cNvPr id="3" name="TextBox 2"/>
           <p:cNvSpPr txBox="1"/>
           <p:nvPr/>
         </p:nvSpPr>
         <p:spPr>
           <a:xfrm>
-            <a:off x="868680" y="1600200"/>
-            <a:ext cx="4983480" cy="4572000"/>
+            <a:off x="731520" y="320040"/>
+            <a:ext cx="10728655" cy="960120"/>
           </a:xfrm>
           <a:prstGeom prst="rect">
             <a:avLst/>
@@ -6170,162 +9157,59 @@
           <a:noFill/>
         </p:spPr>
         <p:txBody>
-          <a:bodyPr wrap="square">
+          <a:bodyPr wrap="square" lIns="0" tIns="0" rIns="0" bIns="0">
             <a:spAutoFit/>
           </a:bodyPr>
           <a:lstStyle/>
           <a:p>
             <a:pPr>
               <a:spcAft>
-                <a:spcPts val="1000"/>
+                <a:spcPts val="200"/>
               </a:spcAft>
-              <a:defRPr b="1" sz="1400">
+              <a:defRPr sz="950" b="1">
                 <a:solidFill>
                   <a:srgbClr val="0284C7"/>
                 </a:solidFill>
               </a:defRPr>
             </a:pPr>
             <a:r>
-              <a:t>QUANTIFIABLE INSTITUTIONAL IMPACT</a:t>
+              <a:t>SMART INDIA HACKATHON 2026 • PS ID: SIH 26154 • THEME: BLOCKCHAIN &amp; CYBERSECURITY</a:t>
             </a:r>
           </a:p>
           <a:p>
             <a:pPr>
-              <a:spcAft>
-                <a:spcPts val="800"/>
-              </a:spcAft>
-            </a:pPr>
-            <a:r>
-              <a:rPr b="1" sz="1050">
-                <a:solidFill>
-                  <a:srgbClr val="0F172A"/>
-                </a:solidFill>
-              </a:rPr>
-              <a:t>★ 10x Acceleration in Collateral Synthesis: </a:t>
-            </a:r>
-            <a:r>
-              <a:rPr sz="950">
-                <a:solidFill>
-                  <a:srgbClr val="475569"/>
-                </a:solidFill>
-              </a:rPr>
-              <a:t>Transforms 50+ page policy documents or technical whitepapers into 7 audience-tailored formats in under 60 seconds.</a:t>
-            </a:r>
-          </a:p>
-          <a:p>
-            <a:pPr>
-              <a:spcAft>
-                <a:spcPts val="800"/>
-              </a:spcAft>
-            </a:pPr>
-            <a:r>
-              <a:rPr b="1" sz="1050">
-                <a:solidFill>
-                  <a:srgbClr val="0F172A"/>
-                </a:solidFill>
-              </a:rPr>
-              <a:t>★ Zero Cloud Leakage Guarantee: </a:t>
-            </a:r>
-            <a:r>
-              <a:rPr sz="950">
-                <a:solidFill>
-                  <a:srgbClr val="475569"/>
-                </a:solidFill>
-              </a:rPr>
-              <a:t>Rigid deterministic policy enforcement prevents confidential national or institutional intelligence from leaving sovereign infrastructure.</a:t>
-            </a:r>
-          </a:p>
-          <a:p>
-            <a:pPr>
-              <a:spcAft>
-                <a:spcPts val="800"/>
-              </a:spcAft>
-            </a:pPr>
-            <a:r>
-              <a:rPr b="1" sz="1050">
-                <a:solidFill>
-                  <a:srgbClr val="0F172A"/>
-                </a:solidFill>
-              </a:rPr>
-              <a:t>★ Elimination of Multi-Channel Drift: </a:t>
-            </a:r>
-            <a:r>
-              <a:rPr sz="950">
-                <a:solidFill>
-                  <a:srgbClr val="475569"/>
-                </a:solidFill>
-              </a:rPr>
-              <a:t>All outputs ground to a single canonical brief, ensuring quantitative metrics remain perfectly aligned across social, executive, and public channels.</a:t>
-            </a:r>
-          </a:p>
-          <a:p>
-            <a:pPr>
-              <a:spcAft>
-                <a:spcPts val="800"/>
-              </a:spcAft>
-            </a:pPr>
-            <a:r>
-              <a:rPr b="1" sz="1050">
-                <a:solidFill>
-                  <a:srgbClr val="0F172A"/>
-                </a:solidFill>
-              </a:rPr>
-              <a:t>★ Complete Auditability &amp; Non-Repudiation: </a:t>
-            </a:r>
-            <a:r>
-              <a:rPr sz="950">
-                <a:solidFill>
-                  <a:srgbClr val="475569"/>
-                </a:solidFill>
-              </a:rPr>
-              <a:t>Every artifact is sealed with SHA-256 digests and Ed25519 signatures, creating an unforgeable evidentiary chain.</a:t>
-            </a:r>
-          </a:p>
-          <a:p>
-            <a:pPr>
-              <a:spcAft>
-                <a:spcPts val="800"/>
-              </a:spcAft>
-            </a:pPr>
-            <a:r>
-              <a:rPr b="1" sz="1050">
-                <a:solidFill>
-                  <a:srgbClr val="0F172A"/>
-                </a:solidFill>
-              </a:rPr>
-              <a:t>★ Drastic Reduction in Human Workload: </a:t>
-            </a:r>
-            <a:r>
-              <a:rPr sz="950">
-                <a:solidFill>
-                  <a:srgbClr val="475569"/>
-                </a:solidFill>
-              </a:rPr>
-              <a:t>Automates repetitive document rewriting, slide formatting, infographic structure, and script generation while keeping human review at the release gate.</a:t>
-            </a:r>
-          </a:p>
-        </p:txBody>
-      </p:sp>
-      <p:sp>
-        <p:nvSpPr>
-          <p:cNvPr id="5" name="Rounded Rectangle 4"/>
+              <a:defRPr sz="2200" b="1">
+                <a:solidFill>
+                  <a:srgbClr val="0B1220"/>
+                </a:solidFill>
+              </a:defRPr>
+            </a:pPr>
+            <a:r>
+              <a:t>INSTITUTIONAL IMPACT, COST STRUCTURE &amp; VERIFIABLE PROOF</a:t>
+            </a:r>
+          </a:p>
+        </p:txBody>
+      </p:sp>
+      <p:sp>
+        <p:nvSpPr>
+          <p:cNvPr id="4" name="Rounded Rectangle 3"/>
           <p:cNvSpPr/>
           <p:nvPr/>
         </p:nvSpPr>
         <p:spPr>
           <a:xfrm>
-            <a:off x="6217920" y="1463040"/>
-            <a:ext cx="5257800" cy="2331720"/>
+            <a:off x="731520" y="1325880"/>
+            <a:ext cx="5669280" cy="5120640"/>
           </a:xfrm>
           <a:prstGeom prst="roundRect">
             <a:avLst/>
           </a:prstGeom>
           <a:solidFill>
-            <a:srgbClr val="F0FDFA"/>
+            <a:srgbClr val="FFFFFF"/>
           </a:solidFill>
-          <a:ln w="19050">
+          <a:ln w="15240">
             <a:solidFill>
-              <a:srgbClr val="0D9488"/>
+              <a:srgbClr val="E2E8F0"/>
             </a:solidFill>
           </a:ln>
         </p:spPr>
@@ -6353,132 +9237,23 @@
       </p:sp>
       <p:sp>
         <p:nvSpPr>
-          <p:cNvPr id="6" name="TextBox 5"/>
-          <p:cNvSpPr txBox="1"/>
-          <p:nvPr/>
-        </p:nvSpPr>
-        <p:spPr>
-          <a:xfrm>
-            <a:off x="6355080" y="1572768"/>
-            <a:ext cx="4983480" cy="2148840"/>
-          </a:xfrm>
-          <a:prstGeom prst="rect">
-            <a:avLst/>
-          </a:prstGeom>
-          <a:noFill/>
-        </p:spPr>
-        <p:txBody>
-          <a:bodyPr wrap="square">
-            <a:spAutoFit/>
-          </a:bodyPr>
-          <a:lstStyle/>
-          <a:p>
-            <a:pPr>
-              <a:spcAft>
-                <a:spcPts val="600"/>
-              </a:spcAft>
-              <a:defRPr b="1" sz="1300">
-                <a:solidFill>
-                  <a:srgbClr val="0D9488"/>
-                </a:solidFill>
-              </a:defRPr>
-            </a:pPr>
-            <a:r>
-              <a:t>DEPLOYMENT ARCHITECTURE &amp; ENVIRONMENTS</a:t>
-            </a:r>
-          </a:p>
-          <a:p>
-            <a:pPr>
-              <a:spcAft>
-                <a:spcPts val="400"/>
-              </a:spcAft>
-            </a:pPr>
-            <a:r>
-              <a:rPr b="1" sz="950">
-                <a:solidFill>
-                  <a:srgbClr val="0F172A"/>
-                </a:solidFill>
-              </a:rPr>
-              <a:t>• Hybrid Cloud Deployment: </a:t>
-            </a:r>
-            <a:r>
-              <a:rPr sz="900">
-                <a:solidFill>
-                  <a:srgbClr val="475569"/>
-                </a:solidFill>
-              </a:rPr>
-              <a:t>FastAPI backend + Next.js frontend deployed on cloud infrastructure using Gemini 2.5 Flash for public institutional transformation.</a:t>
-            </a:r>
-          </a:p>
-          <a:p>
-            <a:pPr>
-              <a:spcAft>
-                <a:spcPts val="400"/>
-              </a:spcAft>
-            </a:pPr>
-            <a:r>
-              <a:rPr b="1" sz="950">
-                <a:solidFill>
-                  <a:srgbClr val="0F172A"/>
-                </a:solidFill>
-              </a:rPr>
-              <a:t>• On-Premise / Air-Gapped Deployment: </a:t>
-            </a:r>
-            <a:r>
-              <a:rPr sz="900">
-                <a:solidFill>
-                  <a:srgbClr val="475569"/>
-                </a:solidFill>
-              </a:rPr>
-              <a:t>Self-contained Docker Compose stack with local Ollama/vLLM endpoints (Gemma 3 12B) and local ClamAV scanning for sensitive environments.</a:t>
-            </a:r>
-          </a:p>
-          <a:p>
-            <a:pPr>
-              <a:spcAft>
-                <a:spcPts val="400"/>
-              </a:spcAft>
-            </a:pPr>
-            <a:r>
-              <a:rPr b="1" sz="950">
-                <a:solidFill>
-                  <a:srgbClr val="0F172A"/>
-                </a:solidFill>
-              </a:rPr>
-              <a:t>• Stateless Worker Scalability: </a:t>
-            </a:r>
-            <a:r>
-              <a:rPr sz="900">
-                <a:solidFill>
-                  <a:srgbClr val="475569"/>
-                </a:solidFill>
-              </a:rPr>
-              <a:t>Horizontal RQ workers consume Redis transformation queues independently with database-level concurrency locking.</a:t>
-            </a:r>
-          </a:p>
-        </p:txBody>
-      </p:sp>
-      <p:sp>
-        <p:nvSpPr>
-          <p:cNvPr id="7" name="Rounded Rectangle 6"/>
+          <p:cNvPr id="5" name="Rounded Rectangle 4"/>
           <p:cNvSpPr/>
           <p:nvPr/>
         </p:nvSpPr>
         <p:spPr>
           <a:xfrm>
-            <a:off x="6217920" y="4023360"/>
-            <a:ext cx="5257800" cy="2331720"/>
+            <a:off x="868680" y="1444752"/>
+            <a:ext cx="3840480" cy="237744"/>
           </a:xfrm>
           <a:prstGeom prst="roundRect">
             <a:avLst/>
           </a:prstGeom>
           <a:solidFill>
-            <a:srgbClr val="FAF5FF"/>
+            <a:srgbClr val="10B981"/>
           </a:solidFill>
-          <a:ln w="19050">
-            <a:solidFill>
-              <a:srgbClr val="7C3AED"/>
-            </a:solidFill>
+          <a:ln>
+            <a:noFill/>
           </a:ln>
         </p:spPr>
         <p:style>
@@ -6496,23 +9271,812 @@
           </a:fontRef>
         </p:style>
         <p:txBody>
-          <a:bodyPr rtlCol="0" anchor="ctr"/>
-          <a:lstStyle/>
-          <a:p>
-            <a:pPr algn="ctr"/>
-          </a:p>
-        </p:txBody>
-      </p:sp>
-      <p:sp>
-        <p:nvSpPr>
-          <p:cNvPr id="8" name="TextBox 7"/>
+          <a:bodyPr rtlCol="0" anchor="ctr" wrap="none" lIns="0" tIns="0" rIns="0" bIns="0"/>
+          <a:lstStyle/>
+          <a:p>
+            <a:pPr algn="ctr">
+              <a:defRPr sz="850" b="1">
+                <a:solidFill>
+                  <a:srgbClr val="FFFFFF"/>
+                </a:solidFill>
+              </a:defRPr>
+            </a:pPr>
+            <a:r>
+              <a:t>ECONOMIC VIABILITY &amp; OPERATIONAL COST BREAKDOWN</a:t>
+            </a:r>
+          </a:p>
+        </p:txBody>
+      </p:sp>
+      <p:graphicFrame>
+        <p:nvGraphicFramePr>
+          <p:cNvPr id="6" name="Table 5"/>
+          <p:cNvGraphicFramePr>
+            <a:graphicFrameLocks noGrp="1"/>
+          </p:cNvGraphicFramePr>
+          <p:nvPr/>
+        </p:nvGraphicFramePr>
+        <p:xfrm>
+          <a:off x="841248" y="1783080"/>
+          <a:ext cx="5440680" cy="3108960"/>
+        </p:xfrm>
+        <a:graphic>
+          <a:graphicData uri="http://schemas.openxmlformats.org/drawingml/2006/table">
+            <a:tbl>
+              <a:tblPr firstRow="1" bandRow="1">
+                <a:tableStyleId>{5C22544A-7EE6-4342-B048-85BDC9FD1C3A}</a:tableStyleId>
+              </a:tblPr>
+              <a:tblGrid>
+                <a:gridCol w="1508760"/>
+                <a:gridCol w="1280160"/>
+                <a:gridCol w="1188720"/>
+                <a:gridCol w="1463040"/>
+              </a:tblGrid>
+              <a:tr h="388620">
+                <a:tc>
+                  <a:txBody>
+                    <a:bodyPr wrap="square"/>
+                    <a:lstStyle/>
+                    <a:p>
+                      <a:pPr algn="ctr">
+                        <a:defRPr sz="780" b="1">
+                          <a:solidFill>
+                            <a:srgbClr val="FFFFFF"/>
+                          </a:solidFill>
+                        </a:defRPr>
+                      </a:pPr>
+                      <a:r>
+                        <a:t>Platform Component</a:t>
+                      </a:r>
+                    </a:p>
+                  </a:txBody>
+                  <a:tcPr anchor="ctr" marL="73152" marR="73152" marT="45720" marB="45720">
+                    <a:solidFill>
+                      <a:srgbClr val="0B1220"/>
+                    </a:solidFill>
+                  </a:tcPr>
+                </a:tc>
+                <a:tc>
+                  <a:txBody>
+                    <a:bodyPr wrap="square"/>
+                    <a:lstStyle/>
+                    <a:p>
+                      <a:pPr algn="ctr">
+                        <a:defRPr sz="780" b="1">
+                          <a:solidFill>
+                            <a:srgbClr val="FFFFFF"/>
+                          </a:solidFill>
+                        </a:defRPr>
+                      </a:pPr>
+                      <a:r>
+                        <a:t>Unit / Monthly Cost</a:t>
+                      </a:r>
+                    </a:p>
+                  </a:txBody>
+                  <a:tcPr anchor="ctr" marL="73152" marR="73152" marT="45720" marB="45720">
+                    <a:solidFill>
+                      <a:srgbClr val="0B1220"/>
+                    </a:solidFill>
+                  </a:tcPr>
+                </a:tc>
+                <a:tc>
+                  <a:txBody>
+                    <a:bodyPr wrap="square"/>
+                    <a:lstStyle/>
+                    <a:p>
+                      <a:pPr algn="ctr">
+                        <a:defRPr sz="780" b="1">
+                          <a:solidFill>
+                            <a:srgbClr val="FFFFFF"/>
+                          </a:solidFill>
+                        </a:defRPr>
+                      </a:pPr>
+                      <a:r>
+                        <a:t>Cost / 100 Runs</a:t>
+                      </a:r>
+                    </a:p>
+                  </a:txBody>
+                  <a:tcPr anchor="ctr" marL="73152" marR="73152" marT="45720" marB="45720">
+                    <a:solidFill>
+                      <a:srgbClr val="0B1220"/>
+                    </a:solidFill>
+                  </a:tcPr>
+                </a:tc>
+                <a:tc>
+                  <a:txBody>
+                    <a:bodyPr wrap="square"/>
+                    <a:lstStyle/>
+                    <a:p>
+                      <a:pPr algn="ctr">
+                        <a:defRPr sz="780" b="1">
+                          <a:solidFill>
+                            <a:srgbClr val="FFFFFF"/>
+                          </a:solidFill>
+                        </a:defRPr>
+                      </a:pPr>
+                      <a:r>
+                        <a:t>Operational Notes</a:t>
+                      </a:r>
+                    </a:p>
+                  </a:txBody>
+                  <a:tcPr anchor="ctr" marL="73152" marR="73152" marT="45720" marB="45720">
+                    <a:solidFill>
+                      <a:srgbClr val="0B1220"/>
+                    </a:solidFill>
+                  </a:tcPr>
+                </a:tc>
+              </a:tr>
+              <a:tr h="388620">
+                <a:tc>
+                  <a:txBody>
+                    <a:bodyPr wrap="square"/>
+                    <a:lstStyle/>
+                    <a:p>
+                      <a:pPr algn="l">
+                        <a:defRPr sz="750" b="0">
+                          <a:solidFill>
+                            <a:srgbClr val="0B1220"/>
+                          </a:solidFill>
+                        </a:defRPr>
+                      </a:pPr>
+                      <a:r>
+                        <a:t>Cloud LLM (Public Tier)</a:t>
+                      </a:r>
+                    </a:p>
+                  </a:txBody>
+                  <a:tcPr anchor="ctr" marL="73152" marR="73152" marT="45720" marB="45720">
+                    <a:solidFill>
+                      <a:srgbClr val="FFFFFF"/>
+                    </a:solidFill>
+                  </a:tcPr>
+                </a:tc>
+                <a:tc>
+                  <a:txBody>
+                    <a:bodyPr wrap="square"/>
+                    <a:lstStyle/>
+                    <a:p>
+                      <a:pPr algn="l">
+                        <a:defRPr sz="720" b="0">
+                          <a:solidFill>
+                            <a:srgbClr val="475569"/>
+                          </a:solidFill>
+                        </a:defRPr>
+                      </a:pPr>
+                      <a:r>
+                        <a:t>Groq/Gemini (~$0.08/1M)</a:t>
+                      </a:r>
+                    </a:p>
+                  </a:txBody>
+                  <a:tcPr anchor="ctr" marL="73152" marR="73152" marT="45720" marB="45720">
+                    <a:solidFill>
+                      <a:srgbClr val="FFFFFF"/>
+                    </a:solidFill>
+                  </a:tcPr>
+                </a:tc>
+                <a:tc>
+                  <a:txBody>
+                    <a:bodyPr wrap="square"/>
+                    <a:lstStyle/>
+                    <a:p>
+                      <a:pPr algn="l">
+                        <a:defRPr sz="720" b="0">
+                          <a:solidFill>
+                            <a:srgbClr val="0284C7"/>
+                          </a:solidFill>
+                        </a:defRPr>
+                      </a:pPr>
+                      <a:r>
+                        <a:t>~$0.60 – $1.20</a:t>
+                      </a:r>
+                    </a:p>
+                  </a:txBody>
+                  <a:tcPr anchor="ctr" marL="73152" marR="73152" marT="45720" marB="45720">
+                    <a:solidFill>
+                      <a:srgbClr val="FFFFFF"/>
+                    </a:solidFill>
+                  </a:tcPr>
+                </a:tc>
+                <a:tc>
+                  <a:txBody>
+                    <a:bodyPr wrap="square"/>
+                    <a:lstStyle/>
+                    <a:p>
+                      <a:pPr algn="l">
+                        <a:defRPr sz="720" b="0">
+                          <a:solidFill>
+                            <a:srgbClr val="475569"/>
+                          </a:solidFill>
+                        </a:defRPr>
+                      </a:pPr>
+                      <a:r>
+                        <a:t>Generates all 7 deliverables per doc</a:t>
+                      </a:r>
+                    </a:p>
+                  </a:txBody>
+                  <a:tcPr anchor="ctr" marL="73152" marR="73152" marT="45720" marB="45720">
+                    <a:solidFill>
+                      <a:srgbClr val="FFFFFF"/>
+                    </a:solidFill>
+                  </a:tcPr>
+                </a:tc>
+              </a:tr>
+              <a:tr h="388620">
+                <a:tc>
+                  <a:txBody>
+                    <a:bodyPr wrap="square"/>
+                    <a:lstStyle/>
+                    <a:p>
+                      <a:pPr algn="l">
+                        <a:defRPr sz="750" b="0">
+                          <a:solidFill>
+                            <a:srgbClr val="0B1220"/>
+                          </a:solidFill>
+                        </a:defRPr>
+                      </a:pPr>
+                      <a:r>
+                        <a:t>Air-Gapped LLM (Confidential)</a:t>
+                      </a:r>
+                    </a:p>
+                  </a:txBody>
+                  <a:tcPr anchor="ctr" marL="73152" marR="73152" marT="45720" marB="45720">
+                    <a:solidFill>
+                      <a:srgbClr val="F8FAFC"/>
+                    </a:solidFill>
+                  </a:tcPr>
+                </a:tc>
+                <a:tc>
+                  <a:txBody>
+                    <a:bodyPr wrap="square"/>
+                    <a:lstStyle/>
+                    <a:p>
+                      <a:pPr algn="l">
+                        <a:defRPr sz="720" b="0">
+                          <a:solidFill>
+                            <a:srgbClr val="475569"/>
+                          </a:solidFill>
+                        </a:defRPr>
+                      </a:pPr>
+                      <a:r>
+                        <a:t>Local Gemma 3 12B</a:t>
+                      </a:r>
+                    </a:p>
+                  </a:txBody>
+                  <a:tcPr anchor="ctr" marL="73152" marR="73152" marT="45720" marB="45720">
+                    <a:solidFill>
+                      <a:srgbClr val="F8FAFC"/>
+                    </a:solidFill>
+                  </a:tcPr>
+                </a:tc>
+                <a:tc>
+                  <a:txBody>
+                    <a:bodyPr wrap="square"/>
+                    <a:lstStyle/>
+                    <a:p>
+                      <a:pPr algn="l">
+                        <a:defRPr sz="720" b="0">
+                          <a:solidFill>
+                            <a:srgbClr val="0284C7"/>
+                          </a:solidFill>
+                        </a:defRPr>
+                      </a:pPr>
+                      <a:r>
+                        <a:t>$0.00 (Self-hosted)</a:t>
+                      </a:r>
+                    </a:p>
+                  </a:txBody>
+                  <a:tcPr anchor="ctr" marL="73152" marR="73152" marT="45720" marB="45720">
+                    <a:solidFill>
+                      <a:srgbClr val="F8FAFC"/>
+                    </a:solidFill>
+                  </a:tcPr>
+                </a:tc>
+                <a:tc>
+                  <a:txBody>
+                    <a:bodyPr wrap="square"/>
+                    <a:lstStyle/>
+                    <a:p>
+                      <a:pPr algn="l">
+                        <a:defRPr sz="720" b="0">
+                          <a:solidFill>
+                            <a:srgbClr val="475569"/>
+                          </a:solidFill>
+                        </a:defRPr>
+                      </a:pPr>
+                      <a:r>
+                        <a:t>Runs on existing enterprise GPUs</a:t>
+                      </a:r>
+                    </a:p>
+                  </a:txBody>
+                  <a:tcPr anchor="ctr" marL="73152" marR="73152" marT="45720" marB="45720">
+                    <a:solidFill>
+                      <a:srgbClr val="F8FAFC"/>
+                    </a:solidFill>
+                  </a:tcPr>
+                </a:tc>
+              </a:tr>
+              <a:tr h="388620">
+                <a:tc>
+                  <a:txBody>
+                    <a:bodyPr wrap="square"/>
+                    <a:lstStyle/>
+                    <a:p>
+                      <a:pPr algn="l">
+                        <a:defRPr sz="750" b="0">
+                          <a:solidFill>
+                            <a:srgbClr val="0B1220"/>
+                          </a:solidFill>
+                        </a:defRPr>
+                      </a:pPr>
+                      <a:r>
+                        <a:t>Blockchain Provenance</a:t>
+                      </a:r>
+                    </a:p>
+                  </a:txBody>
+                  <a:tcPr anchor="ctr" marL="73152" marR="73152" marT="45720" marB="45720">
+                    <a:solidFill>
+                      <a:srgbClr val="FFFFFF"/>
+                    </a:solidFill>
+                  </a:tcPr>
+                </a:tc>
+                <a:tc>
+                  <a:txBody>
+                    <a:bodyPr wrap="square"/>
+                    <a:lstStyle/>
+                    <a:p>
+                      <a:pPr algn="l">
+                        <a:defRPr sz="720" b="0">
+                          <a:solidFill>
+                            <a:srgbClr val="475569"/>
+                          </a:solidFill>
+                        </a:defRPr>
+                      </a:pPr>
+                      <a:r>
+                        <a:t>Sepolia Testnet / Polygon</a:t>
+                      </a:r>
+                    </a:p>
+                  </a:txBody>
+                  <a:tcPr anchor="ctr" marL="73152" marR="73152" marT="45720" marB="45720">
+                    <a:solidFill>
+                      <a:srgbClr val="FFFFFF"/>
+                    </a:solidFill>
+                  </a:tcPr>
+                </a:tc>
+                <a:tc>
+                  <a:txBody>
+                    <a:bodyPr wrap="square"/>
+                    <a:lstStyle/>
+                    <a:p>
+                      <a:pPr algn="l">
+                        <a:defRPr sz="720" b="0">
+                          <a:solidFill>
+                            <a:srgbClr val="0284C7"/>
+                          </a:solidFill>
+                        </a:defRPr>
+                      </a:pPr>
+                      <a:r>
+                        <a:t>&lt;$0.15 (~₹12 total)</a:t>
+                      </a:r>
+                    </a:p>
+                  </a:txBody>
+                  <a:tcPr anchor="ctr" marL="73152" marR="73152" marT="45720" marB="45720">
+                    <a:solidFill>
+                      <a:srgbClr val="FFFFFF"/>
+                    </a:solidFill>
+                  </a:tcPr>
+                </a:tc>
+                <a:tc>
+                  <a:txBody>
+                    <a:bodyPr wrap="square"/>
+                    <a:lstStyle/>
+                    <a:p>
+                      <a:pPr algn="l">
+                        <a:defRPr sz="720" b="0">
+                          <a:solidFill>
+                            <a:srgbClr val="475569"/>
+                          </a:solidFill>
+                        </a:defRPr>
+                      </a:pPr>
+                      <a:r>
+                        <a:t>45k gas per 32-byte digest anchor</a:t>
+                      </a:r>
+                    </a:p>
+                  </a:txBody>
+                  <a:tcPr anchor="ctr" marL="73152" marR="73152" marT="45720" marB="45720">
+                    <a:solidFill>
+                      <a:srgbClr val="FFFFFF"/>
+                    </a:solidFill>
+                  </a:tcPr>
+                </a:tc>
+              </a:tr>
+              <a:tr h="388620">
+                <a:tc>
+                  <a:txBody>
+                    <a:bodyPr wrap="square"/>
+                    <a:lstStyle/>
+                    <a:p>
+                      <a:pPr algn="l">
+                        <a:defRPr sz="750" b="0">
+                          <a:solidFill>
+                            <a:srgbClr val="0B1220"/>
+                          </a:solidFill>
+                        </a:defRPr>
+                      </a:pPr>
+                      <a:r>
+                        <a:t>Compute Infrastructure</a:t>
+                      </a:r>
+                    </a:p>
+                  </a:txBody>
+                  <a:tcPr anchor="ctr" marL="73152" marR="73152" marT="45720" marB="45720">
+                    <a:solidFill>
+                      <a:srgbClr val="F8FAFC"/>
+                    </a:solidFill>
+                  </a:tcPr>
+                </a:tc>
+                <a:tc>
+                  <a:txBody>
+                    <a:bodyPr wrap="square"/>
+                    <a:lstStyle/>
+                    <a:p>
+                      <a:pPr algn="l">
+                        <a:defRPr sz="720" b="0">
+                          <a:solidFill>
+                            <a:srgbClr val="475569"/>
+                          </a:solidFill>
+                        </a:defRPr>
+                      </a:pPr>
+                      <a:r>
+                        <a:t>Cloud VPS (2 vCPU, 4GB)</a:t>
+                      </a:r>
+                    </a:p>
+                  </a:txBody>
+                  <a:tcPr anchor="ctr" marL="73152" marR="73152" marT="45720" marB="45720">
+                    <a:solidFill>
+                      <a:srgbClr val="F8FAFC"/>
+                    </a:solidFill>
+                  </a:tcPr>
+                </a:tc>
+                <a:tc>
+                  <a:txBody>
+                    <a:bodyPr wrap="square"/>
+                    <a:lstStyle/>
+                    <a:p>
+                      <a:pPr algn="l">
+                        <a:defRPr sz="720" b="0">
+                          <a:solidFill>
+                            <a:srgbClr val="0284C7"/>
+                          </a:solidFill>
+                        </a:defRPr>
+                      </a:pPr>
+                      <a:r>
+                        <a:t>~$15 – $25 / month</a:t>
+                      </a:r>
+                    </a:p>
+                  </a:txBody>
+                  <a:tcPr anchor="ctr" marL="73152" marR="73152" marT="45720" marB="45720">
+                    <a:solidFill>
+                      <a:srgbClr val="F8FAFC"/>
+                    </a:solidFill>
+                  </a:tcPr>
+                </a:tc>
+                <a:tc>
+                  <a:txBody>
+                    <a:bodyPr wrap="square"/>
+                    <a:lstStyle/>
+                    <a:p>
+                      <a:pPr algn="l">
+                        <a:defRPr sz="720" b="0">
+                          <a:solidFill>
+                            <a:srgbClr val="475569"/>
+                          </a:solidFill>
+                        </a:defRPr>
+                      </a:pPr>
+                      <a:r>
+                        <a:t>Horizontally scalable RQ workers</a:t>
+                      </a:r>
+                    </a:p>
+                  </a:txBody>
+                  <a:tcPr anchor="ctr" marL="73152" marR="73152" marT="45720" marB="45720">
+                    <a:solidFill>
+                      <a:srgbClr val="F8FAFC"/>
+                    </a:solidFill>
+                  </a:tcPr>
+                </a:tc>
+              </a:tr>
+              <a:tr h="388620">
+                <a:tc>
+                  <a:txBody>
+                    <a:bodyPr wrap="square"/>
+                    <a:lstStyle/>
+                    <a:p>
+                      <a:pPr algn="l">
+                        <a:defRPr sz="750" b="0">
+                          <a:solidFill>
+                            <a:srgbClr val="0B1220"/>
+                          </a:solidFill>
+                        </a:defRPr>
+                      </a:pPr>
+                      <a:r>
+                        <a:t>Vector &amp; Relational DB</a:t>
+                      </a:r>
+                    </a:p>
+                  </a:txBody>
+                  <a:tcPr anchor="ctr" marL="73152" marR="73152" marT="45720" marB="45720">
+                    <a:solidFill>
+                      <a:srgbClr val="FFFFFF"/>
+                    </a:solidFill>
+                  </a:tcPr>
+                </a:tc>
+                <a:tc>
+                  <a:txBody>
+                    <a:bodyPr wrap="square"/>
+                    <a:lstStyle/>
+                    <a:p>
+                      <a:pPr algn="l">
+                        <a:defRPr sz="720" b="0">
+                          <a:solidFill>
+                            <a:srgbClr val="475569"/>
+                          </a:solidFill>
+                        </a:defRPr>
+                      </a:pPr>
+                      <a:r>
+                        <a:t>PostgreSQL 16 + pgvector</a:t>
+                      </a:r>
+                    </a:p>
+                  </a:txBody>
+                  <a:tcPr anchor="ctr" marL="73152" marR="73152" marT="45720" marB="45720">
+                    <a:solidFill>
+                      <a:srgbClr val="FFFFFF"/>
+                    </a:solidFill>
+                  </a:tcPr>
+                </a:tc>
+                <a:tc>
+                  <a:txBody>
+                    <a:bodyPr wrap="square"/>
+                    <a:lstStyle/>
+                    <a:p>
+                      <a:pPr algn="l">
+                        <a:defRPr sz="720" b="0">
+                          <a:solidFill>
+                            <a:srgbClr val="0284C7"/>
+                          </a:solidFill>
+                        </a:defRPr>
+                      </a:pPr>
+                      <a:r>
+                        <a:t>~$0 – $25 / month</a:t>
+                      </a:r>
+                    </a:p>
+                  </a:txBody>
+                  <a:tcPr anchor="ctr" marL="73152" marR="73152" marT="45720" marB="45720">
+                    <a:solidFill>
+                      <a:srgbClr val="FFFFFF"/>
+                    </a:solidFill>
+                  </a:tcPr>
+                </a:tc>
+                <a:tc>
+                  <a:txBody>
+                    <a:bodyPr wrap="square"/>
+                    <a:lstStyle/>
+                    <a:p>
+                      <a:pPr algn="l">
+                        <a:defRPr sz="720" b="0">
+                          <a:solidFill>
+                            <a:srgbClr val="475569"/>
+                          </a:solidFill>
+                        </a:defRPr>
+                      </a:pPr>
+                      <a:r>
+                        <a:t>In-database HNSW cosine search</a:t>
+                      </a:r>
+                    </a:p>
+                  </a:txBody>
+                  <a:tcPr anchor="ctr" marL="73152" marR="73152" marT="45720" marB="45720">
+                    <a:solidFill>
+                      <a:srgbClr val="FFFFFF"/>
+                    </a:solidFill>
+                  </a:tcPr>
+                </a:tc>
+              </a:tr>
+              <a:tr h="388620">
+                <a:tc>
+                  <a:txBody>
+                    <a:bodyPr wrap="square"/>
+                    <a:lstStyle/>
+                    <a:p>
+                      <a:pPr algn="l">
+                        <a:defRPr sz="750" b="0">
+                          <a:solidFill>
+                            <a:srgbClr val="0B1220"/>
+                          </a:solidFill>
+                        </a:defRPr>
+                      </a:pPr>
+                      <a:r>
+                        <a:t>Object Storage (Artifacts)</a:t>
+                      </a:r>
+                    </a:p>
+                  </a:txBody>
+                  <a:tcPr anchor="ctr" marL="73152" marR="73152" marT="45720" marB="45720">
+                    <a:solidFill>
+                      <a:srgbClr val="F8FAFC"/>
+                    </a:solidFill>
+                  </a:tcPr>
+                </a:tc>
+                <a:tc>
+                  <a:txBody>
+                    <a:bodyPr wrap="square"/>
+                    <a:lstStyle/>
+                    <a:p>
+                      <a:pPr algn="l">
+                        <a:defRPr sz="720" b="0">
+                          <a:solidFill>
+                            <a:srgbClr val="475569"/>
+                          </a:solidFill>
+                        </a:defRPr>
+                      </a:pPr>
+                      <a:r>
+                        <a:t>MinIO / S3 on-premise</a:t>
+                      </a:r>
+                    </a:p>
+                  </a:txBody>
+                  <a:tcPr anchor="ctr" marL="73152" marR="73152" marT="45720" marB="45720">
+                    <a:solidFill>
+                      <a:srgbClr val="F8FAFC"/>
+                    </a:solidFill>
+                  </a:tcPr>
+                </a:tc>
+                <a:tc>
+                  <a:txBody>
+                    <a:bodyPr wrap="square"/>
+                    <a:lstStyle/>
+                    <a:p>
+                      <a:pPr algn="l">
+                        <a:defRPr sz="720" b="0">
+                          <a:solidFill>
+                            <a:srgbClr val="0284C7"/>
+                          </a:solidFill>
+                        </a:defRPr>
+                      </a:pPr>
+                      <a:r>
+                        <a:t>~$1 – $5 / month</a:t>
+                      </a:r>
+                    </a:p>
+                  </a:txBody>
+                  <a:tcPr anchor="ctr" marL="73152" marR="73152" marT="45720" marB="45720">
+                    <a:solidFill>
+                      <a:srgbClr val="F8FAFC"/>
+                    </a:solidFill>
+                  </a:tcPr>
+                </a:tc>
+                <a:tc>
+                  <a:txBody>
+                    <a:bodyPr wrap="square"/>
+                    <a:lstStyle/>
+                    <a:p>
+                      <a:pPr algn="l">
+                        <a:defRPr sz="720" b="0">
+                          <a:solidFill>
+                            <a:srgbClr val="475569"/>
+                          </a:solidFill>
+                        </a:defRPr>
+                      </a:pPr>
+                      <a:r>
+                        <a:t>Encrypted storage for PPTX/PDF/SVG</a:t>
+                      </a:r>
+                    </a:p>
+                  </a:txBody>
+                  <a:tcPr anchor="ctr" marL="73152" marR="73152" marT="45720" marB="45720">
+                    <a:solidFill>
+                      <a:srgbClr val="F8FAFC"/>
+                    </a:solidFill>
+                  </a:tcPr>
+                </a:tc>
+              </a:tr>
+              <a:tr h="388620">
+                <a:tc>
+                  <a:txBody>
+                    <a:bodyPr wrap="square"/>
+                    <a:lstStyle/>
+                    <a:p>
+                      <a:pPr algn="l">
+                        <a:defRPr sz="750" b="1">
+                          <a:solidFill>
+                            <a:srgbClr val="10B981"/>
+                          </a:solidFill>
+                        </a:defRPr>
+                      </a:pPr>
+                      <a:r>
+                        <a:t>TOTAL RUN COST</a:t>
+                      </a:r>
+                    </a:p>
+                  </a:txBody>
+                  <a:tcPr anchor="ctr" marL="73152" marR="73152" marT="45720" marB="45720">
+                    <a:solidFill>
+                      <a:srgbClr val="F0FDFA"/>
+                    </a:solidFill>
+                  </a:tcPr>
+                </a:tc>
+                <a:tc>
+                  <a:txBody>
+                    <a:bodyPr wrap="square"/>
+                    <a:lstStyle/>
+                    <a:p>
+                      <a:pPr algn="l">
+                        <a:defRPr sz="720" b="1">
+                          <a:solidFill>
+                            <a:srgbClr val="0B1220"/>
+                          </a:solidFill>
+                        </a:defRPr>
+                      </a:pPr>
+                      <a:r>
+                        <a:t>&lt; ₹0.25 / Document Run</a:t>
+                      </a:r>
+                    </a:p>
+                  </a:txBody>
+                  <a:tcPr anchor="ctr" marL="73152" marR="73152" marT="45720" marB="45720">
+                    <a:solidFill>
+                      <a:srgbClr val="F0FDFA"/>
+                    </a:solidFill>
+                  </a:tcPr>
+                </a:tc>
+                <a:tc>
+                  <a:txBody>
+                    <a:bodyPr wrap="square"/>
+                    <a:lstStyle/>
+                    <a:p>
+                      <a:pPr algn="l">
+                        <a:defRPr sz="720" b="1">
+                          <a:solidFill>
+                            <a:srgbClr val="10B981"/>
+                          </a:solidFill>
+                        </a:defRPr>
+                      </a:pPr>
+                      <a:r>
+                        <a:t>~$1.00 – $2.00 total</a:t>
+                      </a:r>
+                    </a:p>
+                  </a:txBody>
+                  <a:tcPr anchor="ctr" marL="73152" marR="73152" marT="45720" marB="45720">
+                    <a:solidFill>
+                      <a:srgbClr val="F0FDFA"/>
+                    </a:solidFill>
+                  </a:tcPr>
+                </a:tc>
+                <a:tc>
+                  <a:txBody>
+                    <a:bodyPr wrap="square"/>
+                    <a:lstStyle/>
+                    <a:p>
+                      <a:pPr algn="l">
+                        <a:defRPr sz="720" b="0">
+                          <a:solidFill>
+                            <a:srgbClr val="475569"/>
+                          </a:solidFill>
+                        </a:defRPr>
+                      </a:pPr>
+                      <a:r>
+                        <a:t>Massive &gt;98% cost savings vs manual</a:t>
+                      </a:r>
+                    </a:p>
+                  </a:txBody>
+                  <a:tcPr anchor="ctr" marL="73152" marR="73152" marT="45720" marB="45720">
+                    <a:solidFill>
+                      <a:srgbClr val="F0FDFA"/>
+                    </a:solidFill>
+                  </a:tcPr>
+                </a:tc>
+              </a:tr>
+            </a:tbl>
+          </a:graphicData>
+        </a:graphic>
+      </p:graphicFrame>
+      <p:sp>
+        <p:nvSpPr>
+          <p:cNvPr id="7" name="TextBox 6"/>
           <p:cNvSpPr txBox="1"/>
           <p:nvPr/>
         </p:nvSpPr>
         <p:spPr>
           <a:xfrm>
-            <a:off x="6355080" y="4133087"/>
-            <a:ext cx="4983480" cy="2148840"/>
+            <a:off x="841248" y="5029200"/>
+            <a:ext cx="5440680" cy="1280160"/>
           </a:xfrm>
           <a:prstGeom prst="rect">
             <a:avLst/>
@@ -6520,25 +10084,142 @@
           <a:noFill/>
         </p:spPr>
         <p:txBody>
-          <a:bodyPr wrap="square">
+          <a:bodyPr wrap="square" lIns="0" rIns="0" tIns="0" bIns="0">
             <a:spAutoFit/>
           </a:bodyPr>
           <a:lstStyle/>
           <a:p>
             <a:pPr>
-              <a:spcAft>
-                <a:spcPts val="600"/>
-              </a:spcAft>
-              <a:defRPr b="1" sz="1300">
-                <a:solidFill>
-                  <a:srgbClr val="7C3AED"/>
-                </a:solidFill>
-              </a:defRPr>
-            </a:pPr>
-            <a:r>
-              <a:t>FUTURE ROADMAP &amp; SYSTEM EXTENSIBILITY</a:t>
-            </a:r>
-          </a:p>
+              <a:defRPr sz="819">
+                <a:solidFill>
+                  <a:srgbClr val="0B1220"/>
+                </a:solidFill>
+              </a:defRPr>
+            </a:pPr>
+            <a:r>
+              <a:t>💰 Business ROI Impact: Manual human synthesis of 500 documents/month consumes ~250 hours costing ₹2,50,000+. With KaryaSetu AI, the identical volume completes in under 5 hours total review time at ~₹3,500 total infrastructure cost (&gt;95% operational ROI).</a:t>
+            </a:r>
+          </a:p>
+        </p:txBody>
+      </p:sp>
+      <p:sp>
+        <p:nvSpPr>
+          <p:cNvPr id="8" name="Rounded Rectangle 7"/>
+          <p:cNvSpPr/>
+          <p:nvPr/>
+        </p:nvSpPr>
+        <p:spPr>
+          <a:xfrm>
+            <a:off x="6583680" y="1325880"/>
+            <a:ext cx="4876495" cy="2423160"/>
+          </a:xfrm>
+          <a:prstGeom prst="roundRect">
+            <a:avLst/>
+          </a:prstGeom>
+          <a:solidFill>
+            <a:srgbClr val="FFFFFF"/>
+          </a:solidFill>
+          <a:ln w="15240">
+            <a:solidFill>
+              <a:srgbClr val="E2E8F0"/>
+            </a:solidFill>
+          </a:ln>
+        </p:spPr>
+        <p:style>
+          <a:lnRef idx="1">
+            <a:schemeClr val="accent1"/>
+          </a:lnRef>
+          <a:fillRef idx="3">
+            <a:schemeClr val="accent1"/>
+          </a:fillRef>
+          <a:effectRef idx="2">
+            <a:schemeClr val="accent1"/>
+          </a:effectRef>
+          <a:fontRef idx="minor">
+            <a:schemeClr val="lt1"/>
+          </a:fontRef>
+        </p:style>
+        <p:txBody>
+          <a:bodyPr rtlCol="0" anchor="ctr"/>
+          <a:lstStyle/>
+          <a:p>
+            <a:pPr algn="ctr"/>
+          </a:p>
+        </p:txBody>
+      </p:sp>
+      <p:sp>
+        <p:nvSpPr>
+          <p:cNvPr id="9" name="Rounded Rectangle 8"/>
+          <p:cNvSpPr/>
+          <p:nvPr/>
+        </p:nvSpPr>
+        <p:spPr>
+          <a:xfrm>
+            <a:off x="6720840" y="1444752"/>
+            <a:ext cx="3291840" cy="237744"/>
+          </a:xfrm>
+          <a:prstGeom prst="roundRect">
+            <a:avLst/>
+          </a:prstGeom>
+          <a:solidFill>
+            <a:srgbClr val="0284C7"/>
+          </a:solidFill>
+          <a:ln>
+            <a:noFill/>
+          </a:ln>
+        </p:spPr>
+        <p:style>
+          <a:lnRef idx="1">
+            <a:schemeClr val="accent1"/>
+          </a:lnRef>
+          <a:fillRef idx="3">
+            <a:schemeClr val="accent1"/>
+          </a:fillRef>
+          <a:effectRef idx="2">
+            <a:schemeClr val="accent1"/>
+          </a:effectRef>
+          <a:fontRef idx="minor">
+            <a:schemeClr val="lt1"/>
+          </a:fontRef>
+        </p:style>
+        <p:txBody>
+          <a:bodyPr rtlCol="0" anchor="ctr" wrap="none" lIns="0" tIns="0" rIns="0" bIns="0"/>
+          <a:lstStyle/>
+          <a:p>
+            <a:pPr algn="ctr">
+              <a:defRPr sz="850" b="1">
+                <a:solidFill>
+                  <a:srgbClr val="FFFFFF"/>
+                </a:solidFill>
+              </a:defRPr>
+            </a:pPr>
+            <a:r>
+              <a:t>QUANTIFIABLE INSTITUTIONAL IMPACT</a:t>
+            </a:r>
+          </a:p>
+        </p:txBody>
+      </p:sp>
+      <p:sp>
+        <p:nvSpPr>
+          <p:cNvPr id="10" name="TextBox 9"/>
+          <p:cNvSpPr txBox="1"/>
+          <p:nvPr/>
+        </p:nvSpPr>
+        <p:spPr>
+          <a:xfrm>
+            <a:off x="6720840" y="1755648"/>
+            <a:ext cx="4572000" cy="1920240"/>
+          </a:xfrm>
+          <a:prstGeom prst="rect">
+            <a:avLst/>
+          </a:prstGeom>
+          <a:noFill/>
+        </p:spPr>
+        <p:txBody>
+          <a:bodyPr wrap="square" lIns="0" rIns="0" tIns="0" bIns="0">
+            <a:spAutoFit/>
+          </a:bodyPr>
+          <a:lstStyle/>
           <a:p>
             <a:pPr>
               <a:spcAft>
@@ -6546,20 +10227,20 @@
               </a:spcAft>
             </a:pPr>
             <a:r>
-              <a:rPr b="1" sz="950">
-                <a:solidFill>
-                  <a:srgbClr val="0F172A"/>
+              <a:rPr b="1" sz="850">
+                <a:solidFill>
+                  <a:srgbClr val="0284C7"/>
                 </a:solidFill>
               </a:rPr>
-              <a:t>→ Extended Local Models: </a:t>
-            </a:r>
-            <a:r>
-              <a:rPr sz="900">
+              <a:t>★ 10x Acceleration in Synthesis: </a:t>
+            </a:r>
+            <a:r>
+              <a:rPr sz="800">
                 <a:solidFill>
                   <a:srgbClr val="475569"/>
                 </a:solidFill>
               </a:rPr>
-              <a:t>Plug-and-play provider registry architecture allows adding fine-tuned multilingual Indic LLMs (Sarvam, Bhashini).</a:t>
+              <a:t>Transforms 50+ page technical briefs into 7 audience deliverables in under 25 seconds.</a:t>
             </a:r>
           </a:p>
           <a:p>
@@ -6569,20 +10250,20 @@
               </a:spcAft>
             </a:pPr>
             <a:r>
-              <a:rPr b="1" sz="950">
-                <a:solidFill>
-                  <a:srgbClr val="0F172A"/>
+              <a:rPr b="1" sz="850">
+                <a:solidFill>
+                  <a:srgbClr val="0284C7"/>
                 </a:solidFill>
               </a:rPr>
-              <a:t>→ Live Blockchain Integration: </a:t>
-            </a:r>
-            <a:r>
-              <a:rPr sz="900">
+              <a:t>★ Zero Data Leakage Guarantee: </a:t>
+            </a:r>
+            <a:r>
+              <a:rPr sz="800">
                 <a:solidFill>
                   <a:srgbClr val="475569"/>
                 </a:solidFill>
               </a:rPr>
-              <a:t>Active RealLedger boundary designed to plug directly into Hyperledger Fabric or Polygon enterprise nodes for government audit.</a:t>
+              <a:t>Rigid deterministic policy enforcement prevents classified national intelligence from leaving sovereign infrastructure.</a:t>
             </a:r>
           </a:p>
           <a:p>
@@ -6592,20 +10273,20 @@
               </a:spcAft>
             </a:pPr>
             <a:r>
-              <a:rPr b="1" sz="950">
-                <a:solidFill>
-                  <a:srgbClr val="0F172A"/>
+              <a:rPr b="1" sz="850">
+                <a:solidFill>
+                  <a:srgbClr val="0284C7"/>
                 </a:solidFill>
               </a:rPr>
-              <a:t>→ Additional Output Formats: </a:t>
-            </a:r>
-            <a:r>
-              <a:rPr sz="900">
+              <a:t>★ Elimination of Multi-Channel Drift: </a:t>
+            </a:r>
+            <a:r>
+              <a:rPr sz="800">
                 <a:solidFill>
                   <a:srgbClr val="475569"/>
                 </a:solidFill>
               </a:rPr>
-              <a:t>Modular Generator ABC interface easily accommodates interactive dashboards, voice podcasts, and press releases.</a:t>
+              <a:t>All deliverables ground to a single canonical fact brief with automated NLI consistency cross-checks.</a:t>
             </a:r>
           </a:p>
           <a:p>
@@ -6615,20 +10296,255 @@
               </a:spcAft>
             </a:pPr>
             <a:r>
-              <a:rPr b="1" sz="950">
-                <a:solidFill>
-                  <a:srgbClr val="0F172A"/>
+              <a:rPr b="1" sz="850">
+                <a:solidFill>
+                  <a:srgbClr val="0284C7"/>
                 </a:solidFill>
               </a:rPr>
-              <a:t>→ Multi-Agency Dissemination: </a:t>
-            </a:r>
-            <a:r>
-              <a:rPr sz="900">
+              <a:t>★ Complete Tamper Detection: </a:t>
+            </a:r>
+            <a:r>
+              <a:rPr sz="800">
                 <a:solidFill>
                   <a:srgbClr val="475569"/>
                 </a:solidFill>
               </a:rPr>
-              <a:t>Configurable policy matrices support custom ministry approval chains and fine-grained department-level access rules.</a:t>
+              <a:t>Ethereum Sepolia smart contract anchoring ensures post-generation deliverable integrity.</a:t>
+            </a:r>
+          </a:p>
+        </p:txBody>
+      </p:sp>
+      <p:sp>
+        <p:nvSpPr>
+          <p:cNvPr id="11" name="Rounded Rectangle 10"/>
+          <p:cNvSpPr/>
+          <p:nvPr/>
+        </p:nvSpPr>
+        <p:spPr>
+          <a:xfrm>
+            <a:off x="6583680" y="3886200"/>
+            <a:ext cx="4876495" cy="2560320"/>
+          </a:xfrm>
+          <a:prstGeom prst="roundRect">
+            <a:avLst/>
+          </a:prstGeom>
+          <a:solidFill>
+            <a:srgbClr val="FFFFFF"/>
+          </a:solidFill>
+          <a:ln w="15240">
+            <a:solidFill>
+              <a:srgbClr val="E2E8F0"/>
+            </a:solidFill>
+          </a:ln>
+        </p:spPr>
+        <p:style>
+          <a:lnRef idx="1">
+            <a:schemeClr val="accent1"/>
+          </a:lnRef>
+          <a:fillRef idx="3">
+            <a:schemeClr val="accent1"/>
+          </a:fillRef>
+          <a:effectRef idx="2">
+            <a:schemeClr val="accent1"/>
+          </a:effectRef>
+          <a:fontRef idx="minor">
+            <a:schemeClr val="lt1"/>
+          </a:fontRef>
+        </p:style>
+        <p:txBody>
+          <a:bodyPr rtlCol="0" anchor="ctr"/>
+          <a:lstStyle/>
+          <a:p>
+            <a:pPr algn="ctr"/>
+          </a:p>
+        </p:txBody>
+      </p:sp>
+      <p:sp>
+        <p:nvSpPr>
+          <p:cNvPr id="12" name="Rounded Rectangle 11"/>
+          <p:cNvSpPr/>
+          <p:nvPr/>
+        </p:nvSpPr>
+        <p:spPr>
+          <a:xfrm>
+            <a:off x="6720840" y="4005072"/>
+            <a:ext cx="3291840" cy="237744"/>
+          </a:xfrm>
+          <a:prstGeom prst="roundRect">
+            <a:avLst/>
+          </a:prstGeom>
+          <a:solidFill>
+            <a:srgbClr val="0B1220"/>
+          </a:solidFill>
+          <a:ln>
+            <a:noFill/>
+          </a:ln>
+        </p:spPr>
+        <p:style>
+          <a:lnRef idx="1">
+            <a:schemeClr val="accent1"/>
+          </a:lnRef>
+          <a:fillRef idx="3">
+            <a:schemeClr val="accent1"/>
+          </a:fillRef>
+          <a:effectRef idx="2">
+            <a:schemeClr val="accent1"/>
+          </a:effectRef>
+          <a:fontRef idx="minor">
+            <a:schemeClr val="lt1"/>
+          </a:fontRef>
+        </p:style>
+        <p:txBody>
+          <a:bodyPr rtlCol="0" anchor="ctr" wrap="none" lIns="0" tIns="0" rIns="0" bIns="0"/>
+          <a:lstStyle/>
+          <a:p>
+            <a:pPr algn="ctr">
+              <a:defRPr sz="850" b="1">
+                <a:solidFill>
+                  <a:srgbClr val="FFFFFF"/>
+                </a:solidFill>
+              </a:defRPr>
+            </a:pPr>
+            <a:r>
+              <a:t>LIVE VERIFICATION LINKS &amp; CITED STANDARDS</a:t>
+            </a:r>
+          </a:p>
+        </p:txBody>
+      </p:sp>
+      <p:sp>
+        <p:nvSpPr>
+          <p:cNvPr id="13" name="TextBox 12"/>
+          <p:cNvSpPr txBox="1"/>
+          <p:nvPr/>
+        </p:nvSpPr>
+        <p:spPr>
+          <a:xfrm>
+            <a:off x="6720840" y="4315968"/>
+            <a:ext cx="4572000" cy="2057400"/>
+          </a:xfrm>
+          <a:prstGeom prst="rect">
+            <a:avLst/>
+          </a:prstGeom>
+          <a:noFill/>
+        </p:spPr>
+        <p:txBody>
+          <a:bodyPr wrap="square" lIns="0" rIns="0" tIns="0" bIns="0">
+            <a:spAutoFit/>
+          </a:bodyPr>
+          <a:lstStyle/>
+          <a:p>
+            <a:pPr>
+              <a:spcAft>
+                <a:spcPts val="300"/>
+              </a:spcAft>
+            </a:pPr>
+            <a:r>
+              <a:rPr b="1" sz="819">
+                <a:solidFill>
+                  <a:srgbClr val="0B1220"/>
+                </a:solidFill>
+              </a:rPr>
+              <a:t>🔗 Smart Contract (Sepolia Etherscan): </a:t>
+            </a:r>
+            <a:r>
+              <a:rPr sz="780" u="sng">
+                <a:solidFill>
+                  <a:srgbClr val="0284C7"/>
+                </a:solidFill>
+              </a:rPr>
+              <a:t>0x8AEf680b6891E7e3cAdCBD4a499AbA1310F87c08</a:t>
+            </a:r>
+          </a:p>
+          <a:p>
+            <a:pPr>
+              <a:spcAft>
+                <a:spcPts val="300"/>
+              </a:spcAft>
+            </a:pPr>
+            <a:r>
+              <a:rPr b="1" sz="819">
+                <a:solidFill>
+                  <a:srgbClr val="0B1220"/>
+                </a:solidFill>
+              </a:rPr>
+              <a:t>🔗 Relayer Signer Identity: </a:t>
+            </a:r>
+            <a:r>
+              <a:rPr sz="780" u="sng">
+                <a:solidFill>
+                  <a:srgbClr val="0284C7"/>
+                </a:solidFill>
+              </a:rPr>
+              <a:t>0x460bb6AE2AD8a515d5E2886c69b78d8e3C2FBc41</a:t>
+            </a:r>
+          </a:p>
+          <a:p>
+            <a:pPr>
+              <a:spcAft>
+                <a:spcPts val="300"/>
+              </a:spcAft>
+            </a:pPr>
+            <a:r>
+              <a:rPr b="1" sz="819">
+                <a:solidFill>
+                  <a:srgbClr val="0B1220"/>
+                </a:solidFill>
+              </a:rPr>
+              <a:t>🔗 GitHub Repository: </a:t>
+            </a:r>
+            <a:r>
+              <a:rPr sz="780" u="sng">
+                <a:solidFill>
+                  <a:srgbClr val="0284C7"/>
+                </a:solidFill>
+              </a:rPr>
+              <a:t>https://github.com/KetanGaikwadKRG/KaryaSetu</a:t>
+            </a:r>
+          </a:p>
+          <a:p>
+            <a:pPr>
+              <a:spcAft>
+                <a:spcPts val="300"/>
+              </a:spcAft>
+            </a:pPr>
+            <a:r>
+              <a:rPr b="1" sz="819">
+                <a:solidFill>
+                  <a:srgbClr val="0B1220"/>
+                </a:solidFill>
+              </a:rPr>
+              <a:t>🔗 Official Evaluation Video: </a:t>
+            </a:r>
+            <a:r>
+              <a:rPr sz="780" u="sng">
+                <a:solidFill>
+                  <a:srgbClr val="0284C7"/>
+                </a:solidFill>
+              </a:rPr>
+              <a:t>https://youtu.be/Lhi1ssHBfUk?si=T5bIOl2TWDeIf7DJ</a:t>
+            </a:r>
+          </a:p>
+          <a:p>
+            <a:pPr>
+              <a:spcAft>
+                <a:spcPts val="300"/>
+              </a:spcAft>
+            </a:pPr>
+            <a:r>
+              <a:rPr b="1" sz="819">
+                <a:solidFill>
+                  <a:srgbClr val="0B1220"/>
+                </a:solidFill>
+              </a:rPr>
+              <a:t>🔗 Cited Standards &amp; Literature: </a:t>
+            </a:r>
+            <a:r>
+              <a:rPr sz="780">
+                <a:solidFill>
+                  <a:srgbClr val="475569"/>
+                </a:solidFill>
+              </a:rPr>
+              <a:t>NIST SP 800-207 (Zero Trust) • RFC 8032 (Ed25519) • W3C PROV-DM • IT Act Section 70</a:t>
             </a:r>
           </a:p>
         </p:txBody>
